--- a/migration/Immigration.pptx
+++ b/migration/Immigration.pptx
@@ -4,16 +4,22 @@
   <p:sldMasterIdLst>
     <p:sldMasterId id="2147483696" r:id="rId1"/>
   </p:sldMasterIdLst>
+  <p:notesMasterIdLst>
+    <p:notesMasterId r:id="rId14"/>
+  </p:notesMasterIdLst>
   <p:sldIdLst>
     <p:sldId id="256" r:id="rId2"/>
     <p:sldId id="257" r:id="rId3"/>
     <p:sldId id="258" r:id="rId4"/>
     <p:sldId id="259" r:id="rId5"/>
     <p:sldId id="260" r:id="rId6"/>
-    <p:sldId id="261" r:id="rId7"/>
-    <p:sldId id="262" r:id="rId8"/>
-    <p:sldId id="263" r:id="rId9"/>
-    <p:sldId id="264" r:id="rId10"/>
+    <p:sldId id="265" r:id="rId7"/>
+    <p:sldId id="266" r:id="rId8"/>
+    <p:sldId id="267" r:id="rId9"/>
+    <p:sldId id="261" r:id="rId10"/>
+    <p:sldId id="262" r:id="rId11"/>
+    <p:sldId id="263" r:id="rId12"/>
+    <p:sldId id="264" r:id="rId13"/>
   </p:sldIdLst>
   <p:sldSz cx="12192000" cy="6858000"/>
   <p:notesSz cx="6858000" cy="9144000"/>
@@ -112,7 +118,446 @@
       </a:defRPr>
     </a:lvl9pPr>
   </p:defaultTextStyle>
+  <p:extLst>
+    <p:ext uri="{EFAFB233-063F-42B5-8137-9DF3F51BA10A}">
+      <p15:sldGuideLst xmlns:p15="http://schemas.microsoft.com/office/powerpoint/2012/main"/>
+    </p:ext>
+  </p:extLst>
 </p:presentation>
+</file>
+
+<file path=ppt/notesMasters/notesMaster1.xml><?xml version="1.0" encoding="utf-8"?>
+<p:notesMaster xmlns:a="http://schemas.openxmlformats.org/drawingml/2006/main" xmlns:r="http://schemas.openxmlformats.org/officeDocument/2006/relationships" xmlns:p="http://schemas.openxmlformats.org/presentationml/2006/main">
+  <p:cSld>
+    <p:bg>
+      <p:bgRef idx="1001">
+        <a:schemeClr val="bg1"/>
+      </p:bgRef>
+    </p:bg>
+    <p:spTree>
+      <p:nvGrpSpPr>
+        <p:cNvPr id="1" name=""/>
+        <p:cNvGrpSpPr/>
+        <p:nvPr/>
+      </p:nvGrpSpPr>
+      <p:grpSpPr>
+        <a:xfrm>
+          <a:off x="0" y="0"/>
+          <a:ext cx="0" cy="0"/>
+          <a:chOff x="0" y="0"/>
+          <a:chExt cx="0" cy="0"/>
+        </a:xfrm>
+      </p:grpSpPr>
+      <p:sp>
+        <p:nvSpPr>
+          <p:cNvPr id="2" name="Header Placeholder 1"/>
+          <p:cNvSpPr>
+            <a:spLocks noGrp="1"/>
+          </p:cNvSpPr>
+          <p:nvPr>
+            <p:ph type="hdr" sz="quarter"/>
+          </p:nvPr>
+        </p:nvSpPr>
+        <p:spPr>
+          <a:xfrm>
+            <a:off x="0" y="0"/>
+            <a:ext cx="2971800" cy="458788"/>
+          </a:xfrm>
+          <a:prstGeom prst="rect">
+            <a:avLst/>
+          </a:prstGeom>
+        </p:spPr>
+        <p:txBody>
+          <a:bodyPr vert="horz" lIns="91440" tIns="45720" rIns="91440" bIns="45720" rtlCol="0"/>
+          <a:lstStyle>
+            <a:lvl1pPr algn="l">
+              <a:defRPr sz="1200"/>
+            </a:lvl1pPr>
+          </a:lstStyle>
+          <a:p>
+            <a:endParaRPr lang="en-US"/>
+          </a:p>
+        </p:txBody>
+      </p:sp>
+      <p:sp>
+        <p:nvSpPr>
+          <p:cNvPr id="3" name="Date Placeholder 2"/>
+          <p:cNvSpPr>
+            <a:spLocks noGrp="1"/>
+          </p:cNvSpPr>
+          <p:nvPr>
+            <p:ph type="dt" idx="1"/>
+          </p:nvPr>
+        </p:nvSpPr>
+        <p:spPr>
+          <a:xfrm>
+            <a:off x="3884613" y="0"/>
+            <a:ext cx="2971800" cy="458788"/>
+          </a:xfrm>
+          <a:prstGeom prst="rect">
+            <a:avLst/>
+          </a:prstGeom>
+        </p:spPr>
+        <p:txBody>
+          <a:bodyPr vert="horz" lIns="91440" tIns="45720" rIns="91440" bIns="45720" rtlCol="0"/>
+          <a:lstStyle>
+            <a:lvl1pPr algn="r">
+              <a:defRPr sz="1200"/>
+            </a:lvl1pPr>
+          </a:lstStyle>
+          <a:p>
+            <a:fld id="{CE8F3100-E310-4E80-9CFD-84884B312F6C}" type="datetimeFigureOut">
+              <a:rPr lang="en-US" smtClean="0"/>
+              <a:t>12/22/2025</a:t>
+            </a:fld>
+            <a:endParaRPr lang="en-US"/>
+          </a:p>
+        </p:txBody>
+      </p:sp>
+      <p:sp>
+        <p:nvSpPr>
+          <p:cNvPr id="4" name="Slide Image Placeholder 3"/>
+          <p:cNvSpPr>
+            <a:spLocks noGrp="1" noRot="1" noChangeAspect="1"/>
+          </p:cNvSpPr>
+          <p:nvPr>
+            <p:ph type="sldImg" idx="2"/>
+          </p:nvPr>
+        </p:nvSpPr>
+        <p:spPr>
+          <a:xfrm>
+            <a:off x="685800" y="1143000"/>
+            <a:ext cx="5486400" cy="3086100"/>
+          </a:xfrm>
+          <a:prstGeom prst="rect">
+            <a:avLst/>
+          </a:prstGeom>
+          <a:noFill/>
+          <a:ln w="12700">
+            <a:solidFill>
+              <a:prstClr val="black"/>
+            </a:solidFill>
+          </a:ln>
+        </p:spPr>
+        <p:txBody>
+          <a:bodyPr vert="horz" lIns="91440" tIns="45720" rIns="91440" bIns="45720" rtlCol="0" anchor="ctr"/>
+          <a:lstStyle/>
+          <a:p>
+            <a:endParaRPr lang="en-US"/>
+          </a:p>
+        </p:txBody>
+      </p:sp>
+      <p:sp>
+        <p:nvSpPr>
+          <p:cNvPr id="5" name="Notes Placeholder 4"/>
+          <p:cNvSpPr>
+            <a:spLocks noGrp="1"/>
+          </p:cNvSpPr>
+          <p:nvPr>
+            <p:ph type="body" sz="quarter" idx="3"/>
+          </p:nvPr>
+        </p:nvSpPr>
+        <p:spPr>
+          <a:xfrm>
+            <a:off x="685800" y="4400550"/>
+            <a:ext cx="5486400" cy="3600450"/>
+          </a:xfrm>
+          <a:prstGeom prst="rect">
+            <a:avLst/>
+          </a:prstGeom>
+        </p:spPr>
+        <p:txBody>
+          <a:bodyPr vert="horz" lIns="91440" tIns="45720" rIns="91440" bIns="45720" rtlCol="0"/>
+          <a:lstStyle/>
+          <a:p>
+            <a:pPr lvl="0"/>
+            <a:r>
+              <a:rPr lang="en-US" smtClean="0"/>
+              <a:t>Edit Master text styles</a:t>
+            </a:r>
+          </a:p>
+          <a:p>
+            <a:pPr lvl="1"/>
+            <a:r>
+              <a:rPr lang="en-US" smtClean="0"/>
+              <a:t>Second level</a:t>
+            </a:r>
+          </a:p>
+          <a:p>
+            <a:pPr lvl="2"/>
+            <a:r>
+              <a:rPr lang="en-US" smtClean="0"/>
+              <a:t>Third level</a:t>
+            </a:r>
+          </a:p>
+          <a:p>
+            <a:pPr lvl="3"/>
+            <a:r>
+              <a:rPr lang="en-US" smtClean="0"/>
+              <a:t>Fourth level</a:t>
+            </a:r>
+          </a:p>
+          <a:p>
+            <a:pPr lvl="4"/>
+            <a:r>
+              <a:rPr lang="en-US" smtClean="0"/>
+              <a:t>Fifth level</a:t>
+            </a:r>
+            <a:endParaRPr lang="en-US"/>
+          </a:p>
+        </p:txBody>
+      </p:sp>
+      <p:sp>
+        <p:nvSpPr>
+          <p:cNvPr id="6" name="Footer Placeholder 5"/>
+          <p:cNvSpPr>
+            <a:spLocks noGrp="1"/>
+          </p:cNvSpPr>
+          <p:nvPr>
+            <p:ph type="ftr" sz="quarter" idx="4"/>
+          </p:nvPr>
+        </p:nvSpPr>
+        <p:spPr>
+          <a:xfrm>
+            <a:off x="0" y="8685213"/>
+            <a:ext cx="2971800" cy="458787"/>
+          </a:xfrm>
+          <a:prstGeom prst="rect">
+            <a:avLst/>
+          </a:prstGeom>
+        </p:spPr>
+        <p:txBody>
+          <a:bodyPr vert="horz" lIns="91440" tIns="45720" rIns="91440" bIns="45720" rtlCol="0" anchor="b"/>
+          <a:lstStyle>
+            <a:lvl1pPr algn="l">
+              <a:defRPr sz="1200"/>
+            </a:lvl1pPr>
+          </a:lstStyle>
+          <a:p>
+            <a:endParaRPr lang="en-US"/>
+          </a:p>
+        </p:txBody>
+      </p:sp>
+      <p:sp>
+        <p:nvSpPr>
+          <p:cNvPr id="7" name="Slide Number Placeholder 6"/>
+          <p:cNvSpPr>
+            <a:spLocks noGrp="1"/>
+          </p:cNvSpPr>
+          <p:nvPr>
+            <p:ph type="sldNum" sz="quarter" idx="5"/>
+          </p:nvPr>
+        </p:nvSpPr>
+        <p:spPr>
+          <a:xfrm>
+            <a:off x="3884613" y="8685213"/>
+            <a:ext cx="2971800" cy="458787"/>
+          </a:xfrm>
+          <a:prstGeom prst="rect">
+            <a:avLst/>
+          </a:prstGeom>
+        </p:spPr>
+        <p:txBody>
+          <a:bodyPr vert="horz" lIns="91440" tIns="45720" rIns="91440" bIns="45720" rtlCol="0" anchor="b"/>
+          <a:lstStyle>
+            <a:lvl1pPr algn="r">
+              <a:defRPr sz="1200"/>
+            </a:lvl1pPr>
+          </a:lstStyle>
+          <a:p>
+            <a:fld id="{55709A9D-E86D-4E63-BCC7-B412590BE609}" type="slidenum">
+              <a:rPr lang="en-US" smtClean="0"/>
+              <a:t>‹#›</a:t>
+            </a:fld>
+            <a:endParaRPr lang="en-US"/>
+          </a:p>
+        </p:txBody>
+      </p:sp>
+    </p:spTree>
+    <p:extLst>
+      <p:ext uri="{BB962C8B-B14F-4D97-AF65-F5344CB8AC3E}">
+        <p14:creationId xmlns:p14="http://schemas.microsoft.com/office/powerpoint/2010/main" val="164570423"/>
+      </p:ext>
+    </p:extLst>
+  </p:cSld>
+  <p:clrMap bg1="lt1" tx1="dk1" bg2="lt2" tx2="dk2" accent1="accent1" accent2="accent2" accent3="accent3" accent4="accent4" accent5="accent5" accent6="accent6" hlink="hlink" folHlink="folHlink"/>
+  <p:notesStyle>
+    <a:lvl1pPr marL="0" algn="l" defTabSz="914400" rtl="0" eaLnBrk="1" latinLnBrk="0" hangingPunct="1">
+      <a:defRPr sz="1200" kern="1200">
+        <a:solidFill>
+          <a:schemeClr val="tx1"/>
+        </a:solidFill>
+        <a:latin typeface="+mn-lt"/>
+        <a:ea typeface="+mn-ea"/>
+        <a:cs typeface="+mn-cs"/>
+      </a:defRPr>
+    </a:lvl1pPr>
+    <a:lvl2pPr marL="457200" algn="l" defTabSz="914400" rtl="0" eaLnBrk="1" latinLnBrk="0" hangingPunct="1">
+      <a:defRPr sz="1200" kern="1200">
+        <a:solidFill>
+          <a:schemeClr val="tx1"/>
+        </a:solidFill>
+        <a:latin typeface="+mn-lt"/>
+        <a:ea typeface="+mn-ea"/>
+        <a:cs typeface="+mn-cs"/>
+      </a:defRPr>
+    </a:lvl2pPr>
+    <a:lvl3pPr marL="914400" algn="l" defTabSz="914400" rtl="0" eaLnBrk="1" latinLnBrk="0" hangingPunct="1">
+      <a:defRPr sz="1200" kern="1200">
+        <a:solidFill>
+          <a:schemeClr val="tx1"/>
+        </a:solidFill>
+        <a:latin typeface="+mn-lt"/>
+        <a:ea typeface="+mn-ea"/>
+        <a:cs typeface="+mn-cs"/>
+      </a:defRPr>
+    </a:lvl3pPr>
+    <a:lvl4pPr marL="1371600" algn="l" defTabSz="914400" rtl="0" eaLnBrk="1" latinLnBrk="0" hangingPunct="1">
+      <a:defRPr sz="1200" kern="1200">
+        <a:solidFill>
+          <a:schemeClr val="tx1"/>
+        </a:solidFill>
+        <a:latin typeface="+mn-lt"/>
+        <a:ea typeface="+mn-ea"/>
+        <a:cs typeface="+mn-cs"/>
+      </a:defRPr>
+    </a:lvl4pPr>
+    <a:lvl5pPr marL="1828800" algn="l" defTabSz="914400" rtl="0" eaLnBrk="1" latinLnBrk="0" hangingPunct="1">
+      <a:defRPr sz="1200" kern="1200">
+        <a:solidFill>
+          <a:schemeClr val="tx1"/>
+        </a:solidFill>
+        <a:latin typeface="+mn-lt"/>
+        <a:ea typeface="+mn-ea"/>
+        <a:cs typeface="+mn-cs"/>
+      </a:defRPr>
+    </a:lvl5pPr>
+    <a:lvl6pPr marL="2286000" algn="l" defTabSz="914400" rtl="0" eaLnBrk="1" latinLnBrk="0" hangingPunct="1">
+      <a:defRPr sz="1200" kern="1200">
+        <a:solidFill>
+          <a:schemeClr val="tx1"/>
+        </a:solidFill>
+        <a:latin typeface="+mn-lt"/>
+        <a:ea typeface="+mn-ea"/>
+        <a:cs typeface="+mn-cs"/>
+      </a:defRPr>
+    </a:lvl6pPr>
+    <a:lvl7pPr marL="2743200" algn="l" defTabSz="914400" rtl="0" eaLnBrk="1" latinLnBrk="0" hangingPunct="1">
+      <a:defRPr sz="1200" kern="1200">
+        <a:solidFill>
+          <a:schemeClr val="tx1"/>
+        </a:solidFill>
+        <a:latin typeface="+mn-lt"/>
+        <a:ea typeface="+mn-ea"/>
+        <a:cs typeface="+mn-cs"/>
+      </a:defRPr>
+    </a:lvl7pPr>
+    <a:lvl8pPr marL="3200400" algn="l" defTabSz="914400" rtl="0" eaLnBrk="1" latinLnBrk="0" hangingPunct="1">
+      <a:defRPr sz="1200" kern="1200">
+        <a:solidFill>
+          <a:schemeClr val="tx1"/>
+        </a:solidFill>
+        <a:latin typeface="+mn-lt"/>
+        <a:ea typeface="+mn-ea"/>
+        <a:cs typeface="+mn-cs"/>
+      </a:defRPr>
+    </a:lvl8pPr>
+    <a:lvl9pPr marL="3657600" algn="l" defTabSz="914400" rtl="0" eaLnBrk="1" latinLnBrk="0" hangingPunct="1">
+      <a:defRPr sz="1200" kern="1200">
+        <a:solidFill>
+          <a:schemeClr val="tx1"/>
+        </a:solidFill>
+        <a:latin typeface="+mn-lt"/>
+        <a:ea typeface="+mn-ea"/>
+        <a:cs typeface="+mn-cs"/>
+      </a:defRPr>
+    </a:lvl9pPr>
+  </p:notesStyle>
+</p:notesMaster>
+</file>
+
+<file path=ppt/notesSlides/notesSlide1.xml><?xml version="1.0" encoding="utf-8"?>
+<p:notes xmlns:a="http://schemas.openxmlformats.org/drawingml/2006/main" xmlns:r="http://schemas.openxmlformats.org/officeDocument/2006/relationships" xmlns:p="http://schemas.openxmlformats.org/presentationml/2006/main">
+  <p:cSld>
+    <p:spTree>
+      <p:nvGrpSpPr>
+        <p:cNvPr id="1" name=""/>
+        <p:cNvGrpSpPr/>
+        <p:nvPr/>
+      </p:nvGrpSpPr>
+      <p:grpSpPr>
+        <a:xfrm>
+          <a:off x="0" y="0"/>
+          <a:ext cx="0" cy="0"/>
+          <a:chOff x="0" y="0"/>
+          <a:chExt cx="0" cy="0"/>
+        </a:xfrm>
+      </p:grpSpPr>
+      <p:sp>
+        <p:nvSpPr>
+          <p:cNvPr id="2" name="Slide Image Placeholder 1"/>
+          <p:cNvSpPr>
+            <a:spLocks noGrp="1" noRot="1" noChangeAspect="1"/>
+          </p:cNvSpPr>
+          <p:nvPr>
+            <p:ph type="sldImg"/>
+          </p:nvPr>
+        </p:nvSpPr>
+        <p:spPr/>
+      </p:sp>
+      <p:sp>
+        <p:nvSpPr>
+          <p:cNvPr id="3" name="Notes Placeholder 2"/>
+          <p:cNvSpPr>
+            <a:spLocks noGrp="1"/>
+          </p:cNvSpPr>
+          <p:nvPr>
+            <p:ph type="body" idx="1"/>
+          </p:nvPr>
+        </p:nvSpPr>
+        <p:spPr/>
+        <p:txBody>
+          <a:bodyPr/>
+          <a:lstStyle/>
+          <a:p>
+            <a:endParaRPr lang="en-US" dirty="0"/>
+          </a:p>
+        </p:txBody>
+      </p:sp>
+      <p:sp>
+        <p:nvSpPr>
+          <p:cNvPr id="4" name="Slide Number Placeholder 3"/>
+          <p:cNvSpPr>
+            <a:spLocks noGrp="1"/>
+          </p:cNvSpPr>
+          <p:nvPr>
+            <p:ph type="sldNum" sz="quarter" idx="10"/>
+          </p:nvPr>
+        </p:nvSpPr>
+        <p:spPr/>
+        <p:txBody>
+          <a:bodyPr/>
+          <a:lstStyle/>
+          <a:p>
+            <a:fld id="{55709A9D-E86D-4E63-BCC7-B412590BE609}" type="slidenum">
+              <a:rPr lang="en-US" smtClean="0"/>
+              <a:t>7</a:t>
+            </a:fld>
+            <a:endParaRPr lang="en-US"/>
+          </a:p>
+        </p:txBody>
+      </p:sp>
+    </p:spTree>
+    <p:extLst>
+      <p:ext uri="{BB962C8B-B14F-4D97-AF65-F5344CB8AC3E}">
+        <p14:creationId xmlns:p14="http://schemas.microsoft.com/office/powerpoint/2010/main" val="1853408953"/>
+      </p:ext>
+    </p:extLst>
+  </p:cSld>
+  <p:clrMapOvr>
+    <a:masterClrMapping/>
+  </p:clrMapOvr>
+</p:notes>
 </file>
 
 <file path=ppt/slideLayouts/slideLayout1.xml><?xml version="1.0" encoding="utf-8"?>
@@ -286,7 +731,7 @@
           <a:p>
             <a:fld id="{5B36B1D5-9E1A-48C0-967B-69F993E2477C}" type="datetimeFigureOut">
               <a:rPr lang="en-US" smtClean="0"/>
-              <a:t>12/20/2025</a:t>
+              <a:t>12/22/2025</a:t>
             </a:fld>
             <a:endParaRPr lang="en-US"/>
           </a:p>
@@ -598,7 +1043,7 @@
           <a:p>
             <a:fld id="{5B36B1D5-9E1A-48C0-967B-69F993E2477C}" type="datetimeFigureOut">
               <a:rPr lang="en-US" smtClean="0"/>
-              <a:t>12/20/2025</a:t>
+              <a:t>12/22/2025</a:t>
             </a:fld>
             <a:endParaRPr lang="en-US"/>
           </a:p>
@@ -820,7 +1265,7 @@
           <a:p>
             <a:fld id="{5B36B1D5-9E1A-48C0-967B-69F993E2477C}" type="datetimeFigureOut">
               <a:rPr lang="en-US" smtClean="0"/>
-              <a:t>12/20/2025</a:t>
+              <a:t>12/22/2025</a:t>
             </a:fld>
             <a:endParaRPr lang="en-US"/>
           </a:p>
@@ -1111,7 +1556,7 @@
           <a:p>
             <a:fld id="{5B36B1D5-9E1A-48C0-967B-69F993E2477C}" type="datetimeFigureOut">
               <a:rPr lang="en-US" smtClean="0"/>
-              <a:t>12/20/2025</a:t>
+              <a:t>12/22/2025</a:t>
             </a:fld>
             <a:endParaRPr lang="en-US"/>
           </a:p>
@@ -1565,7 +2010,7 @@
           <a:p>
             <a:fld id="{5B36B1D5-9E1A-48C0-967B-69F993E2477C}" type="datetimeFigureOut">
               <a:rPr lang="en-US" smtClean="0"/>
-              <a:t>12/20/2025</a:t>
+              <a:t>12/22/2025</a:t>
             </a:fld>
             <a:endParaRPr lang="en-US"/>
           </a:p>
@@ -2141,7 +2586,7 @@
           <a:p>
             <a:fld id="{5B36B1D5-9E1A-48C0-967B-69F993E2477C}" type="datetimeFigureOut">
               <a:rPr lang="en-US" smtClean="0"/>
-              <a:t>12/20/2025</a:t>
+              <a:t>12/22/2025</a:t>
             </a:fld>
             <a:endParaRPr lang="en-US"/>
           </a:p>
@@ -2993,7 +3438,7 @@
           <a:p>
             <a:fld id="{5B36B1D5-9E1A-48C0-967B-69F993E2477C}" type="datetimeFigureOut">
               <a:rPr lang="en-US" smtClean="0"/>
-              <a:t>12/20/2025</a:t>
+              <a:t>12/22/2025</a:t>
             </a:fld>
             <a:endParaRPr lang="en-US"/>
           </a:p>
@@ -3198,7 +3643,7 @@
           <a:p>
             <a:fld id="{5B36B1D5-9E1A-48C0-967B-69F993E2477C}" type="datetimeFigureOut">
               <a:rPr lang="en-US" smtClean="0"/>
-              <a:t>12/20/2025</a:t>
+              <a:t>12/22/2025</a:t>
             </a:fld>
             <a:endParaRPr lang="en-US"/>
           </a:p>
@@ -3412,7 +3857,7 @@
           <a:p>
             <a:fld id="{5B36B1D5-9E1A-48C0-967B-69F993E2477C}" type="datetimeFigureOut">
               <a:rPr lang="en-US" smtClean="0"/>
-              <a:t>12/20/2025</a:t>
+              <a:t>12/22/2025</a:t>
             </a:fld>
             <a:endParaRPr lang="en-US"/>
           </a:p>
@@ -3617,7 +4062,7 @@
           <a:p>
             <a:fld id="{5B36B1D5-9E1A-48C0-967B-69F993E2477C}" type="datetimeFigureOut">
               <a:rPr lang="en-US" smtClean="0"/>
-              <a:t>12/20/2025</a:t>
+              <a:t>12/22/2025</a:t>
             </a:fld>
             <a:endParaRPr lang="en-US"/>
           </a:p>
@@ -3897,7 +4342,7 @@
           <a:p>
             <a:fld id="{5B36B1D5-9E1A-48C0-967B-69F993E2477C}" type="datetimeFigureOut">
               <a:rPr lang="en-US" smtClean="0"/>
-              <a:t>12/20/2025</a:t>
+              <a:t>12/22/2025</a:t>
             </a:fld>
             <a:endParaRPr lang="en-US"/>
           </a:p>
@@ -4164,7 +4609,7 @@
           <a:p>
             <a:fld id="{5B36B1D5-9E1A-48C0-967B-69F993E2477C}" type="datetimeFigureOut">
               <a:rPr lang="en-US" smtClean="0"/>
-              <a:t>12/20/2025</a:t>
+              <a:t>12/22/2025</a:t>
             </a:fld>
             <a:endParaRPr lang="en-US"/>
           </a:p>
@@ -4579,7 +5024,7 @@
           <a:p>
             <a:fld id="{5B36B1D5-9E1A-48C0-967B-69F993E2477C}" type="datetimeFigureOut">
               <a:rPr lang="en-US" smtClean="0"/>
-              <a:t>12/20/2025</a:t>
+              <a:t>12/22/2025</a:t>
             </a:fld>
             <a:endParaRPr lang="en-US"/>
           </a:p>
@@ -4727,7 +5172,7 @@
           <a:p>
             <a:fld id="{5B36B1D5-9E1A-48C0-967B-69F993E2477C}" type="datetimeFigureOut">
               <a:rPr lang="en-US" smtClean="0"/>
-              <a:t>12/20/2025</a:t>
+              <a:t>12/22/2025</a:t>
             </a:fld>
             <a:endParaRPr lang="en-US"/>
           </a:p>
@@ -4852,7 +5297,7 @@
           <a:p>
             <a:fld id="{5B36B1D5-9E1A-48C0-967B-69F993E2477C}" type="datetimeFigureOut">
               <a:rPr lang="en-US" smtClean="0"/>
-              <a:t>12/20/2025</a:t>
+              <a:t>12/22/2025</a:t>
             </a:fld>
             <a:endParaRPr lang="en-US"/>
           </a:p>
@@ -5131,7 +5576,7 @@
           <a:p>
             <a:fld id="{5B36B1D5-9E1A-48C0-967B-69F993E2477C}" type="datetimeFigureOut">
               <a:rPr lang="en-US" smtClean="0"/>
-              <a:t>12/20/2025</a:t>
+              <a:t>12/22/2025</a:t>
             </a:fld>
             <a:endParaRPr lang="en-US"/>
           </a:p>
@@ -5443,7 +5888,7 @@
           <a:p>
             <a:fld id="{5B36B1D5-9E1A-48C0-967B-69F993E2477C}" type="datetimeFigureOut">
               <a:rPr lang="en-US" smtClean="0"/>
-              <a:t>12/20/2025</a:t>
+              <a:t>12/22/2025</a:t>
             </a:fld>
             <a:endParaRPr lang="en-US"/>
           </a:p>
@@ -5696,7 +6141,7 @@
           <a:p>
             <a:fld id="{5B36B1D5-9E1A-48C0-967B-69F993E2477C}" type="datetimeFigureOut">
               <a:rPr lang="en-US" smtClean="0"/>
-              <a:t>12/20/2025</a:t>
+              <a:t>12/22/2025</a:t>
             </a:fld>
             <a:endParaRPr lang="en-US"/>
           </a:p>
@@ -6150,7 +6595,12 @@
             <p:ph type="title"/>
           </p:nvPr>
         </p:nvSpPr>
-        <p:spPr/>
+        <p:spPr>
+          <a:xfrm>
+            <a:off x="1016000" y="618517"/>
+            <a:ext cx="10576559" cy="1596177"/>
+          </a:xfrm>
+        </p:spPr>
         <p:txBody>
           <a:bodyPr>
             <a:normAutofit/>
@@ -6159,22 +6609,22 @@
           <a:p>
             <a:pPr algn="l"/>
             <a:r>
-              <a:rPr lang="en-US" dirty="0"/>
+              <a:rPr lang="en-US" sz="3200" b="1" dirty="0"/>
               <a:t>Status of Immigration: A Case Study of </a:t>
             </a:r>
             <a:r>
-              <a:rPr lang="en-US" dirty="0" err="1"/>
+              <a:rPr lang="en-US" sz="3200" b="1" dirty="0" err="1"/>
               <a:t>Shankharapur</a:t>
             </a:r>
             <a:r>
-              <a:rPr lang="en-US" dirty="0"/>
+              <a:rPr lang="en-US" sz="3200" b="1" dirty="0"/>
               <a:t> Municipality Ward 9, </a:t>
             </a:r>
             <a:r>
-              <a:rPr lang="en-US" dirty="0" err="1"/>
+              <a:rPr lang="en-US" sz="3200" b="1" dirty="0" err="1"/>
               <a:t>Sankhu</a:t>
             </a:r>
-            <a:endParaRPr lang="en-US" dirty="0"/>
+            <a:endParaRPr lang="en-US" sz="3200" b="1" dirty="0"/>
           </a:p>
         </p:txBody>
       </p:sp>
@@ -6191,26 +6641,30 @@
         <p:spPr/>
         <p:txBody>
           <a:bodyPr>
-            <a:normAutofit/>
+            <a:normAutofit lnSpcReduction="10000"/>
           </a:bodyPr>
           <a:lstStyle/>
           <a:p>
+            <a:pPr marL="0" indent="0" algn="ctr">
+              <a:buNone/>
+            </a:pPr>
+            <a:r>
+              <a:rPr lang="en-US" sz="2400" b="1" dirty="0" smtClean="0"/>
+              <a:t>	</a:t>
+            </a:r>
+            <a:r>
+              <a:rPr lang="en-US" sz="2800" b="1" dirty="0" smtClean="0"/>
+              <a:t>Thesis Proposal presentation- December 2025</a:t>
+            </a:r>
+          </a:p>
+          <a:p>
             <a:pPr marL="0" indent="0">
               <a:buNone/>
             </a:pPr>
-            <a:r>
-              <a:rPr lang="en-US" sz="2400" b="1" dirty="0" smtClean="0"/>
-              <a:t>	Thesis Proposal presentation- December 2025</a:t>
-            </a:r>
-          </a:p>
-          <a:p>
-            <a:pPr marL="0" indent="0">
-              <a:buNone/>
-            </a:pPr>
-            <a:endParaRPr lang="en-US" sz="2400" b="1" dirty="0" smtClean="0"/>
-          </a:p>
-          <a:p>
-            <a:pPr marL="0" indent="0">
+            <a:endParaRPr lang="en-US" sz="2800" b="1" dirty="0" smtClean="0"/>
+          </a:p>
+          <a:p>
+            <a:pPr marL="0" indent="0" algn="r">
               <a:buNone/>
             </a:pPr>
             <a:r>
@@ -6228,16 +6682,21 @@
             <a:endParaRPr lang="en-US" sz="2400" b="1" dirty="0" smtClean="0"/>
           </a:p>
           <a:p>
-            <a:pPr marL="0" indent="0">
+            <a:pPr marL="0" indent="0" algn="r">
               <a:buNone/>
             </a:pPr>
             <a:r>
               <a:rPr lang="en-US" sz="2400" b="1" dirty="0" smtClean="0"/>
-              <a:t>	M.A. Rural Development , </a:t>
-            </a:r>
-          </a:p>
-          <a:p>
-            <a:pPr marL="0" indent="0">
+              <a:t>	M.A. Rural </a:t>
+            </a:r>
+            <a:r>
+              <a:rPr lang="en-US" sz="2400" b="1" dirty="0" smtClean="0"/>
+              <a:t>Development </a:t>
+            </a:r>
+            <a:endParaRPr lang="en-US" sz="2400" b="1" dirty="0" smtClean="0"/>
+          </a:p>
+          <a:p>
+            <a:pPr marL="0" indent="0" algn="r">
               <a:buNone/>
             </a:pPr>
             <a:r>
@@ -6250,11 +6709,16 @@
             </a:r>
             <a:r>
               <a:rPr lang="en-US" sz="2400" b="1" dirty="0" smtClean="0"/>
-              <a:t> Multiple Campus, 	</a:t>
-            </a:r>
-          </a:p>
-          <a:p>
-            <a:pPr marL="0" indent="0">
+              <a:t> Multiple </a:t>
+            </a:r>
+            <a:r>
+              <a:rPr lang="en-US" sz="2400" b="1" dirty="0" smtClean="0"/>
+              <a:t>Campus</a:t>
+            </a:r>
+            <a:endParaRPr lang="en-US" sz="2400" b="1" dirty="0" smtClean="0"/>
+          </a:p>
+          <a:p>
+            <a:pPr marL="0" indent="0" algn="r">
               <a:buNone/>
             </a:pPr>
             <a:r>
@@ -6277,6 +6741,1127 @@
     <p:extLst>
       <p:ext uri="{BB962C8B-B14F-4D97-AF65-F5344CB8AC3E}">
         <p14:creationId xmlns:p14="http://schemas.microsoft.com/office/powerpoint/2010/main" val="1384470635"/>
+      </p:ext>
+    </p:extLst>
+  </p:cSld>
+  <p:clrMapOvr>
+    <a:masterClrMapping/>
+  </p:clrMapOvr>
+</p:sld>
+</file>
+
+<file path=ppt/slides/slide10.xml><?xml version="1.0" encoding="utf-8"?>
+<p:sld xmlns:a="http://schemas.openxmlformats.org/drawingml/2006/main" xmlns:r="http://schemas.openxmlformats.org/officeDocument/2006/relationships" xmlns:p="http://schemas.openxmlformats.org/presentationml/2006/main">
+  <p:cSld>
+    <p:spTree>
+      <p:nvGrpSpPr>
+        <p:cNvPr id="1" name=""/>
+        <p:cNvGrpSpPr/>
+        <p:nvPr/>
+      </p:nvGrpSpPr>
+      <p:grpSpPr>
+        <a:xfrm>
+          <a:off x="0" y="0"/>
+          <a:ext cx="0" cy="0"/>
+          <a:chOff x="0" y="0"/>
+          <a:chExt cx="0" cy="0"/>
+        </a:xfrm>
+      </p:grpSpPr>
+      <p:sp>
+        <p:nvSpPr>
+          <p:cNvPr id="2" name="Title 1"/>
+          <p:cNvSpPr>
+            <a:spLocks noGrp="1"/>
+          </p:cNvSpPr>
+          <p:nvPr>
+            <p:ph type="title"/>
+          </p:nvPr>
+        </p:nvSpPr>
+        <p:spPr>
+          <a:xfrm>
+            <a:off x="838200" y="365126"/>
+            <a:ext cx="10515600" cy="1104860"/>
+          </a:xfrm>
+        </p:spPr>
+        <p:txBody>
+          <a:bodyPr/>
+          <a:lstStyle/>
+          <a:p>
+            <a:r>
+              <a:rPr lang="en-US" b="1" dirty="0"/>
+              <a:t>Data Collection &amp; Analysis</a:t>
+            </a:r>
+            <a:endParaRPr lang="en-US" dirty="0"/>
+          </a:p>
+        </p:txBody>
+      </p:sp>
+      <p:sp>
+        <p:nvSpPr>
+          <p:cNvPr id="4" name="Rectangle 1"/>
+          <p:cNvSpPr>
+            <a:spLocks noGrp="1" noChangeArrowheads="1"/>
+          </p:cNvSpPr>
+          <p:nvPr>
+            <p:ph sz="quarter" idx="13"/>
+          </p:nvPr>
+        </p:nvSpPr>
+        <p:spPr bwMode="auto">
+          <a:xfrm>
+            <a:off x="838200" y="1313019"/>
+            <a:ext cx="10748058" cy="4893647"/>
+          </a:xfrm>
+          <a:prstGeom prst="rect">
+            <a:avLst/>
+          </a:prstGeom>
+          <a:noFill/>
+          <a:ln>
+            <a:noFill/>
+          </a:ln>
+          <a:effectLst/>
+          <a:extLst>
+            <a:ext uri="{909E8E84-426E-40DD-AFC4-6F175D3DCCD1}">
+              <a14:hiddenFill xmlns:a14="http://schemas.microsoft.com/office/drawing/2010/main">
+                <a:solidFill>
+                  <a:schemeClr val="accent1"/>
+                </a:solidFill>
+              </a14:hiddenFill>
+            </a:ext>
+            <a:ext uri="{91240B29-F687-4F45-9708-019B960494DF}">
+              <a14:hiddenLine xmlns:a14="http://schemas.microsoft.com/office/drawing/2010/main" w="9525">
+                <a:solidFill>
+                  <a:schemeClr val="tx1"/>
+                </a:solidFill>
+                <a:miter lim="800000"/>
+                <a:headEnd/>
+                <a:tailEnd/>
+              </a14:hiddenLine>
+            </a:ext>
+            <a:ext uri="{AF507438-7753-43E0-B8FC-AC1667EBCBE1}">
+              <a14:hiddenEffects xmlns:a14="http://schemas.microsoft.com/office/drawing/2010/main">
+                <a:effectLst>
+                  <a:outerShdw dist="35921" dir="2700000" algn="ctr" rotWithShape="0">
+                    <a:schemeClr val="bg2"/>
+                  </a:outerShdw>
+                </a:effectLst>
+              </a14:hiddenEffects>
+            </a:ext>
+          </a:extLst>
+        </p:spPr>
+        <p:txBody>
+          <a:bodyPr vert="horz" wrap="square" lIns="91440" tIns="45720" rIns="91440" bIns="45720" numCol="1" anchor="ctr" anchorCtr="0" compatLnSpc="1">
+            <a:prstTxWarp prst="textNoShape">
+              <a:avLst/>
+            </a:prstTxWarp>
+            <a:spAutoFit/>
+          </a:bodyPr>
+          <a:lstStyle/>
+          <a:p>
+            <a:pPr marL="0" lvl="0" indent="0" eaLnBrk="0" fontAlgn="base" hangingPunct="0">
+              <a:lnSpc>
+                <a:spcPct val="200000"/>
+              </a:lnSpc>
+              <a:spcBef>
+                <a:spcPct val="0"/>
+              </a:spcBef>
+              <a:spcAft>
+                <a:spcPct val="0"/>
+              </a:spcAft>
+              <a:buNone/>
+            </a:pPr>
+            <a:r>
+              <a:rPr kumimoji="0" lang="en-US" altLang="en-US" sz="2400" b="1" i="0" u="none" strike="noStrike" cap="none" normalizeH="0" baseline="0" dirty="0" smtClean="0">
+                <a:ln>
+                  <a:noFill/>
+                </a:ln>
+                <a:solidFill>
+                  <a:schemeClr val="tx1"/>
+                </a:solidFill>
+                <a:effectLst/>
+                <a:latin typeface="Arial" panose="020B0604020202020204" pitchFamily="34" charset="0"/>
+              </a:rPr>
+              <a:t>Tools for Collection:</a:t>
+            </a:r>
+            <a:endParaRPr kumimoji="0" lang="en-US" altLang="en-US" sz="2400" b="0" i="0" u="none" strike="noStrike" cap="none" normalizeH="0" baseline="0" dirty="0" smtClean="0">
+              <a:ln>
+                <a:noFill/>
+              </a:ln>
+              <a:solidFill>
+                <a:schemeClr val="tx1"/>
+              </a:solidFill>
+              <a:effectLst/>
+              <a:latin typeface="Arial" panose="020B0604020202020204" pitchFamily="34" charset="0"/>
+            </a:endParaRPr>
+          </a:p>
+          <a:p>
+            <a:pPr marL="0" lvl="0" indent="0" eaLnBrk="0" fontAlgn="base" hangingPunct="0">
+              <a:lnSpc>
+                <a:spcPct val="100000"/>
+              </a:lnSpc>
+              <a:spcBef>
+                <a:spcPct val="0"/>
+              </a:spcBef>
+              <a:spcAft>
+                <a:spcPct val="0"/>
+              </a:spcAft>
+              <a:buNone/>
+            </a:pPr>
+            <a:r>
+              <a:rPr kumimoji="0" lang="en-US" altLang="en-US" sz="2400" b="0" i="0" u="none" strike="noStrike" cap="none" normalizeH="0" baseline="0" dirty="0" smtClean="0">
+                <a:ln>
+                  <a:noFill/>
+                </a:ln>
+                <a:solidFill>
+                  <a:schemeClr val="tx1"/>
+                </a:solidFill>
+                <a:effectLst/>
+                <a:latin typeface="Arial" panose="020B0604020202020204" pitchFamily="34" charset="0"/>
+              </a:rPr>
+              <a:t>◦ </a:t>
+            </a:r>
+            <a:r>
+              <a:rPr kumimoji="0" lang="en-US" altLang="en-US" sz="2400" b="1" i="0" u="none" strike="noStrike" cap="none" normalizeH="0" baseline="0" dirty="0" smtClean="0">
+                <a:ln>
+                  <a:noFill/>
+                </a:ln>
+                <a:solidFill>
+                  <a:schemeClr val="tx1"/>
+                </a:solidFill>
+                <a:effectLst/>
+                <a:latin typeface="Arial" panose="020B0604020202020204" pitchFamily="34" charset="0"/>
+              </a:rPr>
+              <a:t>Observation:</a:t>
+            </a:r>
+            <a:r>
+              <a:rPr kumimoji="0" lang="en-US" altLang="en-US" sz="2400" b="0" i="0" u="none" strike="noStrike" cap="none" normalizeH="0" baseline="0" dirty="0" smtClean="0">
+                <a:ln>
+                  <a:noFill/>
+                </a:ln>
+                <a:solidFill>
+                  <a:schemeClr val="tx1"/>
+                </a:solidFill>
+                <a:effectLst/>
+                <a:latin typeface="Arial" panose="020B0604020202020204" pitchFamily="34" charset="0"/>
+              </a:rPr>
+              <a:t> Used to assess social status, community participation, and the relationship between migrants and residents.</a:t>
+            </a:r>
+          </a:p>
+          <a:p>
+            <a:pPr marL="0" lvl="0" indent="0" eaLnBrk="0" fontAlgn="base" hangingPunct="0">
+              <a:lnSpc>
+                <a:spcPct val="100000"/>
+              </a:lnSpc>
+              <a:spcBef>
+                <a:spcPct val="0"/>
+              </a:spcBef>
+              <a:spcAft>
+                <a:spcPct val="0"/>
+              </a:spcAft>
+              <a:buNone/>
+            </a:pPr>
+            <a:endParaRPr kumimoji="0" lang="en-US" altLang="en-US" sz="2400" b="0" i="0" u="none" strike="noStrike" cap="none" normalizeH="0" baseline="0" dirty="0" smtClean="0">
+              <a:ln>
+                <a:noFill/>
+              </a:ln>
+              <a:solidFill>
+                <a:schemeClr val="tx1"/>
+              </a:solidFill>
+              <a:effectLst/>
+              <a:latin typeface="Arial" panose="020B0604020202020204" pitchFamily="34" charset="0"/>
+            </a:endParaRPr>
+          </a:p>
+          <a:p>
+            <a:pPr marL="0" lvl="0" indent="0" eaLnBrk="0" fontAlgn="base" hangingPunct="0">
+              <a:lnSpc>
+                <a:spcPct val="100000"/>
+              </a:lnSpc>
+              <a:spcBef>
+                <a:spcPct val="0"/>
+              </a:spcBef>
+              <a:spcAft>
+                <a:spcPct val="0"/>
+              </a:spcAft>
+              <a:buNone/>
+            </a:pPr>
+            <a:r>
+              <a:rPr kumimoji="0" lang="en-US" altLang="en-US" sz="2400" b="0" i="0" u="none" strike="noStrike" cap="none" normalizeH="0" baseline="0" dirty="0" smtClean="0">
+                <a:ln>
+                  <a:noFill/>
+                </a:ln>
+                <a:solidFill>
+                  <a:schemeClr val="tx1"/>
+                </a:solidFill>
+                <a:effectLst/>
+                <a:latin typeface="Arial" panose="020B0604020202020204" pitchFamily="34" charset="0"/>
+              </a:rPr>
+              <a:t>◦ </a:t>
+            </a:r>
+            <a:r>
+              <a:rPr kumimoji="0" lang="en-US" altLang="en-US" sz="2400" b="1" i="0" u="none" strike="noStrike" cap="none" normalizeH="0" baseline="0" dirty="0" smtClean="0">
+                <a:ln>
+                  <a:noFill/>
+                </a:ln>
+                <a:solidFill>
+                  <a:schemeClr val="tx1"/>
+                </a:solidFill>
+                <a:effectLst/>
+                <a:latin typeface="Arial" panose="020B0604020202020204" pitchFamily="34" charset="0"/>
+              </a:rPr>
+              <a:t>Unstructured Interviews:</a:t>
+            </a:r>
+            <a:r>
+              <a:rPr kumimoji="0" lang="en-US" altLang="en-US" sz="2400" b="0" i="0" u="none" strike="noStrike" cap="none" normalizeH="0" baseline="0" dirty="0" smtClean="0">
+                <a:ln>
+                  <a:noFill/>
+                </a:ln>
+                <a:solidFill>
+                  <a:schemeClr val="tx1"/>
+                </a:solidFill>
+                <a:effectLst/>
+                <a:latin typeface="Arial" panose="020B0604020202020204" pitchFamily="34" charset="0"/>
+              </a:rPr>
+              <a:t> Divided into sections covering demographics, reasons for moving, socio-economic variables, and consequences.</a:t>
+            </a:r>
+          </a:p>
+          <a:p>
+            <a:pPr marL="0" lvl="0" indent="0" eaLnBrk="0" fontAlgn="base" hangingPunct="0">
+              <a:lnSpc>
+                <a:spcPct val="100000"/>
+              </a:lnSpc>
+              <a:spcBef>
+                <a:spcPct val="0"/>
+              </a:spcBef>
+              <a:spcAft>
+                <a:spcPct val="0"/>
+              </a:spcAft>
+              <a:buNone/>
+            </a:pPr>
+            <a:endParaRPr kumimoji="0" lang="en-US" altLang="en-US" sz="2400" b="0" i="0" u="none" strike="noStrike" cap="none" normalizeH="0" baseline="0" dirty="0" smtClean="0">
+              <a:ln>
+                <a:noFill/>
+              </a:ln>
+              <a:solidFill>
+                <a:schemeClr val="tx1"/>
+              </a:solidFill>
+              <a:effectLst/>
+              <a:latin typeface="Arial" panose="020B0604020202020204" pitchFamily="34" charset="0"/>
+            </a:endParaRPr>
+          </a:p>
+          <a:p>
+            <a:pPr marL="0" lvl="0" indent="0" eaLnBrk="0" fontAlgn="base" hangingPunct="0">
+              <a:lnSpc>
+                <a:spcPct val="100000"/>
+              </a:lnSpc>
+              <a:spcBef>
+                <a:spcPct val="0"/>
+              </a:spcBef>
+              <a:spcAft>
+                <a:spcPct val="0"/>
+              </a:spcAft>
+              <a:buNone/>
+            </a:pPr>
+            <a:r>
+              <a:rPr kumimoji="0" lang="en-US" altLang="en-US" sz="2400" b="0" i="0" u="none" strike="noStrike" cap="none" normalizeH="0" baseline="0" dirty="0" smtClean="0">
+                <a:ln>
+                  <a:noFill/>
+                </a:ln>
+                <a:solidFill>
+                  <a:schemeClr val="tx1"/>
+                </a:solidFill>
+                <a:effectLst/>
+                <a:latin typeface="Arial" panose="020B0604020202020204" pitchFamily="34" charset="0"/>
+              </a:rPr>
+              <a:t>• </a:t>
+            </a:r>
+            <a:r>
+              <a:rPr kumimoji="0" lang="en-US" altLang="en-US" sz="2400" b="1" i="0" u="none" strike="noStrike" cap="none" normalizeH="0" baseline="0" dirty="0" smtClean="0">
+                <a:ln>
+                  <a:noFill/>
+                </a:ln>
+                <a:solidFill>
+                  <a:schemeClr val="tx1"/>
+                </a:solidFill>
+                <a:effectLst/>
+                <a:latin typeface="Arial" panose="020B0604020202020204" pitchFamily="34" charset="0"/>
+              </a:rPr>
+              <a:t>Data Analysis:</a:t>
+            </a:r>
+            <a:r>
+              <a:rPr kumimoji="0" lang="en-US" altLang="en-US" sz="2400" b="0" i="0" u="none" strike="noStrike" cap="none" normalizeH="0" baseline="0" dirty="0" smtClean="0">
+                <a:ln>
+                  <a:noFill/>
+                </a:ln>
+                <a:solidFill>
+                  <a:schemeClr val="tx1"/>
+                </a:solidFill>
+                <a:effectLst/>
+                <a:latin typeface="Arial" panose="020B0604020202020204" pitchFamily="34" charset="0"/>
+              </a:rPr>
+              <a:t> Both </a:t>
+            </a:r>
+            <a:r>
+              <a:rPr kumimoji="0" lang="en-US" altLang="en-US" sz="2400" b="1" i="0" u="none" strike="noStrike" cap="none" normalizeH="0" baseline="0" dirty="0" smtClean="0">
+                <a:ln>
+                  <a:noFill/>
+                </a:ln>
+                <a:solidFill>
+                  <a:schemeClr val="tx1"/>
+                </a:solidFill>
+                <a:effectLst/>
+                <a:latin typeface="Arial" panose="020B0604020202020204" pitchFamily="34" charset="0"/>
+              </a:rPr>
+              <a:t>qualitative and quantitative</a:t>
+            </a:r>
+            <a:r>
+              <a:rPr kumimoji="0" lang="en-US" altLang="en-US" sz="2400" b="0" i="0" u="none" strike="noStrike" cap="none" normalizeH="0" baseline="0" dirty="0" smtClean="0">
+                <a:ln>
+                  <a:noFill/>
+                </a:ln>
+                <a:solidFill>
+                  <a:schemeClr val="tx1"/>
+                </a:solidFill>
+                <a:effectLst/>
+                <a:latin typeface="Arial" panose="020B0604020202020204" pitchFamily="34" charset="0"/>
+              </a:rPr>
+              <a:t> methods will be used; qualitative findings will be presented in tabular forms.</a:t>
+            </a:r>
+          </a:p>
+          <a:p>
+            <a:pPr marL="0" lvl="0" indent="0" eaLnBrk="0" fontAlgn="base" hangingPunct="0">
+              <a:lnSpc>
+                <a:spcPct val="100000"/>
+              </a:lnSpc>
+              <a:spcBef>
+                <a:spcPct val="0"/>
+              </a:spcBef>
+              <a:spcAft>
+                <a:spcPct val="0"/>
+              </a:spcAft>
+              <a:buNone/>
+            </a:pPr>
+            <a:endParaRPr kumimoji="0" lang="en-US" altLang="en-US" sz="2400" b="0" i="0" u="none" strike="noStrike" cap="none" normalizeH="0" baseline="0" dirty="0" smtClean="0">
+              <a:ln>
+                <a:noFill/>
+              </a:ln>
+              <a:solidFill>
+                <a:schemeClr val="tx1"/>
+              </a:solidFill>
+              <a:effectLst/>
+              <a:latin typeface="Arial" panose="020B0604020202020204" pitchFamily="34" charset="0"/>
+            </a:endParaRPr>
+          </a:p>
+          <a:p>
+            <a:pPr marL="0" lvl="0" indent="0" eaLnBrk="0" fontAlgn="base" hangingPunct="0">
+              <a:lnSpc>
+                <a:spcPct val="100000"/>
+              </a:lnSpc>
+              <a:spcBef>
+                <a:spcPct val="0"/>
+              </a:spcBef>
+              <a:spcAft>
+                <a:spcPct val="0"/>
+              </a:spcAft>
+              <a:buNone/>
+            </a:pPr>
+            <a:r>
+              <a:rPr kumimoji="0" lang="en-US" altLang="en-US" sz="2400" b="0" i="0" u="none" strike="noStrike" cap="none" normalizeH="0" baseline="0" dirty="0" smtClean="0">
+                <a:ln>
+                  <a:noFill/>
+                </a:ln>
+                <a:solidFill>
+                  <a:schemeClr val="tx1"/>
+                </a:solidFill>
+                <a:effectLst/>
+                <a:latin typeface="Arial" panose="020B0604020202020204" pitchFamily="34" charset="0"/>
+              </a:rPr>
+              <a:t>• </a:t>
+            </a:r>
+            <a:r>
+              <a:rPr kumimoji="0" lang="en-US" altLang="en-US" sz="2400" b="1" i="0" u="none" strike="noStrike" cap="none" normalizeH="0" baseline="0" dirty="0" smtClean="0">
+                <a:ln>
+                  <a:noFill/>
+                </a:ln>
+                <a:solidFill>
+                  <a:schemeClr val="tx1"/>
+                </a:solidFill>
+                <a:effectLst/>
+                <a:latin typeface="Arial" panose="020B0604020202020204" pitchFamily="34" charset="0"/>
+              </a:rPr>
+              <a:t>Ethical Considerations:</a:t>
+            </a:r>
+            <a:r>
+              <a:rPr kumimoji="0" lang="en-US" altLang="en-US" sz="2400" b="0" i="0" u="none" strike="noStrike" cap="none" normalizeH="0" baseline="0" dirty="0" smtClean="0">
+                <a:ln>
+                  <a:noFill/>
+                </a:ln>
+                <a:solidFill>
+                  <a:schemeClr val="tx1"/>
+                </a:solidFill>
+                <a:effectLst/>
+                <a:latin typeface="Arial" panose="020B0604020202020204" pitchFamily="34" charset="0"/>
+              </a:rPr>
+              <a:t> Obtaining formal approval from the ward office, securing verbal consent from participants, and maintaining strict confidentiality</a:t>
+            </a:r>
+          </a:p>
+        </p:txBody>
+      </p:sp>
+    </p:spTree>
+    <p:extLst>
+      <p:ext uri="{BB962C8B-B14F-4D97-AF65-F5344CB8AC3E}">
+        <p14:creationId xmlns:p14="http://schemas.microsoft.com/office/powerpoint/2010/main" val="796266426"/>
+      </p:ext>
+    </p:extLst>
+  </p:cSld>
+  <p:clrMapOvr>
+    <a:masterClrMapping/>
+  </p:clrMapOvr>
+</p:sld>
+</file>
+
+<file path=ppt/slides/slide11.xml><?xml version="1.0" encoding="utf-8"?>
+<p:sld xmlns:a="http://schemas.openxmlformats.org/drawingml/2006/main" xmlns:r="http://schemas.openxmlformats.org/officeDocument/2006/relationships" xmlns:p="http://schemas.openxmlformats.org/presentationml/2006/main">
+  <p:cSld>
+    <p:spTree>
+      <p:nvGrpSpPr>
+        <p:cNvPr id="1" name=""/>
+        <p:cNvGrpSpPr/>
+        <p:nvPr/>
+      </p:nvGrpSpPr>
+      <p:grpSpPr>
+        <a:xfrm>
+          <a:off x="0" y="0"/>
+          <a:ext cx="0" cy="0"/>
+          <a:chOff x="0" y="0"/>
+          <a:chExt cx="0" cy="0"/>
+        </a:xfrm>
+      </p:grpSpPr>
+      <p:sp>
+        <p:nvSpPr>
+          <p:cNvPr id="2" name="Title 1"/>
+          <p:cNvSpPr>
+            <a:spLocks noGrp="1"/>
+          </p:cNvSpPr>
+          <p:nvPr>
+            <p:ph type="title"/>
+          </p:nvPr>
+        </p:nvSpPr>
+        <p:spPr>
+          <a:xfrm>
+            <a:off x="838200" y="365126"/>
+            <a:ext cx="10515600" cy="1104860"/>
+          </a:xfrm>
+        </p:spPr>
+        <p:txBody>
+          <a:bodyPr/>
+          <a:lstStyle/>
+          <a:p>
+            <a:r>
+              <a:rPr lang="en-US" b="1" dirty="0"/>
+              <a:t>Limitations of the Study</a:t>
+            </a:r>
+            <a:endParaRPr lang="en-US" dirty="0"/>
+          </a:p>
+        </p:txBody>
+      </p:sp>
+      <p:sp>
+        <p:nvSpPr>
+          <p:cNvPr id="4" name="Rectangle 1"/>
+          <p:cNvSpPr>
+            <a:spLocks noGrp="1" noChangeArrowheads="1"/>
+          </p:cNvSpPr>
+          <p:nvPr>
+            <p:ph sz="quarter" idx="13"/>
+          </p:nvPr>
+        </p:nvSpPr>
+        <p:spPr bwMode="auto">
+          <a:xfrm>
+            <a:off x="838200" y="2051682"/>
+            <a:ext cx="10748058" cy="3416320"/>
+          </a:xfrm>
+          <a:prstGeom prst="rect">
+            <a:avLst/>
+          </a:prstGeom>
+          <a:noFill/>
+          <a:ln>
+            <a:noFill/>
+          </a:ln>
+          <a:effectLst/>
+          <a:extLst>
+            <a:ext uri="{909E8E84-426E-40DD-AFC4-6F175D3DCCD1}">
+              <a14:hiddenFill xmlns:a14="http://schemas.microsoft.com/office/drawing/2010/main">
+                <a:solidFill>
+                  <a:schemeClr val="accent1"/>
+                </a:solidFill>
+              </a14:hiddenFill>
+            </a:ext>
+            <a:ext uri="{91240B29-F687-4F45-9708-019B960494DF}">
+              <a14:hiddenLine xmlns:a14="http://schemas.microsoft.com/office/drawing/2010/main" w="9525">
+                <a:solidFill>
+                  <a:schemeClr val="tx1"/>
+                </a:solidFill>
+                <a:miter lim="800000"/>
+                <a:headEnd/>
+                <a:tailEnd/>
+              </a14:hiddenLine>
+            </a:ext>
+            <a:ext uri="{AF507438-7753-43E0-B8FC-AC1667EBCBE1}">
+              <a14:hiddenEffects xmlns:a14="http://schemas.microsoft.com/office/drawing/2010/main">
+                <a:effectLst>
+                  <a:outerShdw dist="35921" dir="2700000" algn="ctr" rotWithShape="0">
+                    <a:schemeClr val="bg2"/>
+                  </a:outerShdw>
+                </a:effectLst>
+              </a14:hiddenEffects>
+            </a:ext>
+          </a:extLst>
+        </p:spPr>
+        <p:txBody>
+          <a:bodyPr vert="horz" wrap="square" lIns="91440" tIns="45720" rIns="91440" bIns="45720" numCol="1" anchor="ctr" anchorCtr="0" compatLnSpc="1">
+            <a:prstTxWarp prst="textNoShape">
+              <a:avLst/>
+            </a:prstTxWarp>
+            <a:spAutoFit/>
+          </a:bodyPr>
+          <a:lstStyle/>
+          <a:p>
+            <a:pPr marL="0" lvl="0" indent="0" eaLnBrk="0" fontAlgn="base" hangingPunct="0">
+              <a:lnSpc>
+                <a:spcPct val="100000"/>
+              </a:lnSpc>
+              <a:spcBef>
+                <a:spcPct val="0"/>
+              </a:spcBef>
+              <a:spcAft>
+                <a:spcPct val="0"/>
+              </a:spcAft>
+              <a:buNone/>
+            </a:pPr>
+            <a:r>
+              <a:rPr kumimoji="0" lang="en-US" altLang="en-US" sz="2400" b="0" i="0" u="none" strike="noStrike" cap="none" normalizeH="0" baseline="0" dirty="0" smtClean="0">
+                <a:ln>
+                  <a:noFill/>
+                </a:ln>
+                <a:solidFill>
+                  <a:schemeClr val="tx1"/>
+                </a:solidFill>
+                <a:effectLst/>
+                <a:latin typeface="Arial" panose="020B0604020202020204" pitchFamily="34" charset="0"/>
+              </a:rPr>
+              <a:t>• </a:t>
+            </a:r>
+            <a:r>
+              <a:rPr kumimoji="0" lang="en-US" altLang="en-US" sz="2400" b="1" i="0" u="none" strike="noStrike" cap="none" normalizeH="0" baseline="0" dirty="0" smtClean="0">
+                <a:ln>
+                  <a:noFill/>
+                </a:ln>
+                <a:solidFill>
+                  <a:schemeClr val="tx1"/>
+                </a:solidFill>
+                <a:effectLst/>
+                <a:latin typeface="Arial" panose="020B0604020202020204" pitchFamily="34" charset="0"/>
+              </a:rPr>
+              <a:t>Geographic Focus:</a:t>
+            </a:r>
+            <a:r>
+              <a:rPr kumimoji="0" lang="en-US" altLang="en-US" sz="2400" b="0" i="0" u="none" strike="noStrike" cap="none" normalizeH="0" baseline="0" dirty="0" smtClean="0">
+                <a:ln>
+                  <a:noFill/>
+                </a:ln>
+                <a:solidFill>
+                  <a:schemeClr val="tx1"/>
+                </a:solidFill>
+                <a:effectLst/>
+                <a:latin typeface="Arial" panose="020B0604020202020204" pitchFamily="34" charset="0"/>
+              </a:rPr>
+              <a:t> The study is confined to Ward 9, which may restrict the generalization of findings to other regions.</a:t>
+            </a:r>
+          </a:p>
+          <a:p>
+            <a:pPr marL="0" lvl="0" indent="0" eaLnBrk="0" fontAlgn="base" hangingPunct="0">
+              <a:lnSpc>
+                <a:spcPct val="100000"/>
+              </a:lnSpc>
+              <a:spcBef>
+                <a:spcPct val="0"/>
+              </a:spcBef>
+              <a:spcAft>
+                <a:spcPct val="0"/>
+              </a:spcAft>
+              <a:buNone/>
+            </a:pPr>
+            <a:endParaRPr kumimoji="0" lang="en-US" altLang="en-US" sz="2400" b="0" i="0" u="none" strike="noStrike" cap="none" normalizeH="0" baseline="0" dirty="0" smtClean="0">
+              <a:ln>
+                <a:noFill/>
+              </a:ln>
+              <a:solidFill>
+                <a:schemeClr val="tx1"/>
+              </a:solidFill>
+              <a:effectLst/>
+              <a:latin typeface="Arial" panose="020B0604020202020204" pitchFamily="34" charset="0"/>
+            </a:endParaRPr>
+          </a:p>
+          <a:p>
+            <a:pPr marL="0" lvl="0" indent="0" eaLnBrk="0" fontAlgn="base" hangingPunct="0">
+              <a:lnSpc>
+                <a:spcPct val="100000"/>
+              </a:lnSpc>
+              <a:spcBef>
+                <a:spcPct val="0"/>
+              </a:spcBef>
+              <a:spcAft>
+                <a:spcPct val="0"/>
+              </a:spcAft>
+              <a:buNone/>
+            </a:pPr>
+            <a:r>
+              <a:rPr kumimoji="0" lang="en-US" altLang="en-US" sz="2400" b="0" i="0" u="none" strike="noStrike" cap="none" normalizeH="0" baseline="0" dirty="0" smtClean="0">
+                <a:ln>
+                  <a:noFill/>
+                </a:ln>
+                <a:solidFill>
+                  <a:schemeClr val="tx1"/>
+                </a:solidFill>
+                <a:effectLst/>
+                <a:latin typeface="Arial" panose="020B0604020202020204" pitchFamily="34" charset="0"/>
+              </a:rPr>
+              <a:t>• </a:t>
+            </a:r>
+            <a:r>
+              <a:rPr kumimoji="0" lang="en-US" altLang="en-US" sz="2400" b="1" i="0" u="none" strike="noStrike" cap="none" normalizeH="0" baseline="0" dirty="0" smtClean="0">
+                <a:ln>
+                  <a:noFill/>
+                </a:ln>
+                <a:solidFill>
+                  <a:schemeClr val="tx1"/>
+                </a:solidFill>
+                <a:effectLst/>
+                <a:latin typeface="Arial" panose="020B0604020202020204" pitchFamily="34" charset="0"/>
+              </a:rPr>
+              <a:t>Sample &amp; Time:</a:t>
+            </a:r>
+            <a:r>
+              <a:rPr kumimoji="0" lang="en-US" altLang="en-US" sz="2400" b="0" i="0" u="none" strike="noStrike" cap="none" normalizeH="0" baseline="0" dirty="0" smtClean="0">
+                <a:ln>
+                  <a:noFill/>
+                </a:ln>
+                <a:solidFill>
+                  <a:schemeClr val="tx1"/>
+                </a:solidFill>
+                <a:effectLst/>
+                <a:latin typeface="Arial" panose="020B0604020202020204" pitchFamily="34" charset="0"/>
+              </a:rPr>
+              <a:t> Constraints on time and financial resources limited the sample size and the ability to cover temporary or seasonal migrants extensively.</a:t>
+            </a:r>
+          </a:p>
+          <a:p>
+            <a:pPr marL="0" lvl="0" indent="0" eaLnBrk="0" fontAlgn="base" hangingPunct="0">
+              <a:lnSpc>
+                <a:spcPct val="100000"/>
+              </a:lnSpc>
+              <a:spcBef>
+                <a:spcPct val="0"/>
+              </a:spcBef>
+              <a:spcAft>
+                <a:spcPct val="0"/>
+              </a:spcAft>
+              <a:buNone/>
+            </a:pPr>
+            <a:endParaRPr kumimoji="0" lang="en-US" altLang="en-US" sz="2400" b="0" i="0" u="none" strike="noStrike" cap="none" normalizeH="0" baseline="0" dirty="0" smtClean="0">
+              <a:ln>
+                <a:noFill/>
+              </a:ln>
+              <a:solidFill>
+                <a:schemeClr val="tx1"/>
+              </a:solidFill>
+              <a:effectLst/>
+              <a:latin typeface="Arial" panose="020B0604020202020204" pitchFamily="34" charset="0"/>
+            </a:endParaRPr>
+          </a:p>
+          <a:p>
+            <a:pPr marL="0" lvl="0" indent="0" eaLnBrk="0" fontAlgn="base" hangingPunct="0">
+              <a:lnSpc>
+                <a:spcPct val="100000"/>
+              </a:lnSpc>
+              <a:spcBef>
+                <a:spcPct val="0"/>
+              </a:spcBef>
+              <a:spcAft>
+                <a:spcPct val="0"/>
+              </a:spcAft>
+              <a:buNone/>
+            </a:pPr>
+            <a:r>
+              <a:rPr kumimoji="0" lang="en-US" altLang="en-US" sz="2400" b="0" i="0" u="none" strike="noStrike" cap="none" normalizeH="0" baseline="0" dirty="0" smtClean="0">
+                <a:ln>
+                  <a:noFill/>
+                </a:ln>
+                <a:solidFill>
+                  <a:schemeClr val="tx1"/>
+                </a:solidFill>
+                <a:effectLst/>
+                <a:latin typeface="Arial" panose="020B0604020202020204" pitchFamily="34" charset="0"/>
+              </a:rPr>
+              <a:t>• </a:t>
+            </a:r>
+            <a:r>
+              <a:rPr kumimoji="0" lang="en-US" altLang="en-US" sz="2400" b="1" i="0" u="none" strike="noStrike" cap="none" normalizeH="0" baseline="0" dirty="0" smtClean="0">
+                <a:ln>
+                  <a:noFill/>
+                </a:ln>
+                <a:solidFill>
+                  <a:schemeClr val="tx1"/>
+                </a:solidFill>
+                <a:effectLst/>
+                <a:latin typeface="Arial" panose="020B0604020202020204" pitchFamily="34" charset="0"/>
+              </a:rPr>
+              <a:t>Data Reliability:</a:t>
+            </a:r>
+            <a:r>
+              <a:rPr kumimoji="0" lang="en-US" altLang="en-US" sz="2400" b="0" i="0" u="none" strike="noStrike" cap="none" normalizeH="0" baseline="0" dirty="0" smtClean="0">
+                <a:ln>
+                  <a:noFill/>
+                </a:ln>
+                <a:solidFill>
+                  <a:schemeClr val="tx1"/>
+                </a:solidFill>
+                <a:effectLst/>
+                <a:latin typeface="Arial" panose="020B0604020202020204" pitchFamily="34" charset="0"/>
+              </a:rPr>
+              <a:t> Results depend on the honesty of respondents, who may be reluctant to share sensitive socio-economic information</a:t>
+            </a:r>
+          </a:p>
+        </p:txBody>
+      </p:sp>
+    </p:spTree>
+    <p:extLst>
+      <p:ext uri="{BB962C8B-B14F-4D97-AF65-F5344CB8AC3E}">
+        <p14:creationId xmlns:p14="http://schemas.microsoft.com/office/powerpoint/2010/main" val="86121614"/>
+      </p:ext>
+    </p:extLst>
+  </p:cSld>
+  <p:clrMapOvr>
+    <a:masterClrMapping/>
+  </p:clrMapOvr>
+</p:sld>
+</file>
+
+<file path=ppt/slides/slide12.xml><?xml version="1.0" encoding="utf-8"?>
+<p:sld xmlns:a="http://schemas.openxmlformats.org/drawingml/2006/main" xmlns:r="http://schemas.openxmlformats.org/officeDocument/2006/relationships" xmlns:p="http://schemas.openxmlformats.org/presentationml/2006/main">
+  <p:cSld>
+    <p:spTree>
+      <p:nvGrpSpPr>
+        <p:cNvPr id="1" name=""/>
+        <p:cNvGrpSpPr/>
+        <p:nvPr/>
+      </p:nvGrpSpPr>
+      <p:grpSpPr>
+        <a:xfrm>
+          <a:off x="0" y="0"/>
+          <a:ext cx="0" cy="0"/>
+          <a:chOff x="0" y="0"/>
+          <a:chExt cx="0" cy="0"/>
+        </a:xfrm>
+      </p:grpSpPr>
+      <p:sp>
+        <p:nvSpPr>
+          <p:cNvPr id="2" name="Title 1"/>
+          <p:cNvSpPr>
+            <a:spLocks noGrp="1"/>
+          </p:cNvSpPr>
+          <p:nvPr>
+            <p:ph type="title"/>
+          </p:nvPr>
+        </p:nvSpPr>
+        <p:spPr>
+          <a:xfrm>
+            <a:off x="838200" y="365126"/>
+            <a:ext cx="10515600" cy="1104860"/>
+          </a:xfrm>
+        </p:spPr>
+        <p:txBody>
+          <a:bodyPr/>
+          <a:lstStyle/>
+          <a:p>
+            <a:r>
+              <a:rPr lang="en-US" b="1" dirty="0"/>
+              <a:t>Conclusion &amp; Expected Outcomes</a:t>
+            </a:r>
+            <a:endParaRPr lang="en-US" dirty="0"/>
+          </a:p>
+        </p:txBody>
+      </p:sp>
+      <p:sp>
+        <p:nvSpPr>
+          <p:cNvPr id="4" name="Rectangle 1"/>
+          <p:cNvSpPr>
+            <a:spLocks noGrp="1" noChangeArrowheads="1"/>
+          </p:cNvSpPr>
+          <p:nvPr>
+            <p:ph sz="quarter" idx="13"/>
+          </p:nvPr>
+        </p:nvSpPr>
+        <p:spPr bwMode="auto">
+          <a:xfrm>
+            <a:off x="838200" y="1354236"/>
+            <a:ext cx="10748058" cy="5009833"/>
+          </a:xfrm>
+          <a:prstGeom prst="rect">
+            <a:avLst/>
+          </a:prstGeom>
+          <a:noFill/>
+          <a:ln>
+            <a:noFill/>
+          </a:ln>
+          <a:effectLst/>
+          <a:extLst>
+            <a:ext uri="{909E8E84-426E-40DD-AFC4-6F175D3DCCD1}">
+              <a14:hiddenFill xmlns:a14="http://schemas.microsoft.com/office/drawing/2010/main">
+                <a:solidFill>
+                  <a:schemeClr val="accent1"/>
+                </a:solidFill>
+              </a14:hiddenFill>
+            </a:ext>
+            <a:ext uri="{91240B29-F687-4F45-9708-019B960494DF}">
+              <a14:hiddenLine xmlns:a14="http://schemas.microsoft.com/office/drawing/2010/main" w="9525">
+                <a:solidFill>
+                  <a:schemeClr val="tx1"/>
+                </a:solidFill>
+                <a:miter lim="800000"/>
+                <a:headEnd/>
+                <a:tailEnd/>
+              </a14:hiddenLine>
+            </a:ext>
+            <a:ext uri="{AF507438-7753-43E0-B8FC-AC1667EBCBE1}">
+              <a14:hiddenEffects xmlns:a14="http://schemas.microsoft.com/office/drawing/2010/main">
+                <a:effectLst>
+                  <a:outerShdw dist="35921" dir="2700000" algn="ctr" rotWithShape="0">
+                    <a:schemeClr val="bg2"/>
+                  </a:outerShdw>
+                </a:effectLst>
+              </a14:hiddenEffects>
+            </a:ext>
+          </a:extLst>
+        </p:spPr>
+        <p:txBody>
+          <a:bodyPr vert="horz" wrap="square" lIns="91440" tIns="45720" rIns="91440" bIns="45720" numCol="1" anchor="ctr" anchorCtr="0" compatLnSpc="1">
+            <a:prstTxWarp prst="textNoShape">
+              <a:avLst/>
+            </a:prstTxWarp>
+            <a:spAutoFit/>
+          </a:bodyPr>
+          <a:lstStyle/>
+          <a:p>
+            <a:pPr marL="0" lvl="0" indent="0" eaLnBrk="0" fontAlgn="base" hangingPunct="0">
+              <a:lnSpc>
+                <a:spcPct val="150000"/>
+              </a:lnSpc>
+              <a:spcBef>
+                <a:spcPct val="0"/>
+              </a:spcBef>
+              <a:spcAft>
+                <a:spcPct val="0"/>
+              </a:spcAft>
+              <a:buNone/>
+            </a:pPr>
+            <a:r>
+              <a:rPr kumimoji="0" lang="en-US" altLang="en-US" sz="2400" b="0" i="0" u="none" strike="noStrike" cap="none" normalizeH="0" baseline="0" dirty="0" smtClean="0">
+                <a:ln>
+                  <a:noFill/>
+                </a:ln>
+                <a:solidFill>
+                  <a:schemeClr val="tx1"/>
+                </a:solidFill>
+                <a:effectLst/>
+                <a:latin typeface="Arial" panose="020B0604020202020204" pitchFamily="34" charset="0"/>
+              </a:rPr>
+              <a:t>• </a:t>
+            </a:r>
+            <a:r>
+              <a:rPr kumimoji="0" lang="en-US" altLang="en-US" sz="2400" b="1" i="0" u="none" strike="noStrike" cap="none" normalizeH="0" baseline="0" dirty="0" smtClean="0">
+                <a:ln>
+                  <a:noFill/>
+                </a:ln>
+                <a:solidFill>
+                  <a:schemeClr val="tx1"/>
+                </a:solidFill>
+                <a:effectLst/>
+                <a:latin typeface="Arial" panose="020B0604020202020204" pitchFamily="34" charset="0"/>
+              </a:rPr>
+              <a:t>Framework for Planning:</a:t>
+            </a:r>
+            <a:r>
+              <a:rPr kumimoji="0" lang="en-US" altLang="en-US" sz="2400" b="0" i="0" u="none" strike="noStrike" cap="none" normalizeH="0" baseline="0" dirty="0" smtClean="0">
+                <a:ln>
+                  <a:noFill/>
+                </a:ln>
+                <a:solidFill>
+                  <a:schemeClr val="tx1"/>
+                </a:solidFill>
+                <a:effectLst/>
+                <a:latin typeface="Arial" panose="020B0604020202020204" pitchFamily="34" charset="0"/>
+              </a:rPr>
+              <a:t> The study intends to bridge the gap between macro-level migration theories and local-level realities in Ward 9.</a:t>
+            </a:r>
+          </a:p>
+          <a:p>
+            <a:pPr marL="0" lvl="0" indent="0" eaLnBrk="0" fontAlgn="base" hangingPunct="0">
+              <a:lnSpc>
+                <a:spcPct val="150000"/>
+              </a:lnSpc>
+              <a:spcBef>
+                <a:spcPct val="0"/>
+              </a:spcBef>
+              <a:spcAft>
+                <a:spcPct val="0"/>
+              </a:spcAft>
+              <a:buNone/>
+            </a:pPr>
+            <a:endParaRPr kumimoji="0" lang="en-US" altLang="en-US" sz="2400" b="0" i="0" u="none" strike="noStrike" cap="none" normalizeH="0" baseline="0" dirty="0" smtClean="0">
+              <a:ln>
+                <a:noFill/>
+              </a:ln>
+              <a:solidFill>
+                <a:schemeClr val="tx1"/>
+              </a:solidFill>
+              <a:effectLst/>
+              <a:latin typeface="Arial" panose="020B0604020202020204" pitchFamily="34" charset="0"/>
+            </a:endParaRPr>
+          </a:p>
+          <a:p>
+            <a:pPr marL="0" lvl="0" indent="0" eaLnBrk="0" fontAlgn="base" hangingPunct="0">
+              <a:lnSpc>
+                <a:spcPct val="150000"/>
+              </a:lnSpc>
+              <a:spcBef>
+                <a:spcPct val="0"/>
+              </a:spcBef>
+              <a:spcAft>
+                <a:spcPct val="0"/>
+              </a:spcAft>
+              <a:buNone/>
+            </a:pPr>
+            <a:r>
+              <a:rPr kumimoji="0" lang="en-US" altLang="en-US" sz="2400" b="0" i="0" u="none" strike="noStrike" cap="none" normalizeH="0" baseline="0" dirty="0" smtClean="0">
+                <a:ln>
+                  <a:noFill/>
+                </a:ln>
+                <a:solidFill>
+                  <a:schemeClr val="tx1"/>
+                </a:solidFill>
+                <a:effectLst/>
+                <a:latin typeface="Arial" panose="020B0604020202020204" pitchFamily="34" charset="0"/>
+              </a:rPr>
+              <a:t>• </a:t>
+            </a:r>
+            <a:r>
+              <a:rPr kumimoji="0" lang="en-US" altLang="en-US" sz="2400" b="1" i="0" u="none" strike="noStrike" cap="none" normalizeH="0" baseline="0" dirty="0" smtClean="0">
+                <a:ln>
+                  <a:noFill/>
+                </a:ln>
+                <a:solidFill>
+                  <a:schemeClr val="tx1"/>
+                </a:solidFill>
+                <a:effectLst/>
+                <a:latin typeface="Arial" panose="020B0604020202020204" pitchFamily="34" charset="0"/>
+              </a:rPr>
+              <a:t>Integrative Approach:</a:t>
+            </a:r>
+            <a:r>
+              <a:rPr kumimoji="0" lang="en-US" altLang="en-US" sz="2400" b="0" i="0" u="none" strike="noStrike" cap="none" normalizeH="0" baseline="0" dirty="0" smtClean="0">
+                <a:ln>
+                  <a:noFill/>
+                </a:ln>
+                <a:solidFill>
+                  <a:schemeClr val="tx1"/>
+                </a:solidFill>
+                <a:effectLst/>
+                <a:latin typeface="Arial" panose="020B0604020202020204" pitchFamily="34" charset="0"/>
+              </a:rPr>
+              <a:t> By combining demographic, socio-economic, and policy perspectives, the research will provide a comprehensive view of how immigration shapes rural-urban transition.</a:t>
+            </a:r>
+          </a:p>
+          <a:p>
+            <a:pPr marL="0" lvl="0" indent="0" eaLnBrk="0" fontAlgn="base" hangingPunct="0">
+              <a:lnSpc>
+                <a:spcPct val="150000"/>
+              </a:lnSpc>
+              <a:spcBef>
+                <a:spcPct val="0"/>
+              </a:spcBef>
+              <a:spcAft>
+                <a:spcPct val="0"/>
+              </a:spcAft>
+              <a:buNone/>
+            </a:pPr>
+            <a:endParaRPr kumimoji="0" lang="en-US" altLang="en-US" sz="2400" b="0" i="0" u="none" strike="noStrike" cap="none" normalizeH="0" baseline="0" dirty="0" smtClean="0">
+              <a:ln>
+                <a:noFill/>
+              </a:ln>
+              <a:solidFill>
+                <a:schemeClr val="tx1"/>
+              </a:solidFill>
+              <a:effectLst/>
+              <a:latin typeface="Arial" panose="020B0604020202020204" pitchFamily="34" charset="0"/>
+            </a:endParaRPr>
+          </a:p>
+          <a:p>
+            <a:pPr marL="0" lvl="0" indent="0" eaLnBrk="0" fontAlgn="base" hangingPunct="0">
+              <a:lnSpc>
+                <a:spcPct val="150000"/>
+              </a:lnSpc>
+              <a:spcBef>
+                <a:spcPct val="0"/>
+              </a:spcBef>
+              <a:spcAft>
+                <a:spcPct val="0"/>
+              </a:spcAft>
+              <a:buNone/>
+            </a:pPr>
+            <a:r>
+              <a:rPr kumimoji="0" lang="en-US" altLang="en-US" sz="2400" b="0" i="0" u="none" strike="noStrike" cap="none" normalizeH="0" baseline="0" dirty="0" smtClean="0">
+                <a:ln>
+                  <a:noFill/>
+                </a:ln>
+                <a:solidFill>
+                  <a:schemeClr val="tx1"/>
+                </a:solidFill>
+                <a:effectLst/>
+                <a:latin typeface="Arial" panose="020B0604020202020204" pitchFamily="34" charset="0"/>
+              </a:rPr>
+              <a:t>• </a:t>
+            </a:r>
+            <a:r>
+              <a:rPr kumimoji="0" lang="en-US" altLang="en-US" sz="2400" b="1" i="0" u="none" strike="noStrike" cap="none" normalizeH="0" baseline="0" dirty="0" smtClean="0">
+                <a:ln>
+                  <a:noFill/>
+                </a:ln>
+                <a:solidFill>
+                  <a:schemeClr val="tx1"/>
+                </a:solidFill>
+                <a:effectLst/>
+                <a:latin typeface="Arial" panose="020B0604020202020204" pitchFamily="34" charset="0"/>
+              </a:rPr>
+              <a:t>Final Goal:</a:t>
+            </a:r>
+            <a:r>
+              <a:rPr kumimoji="0" lang="en-US" altLang="en-US" sz="2400" b="0" i="0" u="none" strike="noStrike" cap="none" normalizeH="0" baseline="0" dirty="0" smtClean="0">
+                <a:ln>
+                  <a:noFill/>
+                </a:ln>
+                <a:solidFill>
+                  <a:schemeClr val="tx1"/>
+                </a:solidFill>
+                <a:effectLst/>
+                <a:latin typeface="Arial" panose="020B0604020202020204" pitchFamily="34" charset="0"/>
+              </a:rPr>
+              <a:t> To provide evidence-based recommendations that support sustainable integration and infrastructure planning at the ward level</a:t>
+            </a:r>
+          </a:p>
+        </p:txBody>
+      </p:sp>
+    </p:spTree>
+    <p:extLst>
+      <p:ext uri="{BB962C8B-B14F-4D97-AF65-F5344CB8AC3E}">
+        <p14:creationId xmlns:p14="http://schemas.microsoft.com/office/powerpoint/2010/main" val="4217368041"/>
       </p:ext>
     </p:extLst>
   </p:cSld>
@@ -6343,8 +7928,8 @@
         </p:nvSpPr>
         <p:spPr bwMode="auto">
           <a:xfrm>
-            <a:off x="838200" y="1469986"/>
-            <a:ext cx="10748058" cy="4893647"/>
+            <a:off x="838200" y="1839317"/>
+            <a:ext cx="10748058" cy="4154984"/>
           </a:xfrm>
           <a:prstGeom prst="rect">
             <a:avLst/>
@@ -6633,11 +8218,24 @@
                 <a:effectLst/>
                 <a:latin typeface="Arial" panose="020B0604020202020204" pitchFamily="34" charset="0"/>
               </a:rPr>
-              <a:t>Movement across national borders (immigration and emigration).</a:t>
-            </a:r>
-          </a:p>
-          <a:p>
-            <a:pPr marL="0" marR="0" lvl="0" indent="0" algn="just" defTabSz="914400" rtl="0" eaLnBrk="0" fontAlgn="base" latinLnBrk="0" hangingPunct="0">
+              <a:t>Movement across national </a:t>
+            </a:r>
+            <a:r>
+              <a:rPr kumimoji="0" lang="en-US" altLang="en-US" sz="2400" b="0" i="0" u="none" strike="noStrike" cap="none" normalizeH="0" baseline="0" dirty="0" smtClean="0">
+                <a:ln>
+                  <a:noFill/>
+                </a:ln>
+                <a:solidFill>
+                  <a:schemeClr val="tx1"/>
+                </a:solidFill>
+                <a:effectLst/>
+                <a:latin typeface="Arial" panose="020B0604020202020204" pitchFamily="34" charset="0"/>
+              </a:rPr>
+              <a:t>borders</a:t>
+            </a:r>
+          </a:p>
+          <a:p>
+            <a:pPr algn="just" eaLnBrk="0" fontAlgn="base" hangingPunct="0">
               <a:lnSpc>
                 <a:spcPct val="100000"/>
               </a:lnSpc>
@@ -6647,11 +8245,8 @@
               <a:spcAft>
                 <a:spcPct val="0"/>
               </a:spcAft>
-              <a:buClrTx/>
-              <a:buSzTx/>
-              <a:buFontTx/>
-              <a:buNone/>
-              <a:tabLst/>
+              <a:buFont typeface="Wingdings" panose="05000000000000000000" pitchFamily="2" charset="2"/>
+              <a:buChar char="Ø"/>
             </a:pPr>
             <a:endParaRPr kumimoji="0" lang="en-US" altLang="en-US" sz="2400" b="0" i="0" u="none" strike="noStrike" cap="none" normalizeH="0" baseline="0" dirty="0" smtClean="0">
               <a:ln>
@@ -6746,24 +8341,6 @@
               </a:rPr>
               <a:t> began after malaria eradication; currently, </a:t>
             </a:r>
-          </a:p>
-          <a:p>
-            <a:pPr marL="0" marR="0" lvl="0" indent="0" algn="just" defTabSz="914400" rtl="0" eaLnBrk="0" fontAlgn="base" latinLnBrk="0" hangingPunct="0">
-              <a:lnSpc>
-                <a:spcPct val="100000"/>
-              </a:lnSpc>
-              <a:spcBef>
-                <a:spcPct val="0"/>
-              </a:spcBef>
-              <a:spcAft>
-                <a:spcPct val="0"/>
-              </a:spcAft>
-              <a:buClrTx/>
-              <a:buSzTx/>
-              <a:buFontTx/>
-              <a:buNone/>
-              <a:tabLst/>
-            </a:pPr>
             <a:r>
               <a:rPr kumimoji="0" lang="en-US" altLang="en-US" sz="2400" b="0" i="0" u="none" strike="noStrike" cap="none" normalizeH="0" baseline="0" dirty="0" smtClean="0">
                 <a:ln>
@@ -6775,7 +8352,20 @@
                 <a:effectLst/>
                 <a:latin typeface="Arial" panose="020B0604020202020204" pitchFamily="34" charset="0"/>
               </a:rPr>
-              <a:t>infrastructural development and social services drive rapid movement to urban centers like Kathmandu</a:t>
+              <a:t>infrastructural </a:t>
+            </a:r>
+            <a:r>
+              <a:rPr kumimoji="0" lang="en-US" altLang="en-US" sz="2400" b="0" i="0" u="none" strike="noStrike" cap="none" normalizeH="0" baseline="0" dirty="0" smtClean="0">
+                <a:ln>
+                  <a:noFill/>
+                </a:ln>
+                <a:solidFill>
+                  <a:schemeClr val="tx1"/>
+                </a:solidFill>
+                <a:effectLst/>
+                <a:latin typeface="Arial" panose="020B0604020202020204" pitchFamily="34" charset="0"/>
+              </a:rPr>
+              <a:t>development and social services drive rapid movement to urban centers like Kathmandu</a:t>
             </a:r>
           </a:p>
         </p:txBody>
@@ -6954,6 +8544,20 @@
               </a:rPr>
               <a:t> </a:t>
             </a:r>
+          </a:p>
+          <a:p>
+            <a:pPr marL="0" lvl="0" indent="0" algn="just" eaLnBrk="0" fontAlgn="base" hangingPunct="0">
+              <a:lnSpc>
+                <a:spcPct val="100000"/>
+              </a:lnSpc>
+              <a:spcBef>
+                <a:spcPct val="0"/>
+              </a:spcBef>
+              <a:spcAft>
+                <a:spcPct val="0"/>
+              </a:spcAft>
+              <a:buNone/>
+            </a:pPr>
             <a:r>
               <a:rPr kumimoji="0" lang="en-US" altLang="en-US" sz="2400" b="0" i="0" u="none" strike="noStrike" cap="none" normalizeH="0" baseline="0" dirty="0" err="1" smtClean="0">
                 <a:ln>
@@ -6978,7 +8582,98 @@
                 <a:effectLst/>
                 <a:latin typeface="Arial" panose="020B0604020202020204" pitchFamily="34" charset="0"/>
               </a:rPr>
-              <a:t> Municipality Ward 9 is a developing area 			near Kathmandu experiencing a continuous flow of in-				migration.</a:t>
+              <a:t> </a:t>
+            </a:r>
+            <a:r>
+              <a:rPr kumimoji="0" lang="en-US" altLang="en-US" sz="2400" b="0" i="0" u="none" strike="noStrike" cap="none" normalizeH="0" baseline="0" dirty="0" smtClean="0">
+                <a:ln>
+                  <a:noFill/>
+                </a:ln>
+                <a:solidFill>
+                  <a:schemeClr val="tx1"/>
+                </a:solidFill>
+                <a:effectLst/>
+                <a:latin typeface="Arial" panose="020B0604020202020204" pitchFamily="34" charset="0"/>
+              </a:rPr>
+              <a:t>Municipality Ward 9 is a developing </a:t>
+            </a:r>
+            <a:r>
+              <a:rPr kumimoji="0" lang="en-US" altLang="en-US" sz="2400" b="0" i="0" u="none" strike="noStrike" cap="none" normalizeH="0" baseline="0" dirty="0" smtClean="0">
+                <a:ln>
+                  <a:noFill/>
+                </a:ln>
+                <a:solidFill>
+                  <a:schemeClr val="tx1"/>
+                </a:solidFill>
+                <a:effectLst/>
+                <a:latin typeface="Arial" panose="020B0604020202020204" pitchFamily="34" charset="0"/>
+              </a:rPr>
+              <a:t>area</a:t>
+            </a:r>
+            <a:r>
+              <a:rPr kumimoji="0" lang="en-US" altLang="en-US" sz="2400" b="0" i="0" u="none" strike="noStrike" cap="none" normalizeH="0" dirty="0" smtClean="0">
+                <a:ln>
+                  <a:noFill/>
+                </a:ln>
+                <a:solidFill>
+                  <a:schemeClr val="tx1"/>
+                </a:solidFill>
+                <a:effectLst/>
+                <a:latin typeface="Arial" panose="020B0604020202020204" pitchFamily="34" charset="0"/>
+              </a:rPr>
+              <a:t> </a:t>
+            </a:r>
+            <a:r>
+              <a:rPr kumimoji="0" lang="en-US" altLang="en-US" sz="2400" b="0" i="0" u="none" strike="noStrike" cap="none" normalizeH="0" baseline="0" dirty="0" smtClean="0">
+                <a:ln>
+                  <a:noFill/>
+                </a:ln>
+                <a:solidFill>
+                  <a:schemeClr val="tx1"/>
+                </a:solidFill>
+                <a:effectLst/>
+                <a:latin typeface="Arial" panose="020B0604020202020204" pitchFamily="34" charset="0"/>
+              </a:rPr>
+              <a:t>near </a:t>
+            </a:r>
+            <a:r>
+              <a:rPr kumimoji="0" lang="en-US" altLang="en-US" sz="2400" b="0" i="0" u="none" strike="noStrike" cap="none" normalizeH="0" baseline="0" dirty="0" smtClean="0">
+                <a:ln>
+                  <a:noFill/>
+                </a:ln>
+                <a:solidFill>
+                  <a:schemeClr val="tx1"/>
+                </a:solidFill>
+                <a:effectLst/>
+                <a:latin typeface="Arial" panose="020B0604020202020204" pitchFamily="34" charset="0"/>
+              </a:rPr>
+              <a:t>Kathmandu experiencing a continuous flow of </a:t>
+            </a:r>
+            <a:r>
+              <a:rPr kumimoji="0" lang="en-US" altLang="en-US" sz="2400" b="0" i="0" u="none" strike="noStrike" cap="none" normalizeH="0" baseline="0" dirty="0" smtClean="0">
+                <a:ln>
+                  <a:noFill/>
+                </a:ln>
+                <a:solidFill>
+                  <a:schemeClr val="tx1"/>
+                </a:solidFill>
+                <a:effectLst/>
+                <a:latin typeface="Arial" panose="020B0604020202020204" pitchFamily="34" charset="0"/>
+              </a:rPr>
+              <a:t>in-migration</a:t>
+            </a:r>
+            <a:r>
+              <a:rPr kumimoji="0" lang="en-US" altLang="en-US" sz="2400" b="0" i="0" u="none" strike="noStrike" cap="none" normalizeH="0" baseline="0" dirty="0" smtClean="0">
+                <a:ln>
+                  <a:noFill/>
+                </a:ln>
+                <a:solidFill>
+                  <a:schemeClr val="tx1"/>
+                </a:solidFill>
+                <a:effectLst/>
+                <a:latin typeface="Arial" panose="020B0604020202020204" pitchFamily="34" charset="0"/>
+              </a:rPr>
+              <a:t>.</a:t>
             </a:r>
           </a:p>
           <a:p>
@@ -7055,7 +8750,70 @@
                 <a:effectLst/>
                 <a:latin typeface="Arial" panose="020B0604020202020204" pitchFamily="34" charset="0"/>
               </a:rPr>
-              <a:t> While the causes of migration are often 					</a:t>
+              <a:t> </a:t>
+            </a:r>
+            <a:endParaRPr kumimoji="0" lang="en-US" altLang="en-US" sz="2400" b="0" i="0" u="none" strike="noStrike" cap="none" normalizeH="0" baseline="0" dirty="0" smtClean="0">
+              <a:ln>
+                <a:noFill/>
+              </a:ln>
+              <a:solidFill>
+                <a:schemeClr val="tx1"/>
+              </a:solidFill>
+              <a:effectLst/>
+              <a:latin typeface="Arial" panose="020B0604020202020204" pitchFamily="34" charset="0"/>
+            </a:endParaRPr>
+          </a:p>
+          <a:p>
+            <a:pPr marL="0" lvl="0" indent="0" algn="just" eaLnBrk="0" fontAlgn="base" hangingPunct="0">
+              <a:lnSpc>
+                <a:spcPct val="100000"/>
+              </a:lnSpc>
+              <a:spcBef>
+                <a:spcPct val="0"/>
+              </a:spcBef>
+              <a:spcAft>
+                <a:spcPct val="0"/>
+              </a:spcAft>
+              <a:buNone/>
+            </a:pPr>
+            <a:r>
+              <a:rPr kumimoji="0" lang="en-US" altLang="en-US" sz="2400" b="0" i="0" u="none" strike="noStrike" cap="none" normalizeH="0" baseline="0" dirty="0" smtClean="0">
+                <a:ln>
+                  <a:noFill/>
+                </a:ln>
+                <a:solidFill>
+                  <a:schemeClr val="tx1"/>
+                </a:solidFill>
+                <a:effectLst/>
+                <a:latin typeface="Arial" panose="020B0604020202020204" pitchFamily="34" charset="0"/>
+              </a:rPr>
+              <a:t>While </a:t>
+            </a:r>
+            <a:r>
+              <a:rPr kumimoji="0" lang="en-US" altLang="en-US" sz="2400" b="0" i="0" u="none" strike="noStrike" cap="none" normalizeH="0" baseline="0" dirty="0" smtClean="0">
+                <a:ln>
+                  <a:noFill/>
+                </a:ln>
+                <a:solidFill>
+                  <a:schemeClr val="tx1"/>
+                </a:solidFill>
+                <a:effectLst/>
+                <a:latin typeface="Arial" panose="020B0604020202020204" pitchFamily="34" charset="0"/>
+              </a:rPr>
+              <a:t>the causes of migration are </a:t>
+            </a:r>
+            <a:r>
+              <a:rPr kumimoji="0" lang="en-US" altLang="en-US" sz="2400" b="0" i="0" u="none" strike="noStrike" cap="none" normalizeH="0" baseline="0" dirty="0" smtClean="0">
+                <a:ln>
+                  <a:noFill/>
+                </a:ln>
+                <a:solidFill>
+                  <a:schemeClr val="tx1"/>
+                </a:solidFill>
+                <a:effectLst/>
+                <a:latin typeface="Arial" panose="020B0604020202020204" pitchFamily="34" charset="0"/>
+              </a:rPr>
+              <a:t>often</a:t>
             </a:r>
             <a:r>
               <a:rPr kumimoji="0" lang="en-US" altLang="en-US" sz="2400" b="0" i="0" u="none" strike="noStrike" cap="none" normalizeH="0" dirty="0" smtClean="0">
@@ -7068,7 +8826,7 @@
                 <a:effectLst/>
                 <a:latin typeface="Arial" panose="020B0604020202020204" pitchFamily="34" charset="0"/>
               </a:rPr>
-              <a:t>    </a:t>
+              <a:t> </a:t>
             </a:r>
             <a:r>
               <a:rPr kumimoji="0" lang="en-US" altLang="en-US" sz="2400" b="0" i="0" u="none" strike="noStrike" cap="none" normalizeH="0" baseline="0" dirty="0" smtClean="0">
@@ -7081,7 +8839,59 @@
                 <a:effectLst/>
                 <a:latin typeface="Arial" panose="020B0604020202020204" pitchFamily="34" charset="0"/>
               </a:rPr>
-              <a:t>identifiable, the specific qualitative 						</a:t>
+              <a:t>identifiable</a:t>
+            </a:r>
+            <a:r>
+              <a:rPr kumimoji="0" lang="en-US" altLang="en-US" sz="2400" b="0" i="0" u="none" strike="noStrike" cap="none" normalizeH="0" baseline="0" dirty="0" smtClean="0">
+                <a:ln>
+                  <a:noFill/>
+                </a:ln>
+                <a:solidFill>
+                  <a:schemeClr val="tx1"/>
+                </a:solidFill>
+                <a:effectLst/>
+                <a:latin typeface="Arial" panose="020B0604020202020204" pitchFamily="34" charset="0"/>
+              </a:rPr>
+              <a:t>, the specific </a:t>
+            </a:r>
+            <a:r>
+              <a:rPr kumimoji="0" lang="en-US" altLang="en-US" sz="2400" b="0" i="0" u="none" strike="noStrike" cap="none" normalizeH="0" baseline="0" dirty="0" smtClean="0">
+                <a:ln>
+                  <a:noFill/>
+                </a:ln>
+                <a:solidFill>
+                  <a:schemeClr val="tx1"/>
+                </a:solidFill>
+                <a:effectLst/>
+                <a:latin typeface="Arial" panose="020B0604020202020204" pitchFamily="34" charset="0"/>
+              </a:rPr>
+              <a:t>qualitative consequences </a:t>
+            </a:r>
+            <a:r>
+              <a:rPr kumimoji="0" lang="en-US" altLang="en-US" sz="2400" b="0" i="0" u="none" strike="noStrike" cap="none" normalizeH="0" baseline="0" dirty="0" smtClean="0">
+                <a:ln>
+                  <a:noFill/>
+                </a:ln>
+                <a:solidFill>
+                  <a:schemeClr val="tx1"/>
+                </a:solidFill>
+                <a:effectLst/>
+                <a:latin typeface="Arial" panose="020B0604020202020204" pitchFamily="34" charset="0"/>
+              </a:rPr>
+              <a:t>(positive or negative) on </a:t>
+            </a:r>
+            <a:r>
+              <a:rPr kumimoji="0" lang="en-US" altLang="en-US" sz="2400" b="0" i="0" u="none" strike="noStrike" cap="none" normalizeH="0" baseline="0" dirty="0" smtClean="0">
+                <a:ln>
+                  <a:noFill/>
+                </a:ln>
+                <a:solidFill>
+                  <a:schemeClr val="tx1"/>
+                </a:solidFill>
+                <a:effectLst/>
+                <a:latin typeface="Arial" panose="020B0604020202020204" pitchFamily="34" charset="0"/>
+              </a:rPr>
+              <a:t>the</a:t>
             </a:r>
             <a:r>
               <a:rPr kumimoji="0" lang="en-US" altLang="en-US" sz="2400" b="0" i="0" u="none" strike="noStrike" cap="none" normalizeH="0" dirty="0" smtClean="0">
@@ -7094,7 +8904,7 @@
                 <a:effectLst/>
                 <a:latin typeface="Arial" panose="020B0604020202020204" pitchFamily="34" charset="0"/>
               </a:rPr>
-              <a:t>    </a:t>
+              <a:t> </a:t>
             </a:r>
             <a:r>
               <a:rPr kumimoji="0" lang="en-US" altLang="en-US" sz="2400" b="0" i="0" u="none" strike="noStrike" cap="none" normalizeH="0" baseline="0" dirty="0" smtClean="0">
@@ -7107,7 +8917,20 @@
                 <a:effectLst/>
                 <a:latin typeface="Arial" panose="020B0604020202020204" pitchFamily="34" charset="0"/>
               </a:rPr>
-              <a:t>consequences (positive or negative) on the 					    destination area require sensible research.</a:t>
+              <a:t>destination </a:t>
+            </a:r>
+            <a:r>
+              <a:rPr kumimoji="0" lang="en-US" altLang="en-US" sz="2400" b="0" i="0" u="none" strike="noStrike" cap="none" normalizeH="0" baseline="0" dirty="0" smtClean="0">
+                <a:ln>
+                  <a:noFill/>
+                </a:ln>
+                <a:solidFill>
+                  <a:schemeClr val="tx1"/>
+                </a:solidFill>
+                <a:effectLst/>
+                <a:latin typeface="Arial" panose="020B0604020202020204" pitchFamily="34" charset="0"/>
+              </a:rPr>
+              <a:t>area require sensible research.</a:t>
             </a:r>
           </a:p>
           <a:p>
@@ -7264,16 +9087,6 @@
               </a:rPr>
               <a:t>    ◦ What are the trends, causes, and consequences of this movement?</a:t>
             </a:r>
-            <a:endParaRPr kumimoji="0" lang="en-US" altLang="en-US" sz="2400" b="0" i="0" u="none" strike="noStrike" cap="none" normalizeH="0" baseline="0" dirty="0" smtClean="0">
-              <a:ln>
-                <a:noFill/>
-              </a:ln>
-              <a:solidFill>
-                <a:schemeClr val="tx1"/>
-              </a:solidFill>
-              <a:effectLst/>
-              <a:latin typeface="Arial" panose="020B0604020202020204" pitchFamily="34" charset="0"/>
-            </a:endParaRPr>
           </a:p>
         </p:txBody>
       </p:sp>
@@ -7586,7 +9399,33 @@
                 <a:effectLst/>
                 <a:latin typeface="Arial" panose="020B0604020202020204" pitchFamily="34" charset="0"/>
               </a:rPr>
-              <a:t>    1. To identify the </a:t>
+              <a:t>   </a:t>
+            </a:r>
+            <a:r>
+              <a:rPr kumimoji="0" lang="en-US" altLang="en-US" sz="2400" b="0" i="0" u="none" strike="noStrike" cap="none" normalizeH="0" baseline="0" dirty="0" smtClean="0">
+                <a:ln>
+                  <a:noFill/>
+                </a:ln>
+                <a:solidFill>
+                  <a:schemeClr val="tx1"/>
+                </a:solidFill>
+                <a:effectLst/>
+                <a:latin typeface="Arial" panose="020B0604020202020204" pitchFamily="34" charset="0"/>
+              </a:rPr>
+              <a:t>1</a:t>
+            </a:r>
+            <a:r>
+              <a:rPr kumimoji="0" lang="en-US" altLang="en-US" sz="2400" b="0" i="0" u="none" strike="noStrike" cap="none" normalizeH="0" baseline="0" dirty="0" smtClean="0">
+                <a:ln>
+                  <a:noFill/>
+                </a:ln>
+                <a:solidFill>
+                  <a:schemeClr val="tx1"/>
+                </a:solidFill>
+                <a:effectLst/>
+                <a:latin typeface="Arial" panose="020B0604020202020204" pitchFamily="34" charset="0"/>
+              </a:rPr>
+              <a:t>. To identify the </a:t>
             </a:r>
             <a:r>
               <a:rPr kumimoji="0" lang="en-US" altLang="en-US" sz="2400" b="1" i="0" u="none" strike="noStrike" cap="none" normalizeH="0" baseline="0" dirty="0" smtClean="0">
@@ -7639,7 +9478,33 @@
                 <a:effectLst/>
                 <a:latin typeface="Arial" panose="020B0604020202020204" pitchFamily="34" charset="0"/>
               </a:rPr>
-              <a:t>    2. To analyze </a:t>
+              <a:t>   </a:t>
+            </a:r>
+            <a:r>
+              <a:rPr kumimoji="0" lang="en-US" altLang="en-US" sz="2400" b="0" i="0" u="none" strike="noStrike" cap="none" normalizeH="0" baseline="0" dirty="0" smtClean="0">
+                <a:ln>
+                  <a:noFill/>
+                </a:ln>
+                <a:solidFill>
+                  <a:schemeClr val="tx1"/>
+                </a:solidFill>
+                <a:effectLst/>
+                <a:latin typeface="Arial" panose="020B0604020202020204" pitchFamily="34" charset="0"/>
+              </a:rPr>
+              <a:t>2</a:t>
+            </a:r>
+            <a:r>
+              <a:rPr kumimoji="0" lang="en-US" altLang="en-US" sz="2400" b="0" i="0" u="none" strike="noStrike" cap="none" normalizeH="0" baseline="0" dirty="0" smtClean="0">
+                <a:ln>
+                  <a:noFill/>
+                </a:ln>
+                <a:solidFill>
+                  <a:schemeClr val="tx1"/>
+                </a:solidFill>
+                <a:effectLst/>
+                <a:latin typeface="Arial" panose="020B0604020202020204" pitchFamily="34" charset="0"/>
+              </a:rPr>
+              <a:t>. To analyze </a:t>
             </a:r>
             <a:r>
               <a:rPr kumimoji="0" lang="en-US" altLang="en-US" sz="2400" b="1" i="0" u="none" strike="noStrike" cap="none" normalizeH="0" baseline="0" dirty="0" smtClean="0">
@@ -7669,7 +9534,7 @@
             </a:r>
           </a:p>
           <a:p>
-            <a:pPr marL="0" lvl="0" indent="0" algn="just" eaLnBrk="0" fontAlgn="base" hangingPunct="0">
+            <a:pPr marL="630238" lvl="0" indent="-630238" algn="just" eaLnBrk="0" fontAlgn="base" hangingPunct="0">
               <a:lnSpc>
                 <a:spcPct val="100000"/>
               </a:lnSpc>
@@ -7692,7 +9557,33 @@
                 <a:effectLst/>
                 <a:latin typeface="Arial" panose="020B0604020202020204" pitchFamily="34" charset="0"/>
               </a:rPr>
-              <a:t>   3.To examine the </a:t>
+              <a:t>  </a:t>
+            </a:r>
+            <a:r>
+              <a:rPr kumimoji="0" lang="en-US" altLang="en-US" sz="2400" b="0" i="0" u="none" strike="noStrike" cap="none" normalizeH="0" baseline="0" dirty="0" smtClean="0">
+                <a:ln>
+                  <a:noFill/>
+                </a:ln>
+                <a:solidFill>
+                  <a:schemeClr val="tx1"/>
+                </a:solidFill>
+                <a:effectLst/>
+                <a:latin typeface="Arial" panose="020B0604020202020204" pitchFamily="34" charset="0"/>
+              </a:rPr>
+              <a:t>3.To </a:t>
+            </a:r>
+            <a:r>
+              <a:rPr kumimoji="0" lang="en-US" altLang="en-US" sz="2400" b="0" i="0" u="none" strike="noStrike" cap="none" normalizeH="0" baseline="0" dirty="0" smtClean="0">
+                <a:ln>
+                  <a:noFill/>
+                </a:ln>
+                <a:solidFill>
+                  <a:schemeClr val="tx1"/>
+                </a:solidFill>
+                <a:effectLst/>
+                <a:latin typeface="Arial" panose="020B0604020202020204" pitchFamily="34" charset="0"/>
+              </a:rPr>
+              <a:t>examine the </a:t>
             </a:r>
             <a:r>
               <a:rPr kumimoji="0" lang="en-US" altLang="en-US" sz="2400" b="1" i="0" u="none" strike="noStrike" cap="none" normalizeH="0" baseline="0" dirty="0" smtClean="0">
@@ -7731,7 +9622,20 @@
                 <a:effectLst/>
                 <a:latin typeface="Arial" panose="020B0604020202020204" pitchFamily="34" charset="0"/>
               </a:rPr>
-              <a:t>               	</a:t>
+              <a:t>         </a:t>
+            </a:r>
+            <a:r>
+              <a:rPr kumimoji="0" lang="en-US" altLang="en-US" sz="2400" b="0" i="0" u="none" strike="noStrike" cap="none" normalizeH="0" dirty="0" smtClean="0">
+                <a:ln>
+                  <a:noFill/>
+                </a:ln>
+                <a:solidFill>
+                  <a:schemeClr val="tx1"/>
+                </a:solidFill>
+                <a:effectLst/>
+                <a:latin typeface="Arial" panose="020B0604020202020204" pitchFamily="34" charset="0"/>
+              </a:rPr>
+              <a:t>            </a:t>
             </a:r>
             <a:r>
               <a:rPr kumimoji="0" lang="en-US" altLang="en-US" sz="2400" b="0" i="0" u="none" strike="noStrike" cap="none" normalizeH="0" baseline="0" dirty="0" smtClean="0">
@@ -7744,18 +9648,21 @@
                 <a:effectLst/>
                 <a:latin typeface="Arial" panose="020B0604020202020204" pitchFamily="34" charset="0"/>
               </a:rPr>
-              <a:t>study area</a:t>
-            </a:r>
-            <a:endParaRPr kumimoji="0" lang="en-US" altLang="en-US" sz="2400" b="0" i="0" u="none" strike="noStrike" cap="none" normalizeH="0" baseline="0" dirty="0" smtClean="0">
-              <a:ln>
-                <a:noFill/>
-              </a:ln>
-              <a:solidFill>
-                <a:schemeClr val="tx1"/>
-              </a:solidFill>
-              <a:effectLst/>
-              <a:latin typeface="Arial" panose="020B0604020202020204" pitchFamily="34" charset="0"/>
-            </a:endParaRPr>
+              <a:t>study </a:t>
+            </a:r>
+            <a:r>
+              <a:rPr kumimoji="0" lang="en-US" altLang="en-US" sz="2400" b="0" i="0" u="none" strike="noStrike" cap="none" normalizeH="0" baseline="0" dirty="0" smtClean="0">
+                <a:ln>
+                  <a:noFill/>
+                </a:ln>
+                <a:solidFill>
+                  <a:schemeClr val="tx1"/>
+                </a:solidFill>
+                <a:effectLst/>
+                <a:latin typeface="Arial" panose="020B0604020202020204" pitchFamily="34" charset="0"/>
+              </a:rPr>
+              <a:t>area</a:t>
+            </a:r>
           </a:p>
         </p:txBody>
       </p:sp>
@@ -8153,16 +10060,6 @@
               </a:rPr>
               <a:t> Serves as a foundation and reference for future researchers in the field of migration and rural development</a:t>
             </a:r>
-            <a:endParaRPr kumimoji="0" lang="en-US" altLang="en-US" sz="2400" b="0" i="0" u="none" strike="noStrike" cap="none" normalizeH="0" baseline="0" dirty="0" smtClean="0">
-              <a:ln>
-                <a:noFill/>
-              </a:ln>
-              <a:solidFill>
-                <a:schemeClr val="tx1"/>
-              </a:solidFill>
-              <a:effectLst/>
-              <a:latin typeface="Arial" panose="020B0604020202020204" pitchFamily="34" charset="0"/>
-            </a:endParaRPr>
           </a:p>
         </p:txBody>
       </p:sp>
@@ -8217,606 +10114,50 @@
           <a:lstStyle/>
           <a:p>
             <a:r>
-              <a:rPr lang="en-US" b="1" dirty="0"/>
-              <a:t>Research Design &amp; Methodology</a:t>
+              <a:rPr lang="en-US" b="1" dirty="0" smtClean="0"/>
+              <a:t>Conceptual Framework</a:t>
             </a:r>
             <a:endParaRPr lang="en-US" dirty="0"/>
           </a:p>
         </p:txBody>
       </p:sp>
-      <p:sp>
-        <p:nvSpPr>
-          <p:cNvPr id="4" name="Rectangle 1"/>
-          <p:cNvSpPr>
-            <a:spLocks noGrp="1" noChangeArrowheads="1"/>
-          </p:cNvSpPr>
-          <p:nvPr>
+      <p:pic>
+        <p:nvPicPr>
+          <p:cNvPr id="6" name="Content Placeholder 5" descr="Migration study conceptualisation flowchart"/>
+          <p:cNvPicPr>
+            <a:picLocks noGrp="1" noChangeAspect="1"/>
+          </p:cNvPicPr>
+          <p:nvPr isPhoto="1">
             <p:ph sz="quarter" idx="13"/>
           </p:nvPr>
-        </p:nvSpPr>
-        <p:spPr bwMode="auto">
+        </p:nvPicPr>
+        <p:blipFill>
+          <a:blip r:embed="rId2">
+            <a:lum/>
+            <a:extLst>
+              <a:ext uri="{28A0092B-C50C-407E-A947-70E740481C1C}">
+                <a14:useLocalDpi xmlns:a14="http://schemas.microsoft.com/office/drawing/2010/main" val="0"/>
+              </a:ext>
+            </a:extLst>
+          </a:blip>
+          <a:stretch>
+            <a:fillRect/>
+          </a:stretch>
+        </p:blipFill>
+        <p:spPr>
           <a:xfrm>
-            <a:off x="838200" y="1313018"/>
-            <a:ext cx="10748058" cy="4893647"/>
+            <a:off x="2540000" y="1071722"/>
+            <a:ext cx="7782560" cy="5188373"/>
           </a:xfrm>
           <a:prstGeom prst="rect">
             <a:avLst/>
           </a:prstGeom>
-          <a:noFill/>
-          <a:ln>
-            <a:noFill/>
-          </a:ln>
-          <a:effectLst/>
-          <a:extLst>
-            <a:ext uri="{909E8E84-426E-40DD-AFC4-6F175D3DCCD1}">
-              <a14:hiddenFill xmlns:a14="http://schemas.microsoft.com/office/drawing/2010/main">
-                <a:solidFill>
-                  <a:schemeClr val="accent1"/>
-                </a:solidFill>
-              </a14:hiddenFill>
-            </a:ext>
-            <a:ext uri="{91240B29-F687-4F45-9708-019B960494DF}">
-              <a14:hiddenLine xmlns:a14="http://schemas.microsoft.com/office/drawing/2010/main" w="9525">
-                <a:solidFill>
-                  <a:schemeClr val="tx1"/>
-                </a:solidFill>
-                <a:miter lim="800000"/>
-                <a:headEnd/>
-                <a:tailEnd/>
-              </a14:hiddenLine>
-            </a:ext>
-            <a:ext uri="{AF507438-7753-43E0-B8FC-AC1667EBCBE1}">
-              <a14:hiddenEffects xmlns:a14="http://schemas.microsoft.com/office/drawing/2010/main">
-                <a:effectLst>
-                  <a:outerShdw dist="35921" dir="2700000" algn="ctr" rotWithShape="0">
-                    <a:schemeClr val="bg2"/>
-                  </a:outerShdw>
-                </a:effectLst>
-              </a14:hiddenEffects>
-            </a:ext>
-          </a:extLst>
         </p:spPr>
-        <p:txBody>
-          <a:bodyPr vert="horz" wrap="square" lIns="91440" tIns="45720" rIns="91440" bIns="45720" numCol="1" anchor="ctr" anchorCtr="0" compatLnSpc="1">
-            <a:prstTxWarp prst="textNoShape">
-              <a:avLst/>
-            </a:prstTxWarp>
-            <a:spAutoFit/>
-          </a:bodyPr>
-          <a:lstStyle/>
-          <a:p>
-            <a:pPr marL="0" lvl="0" indent="0" algn="just" eaLnBrk="0" fontAlgn="base" hangingPunct="0">
-              <a:lnSpc>
-                <a:spcPct val="100000"/>
-              </a:lnSpc>
-              <a:spcBef>
-                <a:spcPct val="0"/>
-              </a:spcBef>
-              <a:spcAft>
-                <a:spcPct val="0"/>
-              </a:spcAft>
-              <a:buNone/>
-            </a:pPr>
-            <a:r>
-              <a:rPr kumimoji="0" lang="en-US" altLang="en-US" sz="2400" b="0" i="0" u="none" strike="noStrike" cap="none" normalizeH="0" baseline="0" dirty="0" smtClean="0">
-                <a:ln>
-                  <a:noFill/>
-                </a:ln>
-                <a:solidFill>
-                  <a:schemeClr val="tx1"/>
-                </a:solidFill>
-                <a:effectLst/>
-                <a:latin typeface="Arial" panose="020B0604020202020204" pitchFamily="34" charset="0"/>
-              </a:rPr>
-              <a:t>• </a:t>
-            </a:r>
-            <a:r>
-              <a:rPr kumimoji="0" lang="en-US" altLang="en-US" sz="2400" b="1" i="0" u="none" strike="noStrike" cap="none" normalizeH="0" baseline="0" dirty="0" smtClean="0">
-                <a:ln>
-                  <a:noFill/>
-                </a:ln>
-                <a:solidFill>
-                  <a:schemeClr val="tx1"/>
-                </a:solidFill>
-                <a:effectLst/>
-                <a:latin typeface="Arial" panose="020B0604020202020204" pitchFamily="34" charset="0"/>
-              </a:rPr>
-              <a:t>Research Design:</a:t>
-            </a:r>
-            <a:r>
-              <a:rPr kumimoji="0" lang="en-US" altLang="en-US" sz="2400" b="0" i="0" u="none" strike="noStrike" cap="none" normalizeH="0" baseline="0" dirty="0" smtClean="0">
-                <a:ln>
-                  <a:noFill/>
-                </a:ln>
-                <a:solidFill>
-                  <a:schemeClr val="tx1"/>
-                </a:solidFill>
-                <a:effectLst/>
-                <a:latin typeface="Arial" panose="020B0604020202020204" pitchFamily="34" charset="0"/>
-              </a:rPr>
-              <a:t> Employs both </a:t>
-            </a:r>
-            <a:r>
-              <a:rPr kumimoji="0" lang="en-US" altLang="en-US" sz="2400" b="1" i="0" u="none" strike="noStrike" cap="none" normalizeH="0" baseline="0" dirty="0" smtClean="0">
-                <a:ln>
-                  <a:noFill/>
-                </a:ln>
-                <a:solidFill>
-                  <a:schemeClr val="tx1"/>
-                </a:solidFill>
-                <a:effectLst/>
-                <a:latin typeface="Arial" panose="020B0604020202020204" pitchFamily="34" charset="0"/>
-              </a:rPr>
-              <a:t>descriptive and exploratory</a:t>
-            </a:r>
-            <a:r>
-              <a:rPr kumimoji="0" lang="en-US" altLang="en-US" sz="2400" b="0" i="0" u="none" strike="noStrike" cap="none" normalizeH="0" baseline="0" dirty="0" smtClean="0">
-                <a:ln>
-                  <a:noFill/>
-                </a:ln>
-                <a:solidFill>
-                  <a:schemeClr val="tx1"/>
-                </a:solidFill>
-                <a:effectLst/>
-                <a:latin typeface="Arial" panose="020B0604020202020204" pitchFamily="34" charset="0"/>
-              </a:rPr>
-              <a:t> designs to investigate the "how" and "why" of in-migration.</a:t>
-            </a:r>
-          </a:p>
-          <a:p>
-            <a:pPr marL="0" lvl="0" indent="0" algn="just" eaLnBrk="0" fontAlgn="base" hangingPunct="0">
-              <a:lnSpc>
-                <a:spcPct val="100000"/>
-              </a:lnSpc>
-              <a:spcBef>
-                <a:spcPct val="0"/>
-              </a:spcBef>
-              <a:spcAft>
-                <a:spcPct val="0"/>
-              </a:spcAft>
-              <a:buNone/>
-            </a:pPr>
-            <a:endParaRPr kumimoji="0" lang="en-US" altLang="en-US" sz="2400" b="0" i="0" u="none" strike="noStrike" cap="none" normalizeH="0" baseline="0" dirty="0" smtClean="0">
-              <a:ln>
-                <a:noFill/>
-              </a:ln>
-              <a:solidFill>
-                <a:schemeClr val="tx1"/>
-              </a:solidFill>
-              <a:effectLst/>
-              <a:latin typeface="Arial" panose="020B0604020202020204" pitchFamily="34" charset="0"/>
-            </a:endParaRPr>
-          </a:p>
-          <a:p>
-            <a:pPr marL="0" lvl="0" indent="0" algn="just" eaLnBrk="0" fontAlgn="base" hangingPunct="0">
-              <a:lnSpc>
-                <a:spcPct val="100000"/>
-              </a:lnSpc>
-              <a:spcBef>
-                <a:spcPct val="0"/>
-              </a:spcBef>
-              <a:spcAft>
-                <a:spcPct val="0"/>
-              </a:spcAft>
-              <a:buNone/>
-            </a:pPr>
-            <a:r>
-              <a:rPr kumimoji="0" lang="en-US" altLang="en-US" sz="2400" b="0" i="0" u="none" strike="noStrike" cap="none" normalizeH="0" baseline="0" dirty="0" smtClean="0">
-                <a:ln>
-                  <a:noFill/>
-                </a:ln>
-                <a:solidFill>
-                  <a:schemeClr val="tx1"/>
-                </a:solidFill>
-                <a:effectLst/>
-                <a:latin typeface="Arial" panose="020B0604020202020204" pitchFamily="34" charset="0"/>
-              </a:rPr>
-              <a:t>• </a:t>
-            </a:r>
-            <a:r>
-              <a:rPr kumimoji="0" lang="en-US" altLang="en-US" sz="2400" b="1" i="0" u="none" strike="noStrike" cap="none" normalizeH="0" baseline="0" dirty="0" smtClean="0">
-                <a:ln>
-                  <a:noFill/>
-                </a:ln>
-                <a:solidFill>
-                  <a:schemeClr val="tx1"/>
-                </a:solidFill>
-                <a:effectLst/>
-                <a:latin typeface="Arial" panose="020B0604020202020204" pitchFamily="34" charset="0"/>
-              </a:rPr>
-              <a:t>Nature of Data:</a:t>
-            </a:r>
-            <a:endParaRPr kumimoji="0" lang="en-US" altLang="en-US" sz="2400" b="0" i="0" u="none" strike="noStrike" cap="none" normalizeH="0" baseline="0" dirty="0" smtClean="0">
-              <a:ln>
-                <a:noFill/>
-              </a:ln>
-              <a:solidFill>
-                <a:schemeClr val="tx1"/>
-              </a:solidFill>
-              <a:effectLst/>
-              <a:latin typeface="Arial" panose="020B0604020202020204" pitchFamily="34" charset="0"/>
-            </a:endParaRPr>
-          </a:p>
-          <a:p>
-            <a:pPr marL="0" lvl="0" indent="0" algn="just" eaLnBrk="0" fontAlgn="base" hangingPunct="0">
-              <a:lnSpc>
-                <a:spcPct val="100000"/>
-              </a:lnSpc>
-              <a:spcBef>
-                <a:spcPct val="0"/>
-              </a:spcBef>
-              <a:spcAft>
-                <a:spcPct val="0"/>
-              </a:spcAft>
-              <a:buNone/>
-            </a:pPr>
-            <a:r>
-              <a:rPr kumimoji="0" lang="en-US" altLang="en-US" sz="2400" b="0" i="0" u="none" strike="noStrike" cap="none" normalizeH="0" baseline="0" dirty="0" smtClean="0">
-                <a:ln>
-                  <a:noFill/>
-                </a:ln>
-                <a:solidFill>
-                  <a:schemeClr val="tx1"/>
-                </a:solidFill>
-                <a:effectLst/>
-                <a:latin typeface="Arial" panose="020B0604020202020204" pitchFamily="34" charset="0"/>
-              </a:rPr>
-              <a:t>    ◦ </a:t>
-            </a:r>
-            <a:r>
-              <a:rPr kumimoji="0" lang="en-US" altLang="en-US" sz="2400" b="1" i="0" u="none" strike="noStrike" cap="none" normalizeH="0" baseline="0" dirty="0" smtClean="0">
-                <a:ln>
-                  <a:noFill/>
-                </a:ln>
-                <a:solidFill>
-                  <a:schemeClr val="tx1"/>
-                </a:solidFill>
-                <a:effectLst/>
-                <a:latin typeface="Arial" panose="020B0604020202020204" pitchFamily="34" charset="0"/>
-              </a:rPr>
-              <a:t>Primary:</a:t>
-            </a:r>
-            <a:r>
-              <a:rPr kumimoji="0" lang="en-US" altLang="en-US" sz="2400" b="0" i="0" u="none" strike="noStrike" cap="none" normalizeH="0" baseline="0" dirty="0" smtClean="0">
-                <a:ln>
-                  <a:noFill/>
-                </a:ln>
-                <a:solidFill>
-                  <a:schemeClr val="tx1"/>
-                </a:solidFill>
-                <a:effectLst/>
-                <a:latin typeface="Arial" panose="020B0604020202020204" pitchFamily="34" charset="0"/>
-              </a:rPr>
-              <a:t> Collected via field observations and interviews.</a:t>
-            </a:r>
-          </a:p>
-          <a:p>
-            <a:pPr marL="0" lvl="0" indent="0" algn="just" eaLnBrk="0" fontAlgn="base" hangingPunct="0">
-              <a:lnSpc>
-                <a:spcPct val="100000"/>
-              </a:lnSpc>
-              <a:spcBef>
-                <a:spcPct val="0"/>
-              </a:spcBef>
-              <a:spcAft>
-                <a:spcPct val="0"/>
-              </a:spcAft>
-              <a:buNone/>
-            </a:pPr>
-            <a:r>
-              <a:rPr kumimoji="0" lang="en-US" altLang="en-US" sz="2400" b="0" i="0" u="none" strike="noStrike" cap="none" normalizeH="0" baseline="0" dirty="0" smtClean="0">
-                <a:ln>
-                  <a:noFill/>
-                </a:ln>
-                <a:solidFill>
-                  <a:schemeClr val="tx1"/>
-                </a:solidFill>
-                <a:effectLst/>
-                <a:latin typeface="Arial" panose="020B0604020202020204" pitchFamily="34" charset="0"/>
-              </a:rPr>
-              <a:t>    ◦ </a:t>
-            </a:r>
-            <a:r>
-              <a:rPr kumimoji="0" lang="en-US" altLang="en-US" sz="2400" b="1" i="0" u="none" strike="noStrike" cap="none" normalizeH="0" baseline="0" dirty="0" smtClean="0">
-                <a:ln>
-                  <a:noFill/>
-                </a:ln>
-                <a:solidFill>
-                  <a:schemeClr val="tx1"/>
-                </a:solidFill>
-                <a:effectLst/>
-                <a:latin typeface="Arial" panose="020B0604020202020204" pitchFamily="34" charset="0"/>
-              </a:rPr>
-              <a:t>Secondary:</a:t>
-            </a:r>
-            <a:r>
-              <a:rPr kumimoji="0" lang="en-US" altLang="en-US" sz="2400" b="0" i="0" u="none" strike="noStrike" cap="none" normalizeH="0" baseline="0" dirty="0" smtClean="0">
-                <a:ln>
-                  <a:noFill/>
-                </a:ln>
-                <a:solidFill>
-                  <a:schemeClr val="tx1"/>
-                </a:solidFill>
-                <a:effectLst/>
-                <a:latin typeface="Arial" panose="020B0604020202020204" pitchFamily="34" charset="0"/>
-              </a:rPr>
-              <a:t> Sourced from libraries, published articles, CBS records, and 		</a:t>
-            </a:r>
-            <a:r>
-              <a:rPr kumimoji="0" lang="en-US" altLang="en-US" sz="2400" b="0" i="0" u="none" strike="noStrike" cap="none" normalizeH="0" dirty="0" smtClean="0">
-                <a:ln>
-                  <a:noFill/>
-                </a:ln>
-                <a:solidFill>
-                  <a:schemeClr val="tx1"/>
-                </a:solidFill>
-                <a:effectLst/>
-                <a:latin typeface="Arial" panose="020B0604020202020204" pitchFamily="34" charset="0"/>
-              </a:rPr>
-              <a:t>       </a:t>
-            </a:r>
-            <a:r>
-              <a:rPr kumimoji="0" lang="en-US" altLang="en-US" sz="2400" b="0" i="0" u="none" strike="noStrike" cap="none" normalizeH="0" baseline="0" dirty="0" smtClean="0">
-                <a:ln>
-                  <a:noFill/>
-                </a:ln>
-                <a:solidFill>
-                  <a:schemeClr val="tx1"/>
-                </a:solidFill>
-                <a:effectLst/>
-                <a:latin typeface="Arial" panose="020B0604020202020204" pitchFamily="34" charset="0"/>
-              </a:rPr>
-              <a:t>municipal documents.</a:t>
-            </a:r>
-          </a:p>
-          <a:p>
-            <a:pPr marL="0" lvl="0" indent="0" algn="just" eaLnBrk="0" fontAlgn="base" hangingPunct="0">
-              <a:lnSpc>
-                <a:spcPct val="100000"/>
-              </a:lnSpc>
-              <a:spcBef>
-                <a:spcPct val="0"/>
-              </a:spcBef>
-              <a:spcAft>
-                <a:spcPct val="0"/>
-              </a:spcAft>
-              <a:buNone/>
-            </a:pPr>
-            <a:endParaRPr kumimoji="0" lang="en-US" altLang="en-US" sz="2400" b="0" i="0" u="none" strike="noStrike" cap="none" normalizeH="0" baseline="0" dirty="0" smtClean="0">
-              <a:ln>
-                <a:noFill/>
-              </a:ln>
-              <a:solidFill>
-                <a:schemeClr val="tx1"/>
-              </a:solidFill>
-              <a:effectLst/>
-              <a:latin typeface="Arial" panose="020B0604020202020204" pitchFamily="34" charset="0"/>
-            </a:endParaRPr>
-          </a:p>
-          <a:p>
-            <a:pPr marL="0" lvl="0" indent="0" algn="just" eaLnBrk="0" fontAlgn="base" hangingPunct="0">
-              <a:lnSpc>
-                <a:spcPct val="100000"/>
-              </a:lnSpc>
-              <a:spcBef>
-                <a:spcPct val="0"/>
-              </a:spcBef>
-              <a:spcAft>
-                <a:spcPct val="0"/>
-              </a:spcAft>
-              <a:buNone/>
-            </a:pPr>
-            <a:r>
-              <a:rPr kumimoji="0" lang="en-US" altLang="en-US" sz="2400" b="0" i="0" u="none" strike="noStrike" cap="none" normalizeH="0" baseline="0" dirty="0" smtClean="0">
-                <a:ln>
-                  <a:noFill/>
-                </a:ln>
-                <a:solidFill>
-                  <a:schemeClr val="tx1"/>
-                </a:solidFill>
-                <a:effectLst/>
-                <a:latin typeface="Arial" panose="020B0604020202020204" pitchFamily="34" charset="0"/>
-              </a:rPr>
-              <a:t>• </a:t>
-            </a:r>
-            <a:r>
-              <a:rPr kumimoji="0" lang="en-US" altLang="en-US" sz="2400" b="1" i="0" u="none" strike="noStrike" cap="none" normalizeH="0" baseline="0" dirty="0" smtClean="0">
-                <a:ln>
-                  <a:noFill/>
-                </a:ln>
-                <a:solidFill>
-                  <a:schemeClr val="tx1"/>
-                </a:solidFill>
-                <a:effectLst/>
-                <a:latin typeface="Arial" panose="020B0604020202020204" pitchFamily="34" charset="0"/>
-              </a:rPr>
-              <a:t>Study Area &amp; Population:</a:t>
-            </a:r>
-            <a:r>
-              <a:rPr kumimoji="0" lang="en-US" altLang="en-US" sz="2400" b="0" i="0" u="none" strike="noStrike" cap="none" normalizeH="0" baseline="0" dirty="0" smtClean="0">
-                <a:ln>
-                  <a:noFill/>
-                </a:ln>
-                <a:solidFill>
-                  <a:schemeClr val="tx1"/>
-                </a:solidFill>
-                <a:effectLst/>
-                <a:latin typeface="Arial" panose="020B0604020202020204" pitchFamily="34" charset="0"/>
-              </a:rPr>
-              <a:t> </a:t>
-            </a:r>
-            <a:r>
-              <a:rPr kumimoji="0" lang="en-US" altLang="en-US" sz="2400" b="0" i="0" u="none" strike="noStrike" cap="none" normalizeH="0" baseline="0" dirty="0" err="1" smtClean="0">
-                <a:ln>
-                  <a:noFill/>
-                </a:ln>
-                <a:solidFill>
-                  <a:schemeClr val="tx1"/>
-                </a:solidFill>
-                <a:effectLst/>
-                <a:latin typeface="Arial" panose="020B0604020202020204" pitchFamily="34" charset="0"/>
-              </a:rPr>
-              <a:t>Shankharapur</a:t>
-            </a:r>
-            <a:r>
-              <a:rPr kumimoji="0" lang="en-US" altLang="en-US" sz="2400" b="0" i="0" u="none" strike="noStrike" cap="none" normalizeH="0" baseline="0" dirty="0" smtClean="0">
-                <a:ln>
-                  <a:noFill/>
-                </a:ln>
-                <a:solidFill>
-                  <a:schemeClr val="tx1"/>
-                </a:solidFill>
-                <a:effectLst/>
-                <a:latin typeface="Arial" panose="020B0604020202020204" pitchFamily="34" charset="0"/>
-              </a:rPr>
-              <a:t> Municipality Ward 9, which contains 87 households selected for the study.</a:t>
-            </a:r>
-          </a:p>
-          <a:p>
-            <a:pPr marL="0" lvl="0" indent="0" algn="just" eaLnBrk="0" fontAlgn="base" hangingPunct="0">
-              <a:lnSpc>
-                <a:spcPct val="100000"/>
-              </a:lnSpc>
-              <a:spcBef>
-                <a:spcPct val="0"/>
-              </a:spcBef>
-              <a:spcAft>
-                <a:spcPct val="0"/>
-              </a:spcAft>
-              <a:buNone/>
-            </a:pPr>
-            <a:endParaRPr kumimoji="0" lang="en-US" altLang="en-US" sz="2400" b="0" i="0" u="none" strike="noStrike" cap="none" normalizeH="0" baseline="0" dirty="0" smtClean="0">
-              <a:ln>
-                <a:noFill/>
-              </a:ln>
-              <a:solidFill>
-                <a:schemeClr val="tx1"/>
-              </a:solidFill>
-              <a:effectLst/>
-              <a:latin typeface="Arial" panose="020B0604020202020204" pitchFamily="34" charset="0"/>
-            </a:endParaRPr>
-          </a:p>
-          <a:p>
-            <a:pPr marL="0" lvl="0" indent="0" algn="just" eaLnBrk="0" fontAlgn="base" hangingPunct="0">
-              <a:lnSpc>
-                <a:spcPct val="100000"/>
-              </a:lnSpc>
-              <a:spcBef>
-                <a:spcPct val="0"/>
-              </a:spcBef>
-              <a:spcAft>
-                <a:spcPct val="0"/>
-              </a:spcAft>
-              <a:buNone/>
-            </a:pPr>
-            <a:r>
-              <a:rPr kumimoji="0" lang="en-US" altLang="en-US" sz="2400" b="0" i="0" u="none" strike="noStrike" cap="none" normalizeH="0" baseline="0" dirty="0" smtClean="0">
-                <a:ln>
-                  <a:noFill/>
-                </a:ln>
-                <a:solidFill>
-                  <a:schemeClr val="tx1"/>
-                </a:solidFill>
-                <a:effectLst/>
-                <a:latin typeface="Arial" panose="020B0604020202020204" pitchFamily="34" charset="0"/>
-              </a:rPr>
-              <a:t>• </a:t>
-            </a:r>
-            <a:r>
-              <a:rPr kumimoji="0" lang="en-US" altLang="en-US" sz="2400" b="1" i="0" u="none" strike="noStrike" cap="none" normalizeH="0" baseline="0" dirty="0" smtClean="0">
-                <a:ln>
-                  <a:noFill/>
-                </a:ln>
-                <a:solidFill>
-                  <a:schemeClr val="tx1"/>
-                </a:solidFill>
-                <a:effectLst/>
-                <a:latin typeface="Arial" panose="020B0604020202020204" pitchFamily="34" charset="0"/>
-              </a:rPr>
-              <a:t>Sampling Technique:</a:t>
-            </a:r>
-            <a:r>
-              <a:rPr kumimoji="0" lang="en-US" altLang="en-US" sz="2400" b="0" i="0" u="none" strike="noStrike" cap="none" normalizeH="0" baseline="0" dirty="0" smtClean="0">
-                <a:ln>
-                  <a:noFill/>
-                </a:ln>
-                <a:solidFill>
-                  <a:schemeClr val="tx1"/>
-                </a:solidFill>
-                <a:effectLst/>
-                <a:latin typeface="Arial" panose="020B0604020202020204" pitchFamily="34" charset="0"/>
-              </a:rPr>
-              <a:t> </a:t>
-            </a:r>
-            <a:r>
-              <a:rPr kumimoji="0" lang="en-US" altLang="en-US" sz="2400" b="1" i="0" u="none" strike="noStrike" cap="none" normalizeH="0" baseline="0" dirty="0" smtClean="0">
-                <a:ln>
-                  <a:noFill/>
-                </a:ln>
-                <a:solidFill>
-                  <a:schemeClr val="tx1"/>
-                </a:solidFill>
-                <a:effectLst/>
-                <a:latin typeface="Arial" panose="020B0604020202020204" pitchFamily="34" charset="0"/>
-              </a:rPr>
-              <a:t>Random sampling</a:t>
-            </a:r>
-            <a:r>
-              <a:rPr kumimoji="0" lang="en-US" altLang="en-US" sz="2400" b="0" i="0" u="none" strike="noStrike" cap="none" normalizeH="0" baseline="0" dirty="0" smtClean="0">
-                <a:ln>
-                  <a:noFill/>
-                </a:ln>
-                <a:solidFill>
-                  <a:schemeClr val="tx1"/>
-                </a:solidFill>
-                <a:effectLst/>
-                <a:latin typeface="Arial" panose="020B0604020202020204" pitchFamily="34" charset="0"/>
-              </a:rPr>
-              <a:t> was used to select the ward, while a </a:t>
-            </a:r>
-            <a:r>
-              <a:rPr kumimoji="0" lang="en-US" altLang="en-US" sz="2400" b="1" i="0" u="none" strike="noStrike" cap="none" normalizeH="0" baseline="0" dirty="0" smtClean="0">
-                <a:ln>
-                  <a:noFill/>
-                </a:ln>
-                <a:solidFill>
-                  <a:schemeClr val="tx1"/>
-                </a:solidFill>
-                <a:effectLst/>
-                <a:latin typeface="Arial" panose="020B0604020202020204" pitchFamily="34" charset="0"/>
-              </a:rPr>
-              <a:t>purposive method</a:t>
-            </a:r>
-            <a:r>
-              <a:rPr kumimoji="0" lang="en-US" altLang="en-US" sz="2400" b="0" i="0" u="none" strike="noStrike" cap="none" normalizeH="0" baseline="0" dirty="0" smtClean="0">
-                <a:ln>
-                  <a:noFill/>
-                </a:ln>
-                <a:solidFill>
-                  <a:schemeClr val="tx1"/>
-                </a:solidFill>
-                <a:effectLst/>
-                <a:latin typeface="Arial" panose="020B0604020202020204" pitchFamily="34" charset="0"/>
-              </a:rPr>
-              <a:t> will be used to draw samples from the population</a:t>
-            </a:r>
-            <a:endParaRPr kumimoji="0" lang="en-US" altLang="en-US" sz="2400" b="0" i="0" u="none" strike="noStrike" cap="none" normalizeH="0" baseline="0" dirty="0" smtClean="0">
-              <a:ln>
-                <a:noFill/>
-              </a:ln>
-              <a:solidFill>
-                <a:schemeClr val="tx1"/>
-              </a:solidFill>
-              <a:effectLst/>
-              <a:latin typeface="Arial" panose="020B0604020202020204" pitchFamily="34" charset="0"/>
-            </a:endParaRPr>
-          </a:p>
-        </p:txBody>
-      </p:sp>
+      </p:pic>
     </p:spTree>
     <p:extLst>
       <p:ext uri="{BB962C8B-B14F-4D97-AF65-F5344CB8AC3E}">
-        <p14:creationId xmlns:p14="http://schemas.microsoft.com/office/powerpoint/2010/main" val="1360700950"/>
+        <p14:creationId xmlns:p14="http://schemas.microsoft.com/office/powerpoint/2010/main" val="2743275369"/>
       </p:ext>
     </p:extLst>
   </p:cSld>
@@ -8864,8 +10205,8 @@
           <a:lstStyle/>
           <a:p>
             <a:r>
-              <a:rPr lang="en-US" b="1" dirty="0"/>
-              <a:t>Data Collection &amp; Analysis</a:t>
+              <a:rPr lang="en-US" b="1" dirty="0" smtClean="0"/>
+              <a:t>Literature Review</a:t>
             </a:r>
             <a:endParaRPr lang="en-US" dirty="0"/>
           </a:p>
@@ -8883,8 +10224,8 @@
         </p:nvSpPr>
         <p:spPr bwMode="auto">
           <a:xfrm>
-            <a:off x="838200" y="1313019"/>
-            <a:ext cx="10748058" cy="4893647"/>
+            <a:off x="538480" y="2001658"/>
+            <a:ext cx="10982960" cy="4154984"/>
           </a:xfrm>
           <a:prstGeom prst="rect">
             <a:avLst/>
@@ -8932,44 +10273,7 @@
           </a:bodyPr>
           <a:lstStyle/>
           <a:p>
-            <a:pPr marL="0" lvl="0" indent="0" eaLnBrk="0" fontAlgn="base" hangingPunct="0">
-              <a:lnSpc>
-                <a:spcPct val="200000"/>
-              </a:lnSpc>
-              <a:spcBef>
-                <a:spcPct val="0"/>
-              </a:spcBef>
-              <a:spcAft>
-                <a:spcPct val="0"/>
-              </a:spcAft>
-              <a:buNone/>
-            </a:pPr>
-            <a:r>
-              <a:rPr kumimoji="0" lang="en-US" altLang="en-US" sz="2400" b="1" i="0" u="none" strike="noStrike" cap="none" normalizeH="0" baseline="0" dirty="0" smtClean="0">
-                <a:ln>
-                  <a:noFill/>
-                </a:ln>
-                <a:solidFill>
-                  <a:schemeClr val="tx1"/>
-                </a:solidFill>
-                <a:effectLst/>
-                <a:latin typeface="Arial" panose="020B0604020202020204" pitchFamily="34" charset="0"/>
-              </a:rPr>
-              <a:t>Tools for Collection:</a:t>
-            </a:r>
-            <a:endParaRPr kumimoji="0" lang="en-US" altLang="en-US" sz="2400" b="0" i="0" u="none" strike="noStrike" cap="none" normalizeH="0" baseline="0" dirty="0" smtClean="0">
-              <a:ln>
-                <a:noFill/>
-              </a:ln>
-              <a:solidFill>
-                <a:schemeClr val="tx1"/>
-              </a:solidFill>
-              <a:effectLst/>
-              <a:latin typeface="Arial" panose="020B0604020202020204" pitchFamily="34" charset="0"/>
-            </a:endParaRPr>
-          </a:p>
-          <a:p>
-            <a:pPr marL="0" lvl="0" indent="0" eaLnBrk="0" fontAlgn="base" hangingPunct="0">
+            <a:pPr marL="0" lvl="0" indent="0" algn="just" eaLnBrk="0" fontAlgn="base" hangingPunct="0">
               <a:lnSpc>
                 <a:spcPct val="100000"/>
               </a:lnSpc>
@@ -8979,6 +10283,7 @@
               <a:spcAft>
                 <a:spcPct val="0"/>
               </a:spcAft>
+              <a:buClrTx/>
               <a:buNone/>
             </a:pPr>
             <a:r>
@@ -8992,7 +10297,7 @@
                 <a:effectLst/>
                 <a:latin typeface="Arial" panose="020B0604020202020204" pitchFamily="34" charset="0"/>
               </a:rPr>
-              <a:t>◦ </a:t>
+              <a:t>• </a:t>
             </a:r>
             <a:r>
               <a:rPr kumimoji="0" lang="en-US" altLang="en-US" sz="2400" b="1" i="0" u="none" strike="noStrike" cap="none" normalizeH="0" baseline="0" dirty="0" smtClean="0">
@@ -9005,7 +10310,7 @@
                 <a:effectLst/>
                 <a:latin typeface="Arial" panose="020B0604020202020204" pitchFamily="34" charset="0"/>
               </a:rPr>
-              <a:t>Observation:</a:t>
+              <a:t>The "Laws of Migration"</a:t>
             </a:r>
             <a:r>
               <a:rPr kumimoji="0" lang="en-US" altLang="en-US" sz="2400" b="0" i="0" u="none" strike="noStrike" cap="none" normalizeH="0" baseline="0" dirty="0" smtClean="0">
@@ -9018,11 +10323,56 @@
                 <a:effectLst/>
                 <a:latin typeface="Arial" panose="020B0604020202020204" pitchFamily="34" charset="0"/>
               </a:rPr>
-              <a:t> Used to assess social status, community participation, and the relationship between migrants and residents.</a:t>
-            </a:r>
-          </a:p>
-          <a:p>
-            <a:pPr marL="0" lvl="0" indent="0" eaLnBrk="0" fontAlgn="base" hangingPunct="0">
+              <a:t> </a:t>
+            </a:r>
+            <a:r>
+              <a:rPr kumimoji="0" lang="en-US" altLang="en-US" sz="2400" b="0" i="0" u="none" strike="noStrike" cap="none" normalizeH="0" baseline="0" dirty="0" err="1" smtClean="0">
+                <a:ln>
+                  <a:noFill/>
+                </a:ln>
+                <a:solidFill>
+                  <a:schemeClr val="tx1"/>
+                </a:solidFill>
+                <a:effectLst/>
+                <a:latin typeface="Arial" panose="020B0604020202020204" pitchFamily="34" charset="0"/>
+              </a:rPr>
+              <a:t>Ravenstein</a:t>
+            </a:r>
+            <a:r>
+              <a:rPr kumimoji="0" lang="en-US" altLang="en-US" sz="2400" b="0" i="0" u="none" strike="noStrike" cap="none" normalizeH="0" baseline="0" dirty="0" smtClean="0">
+                <a:ln>
+                  <a:noFill/>
+                </a:ln>
+                <a:solidFill>
+                  <a:schemeClr val="tx1"/>
+                </a:solidFill>
+                <a:effectLst/>
+                <a:latin typeface="Arial" panose="020B0604020202020204" pitchFamily="34" charset="0"/>
+              </a:rPr>
+              <a:t> (1885) </a:t>
+            </a:r>
+            <a:r>
+              <a:rPr lang="en-US" altLang="en-US" sz="2400" b="1" cap="none" dirty="0" smtClean="0">
+                <a:latin typeface="Arial" panose="020B0604020202020204" pitchFamily="34" charset="0"/>
+              </a:rPr>
+              <a:t>: </a:t>
+            </a:r>
+            <a:r>
+              <a:rPr kumimoji="0" lang="en-US" altLang="en-US" sz="2400" b="0" i="0" u="none" strike="noStrike" cap="none" normalizeH="0" baseline="0" dirty="0" smtClean="0">
+                <a:ln>
+                  <a:noFill/>
+                </a:ln>
+                <a:solidFill>
+                  <a:schemeClr val="tx1"/>
+                </a:solidFill>
+                <a:effectLst/>
+                <a:latin typeface="Arial" panose="020B0604020202020204" pitchFamily="34" charset="0"/>
+              </a:rPr>
+              <a:t>migration occurs in systematic streams and is heavily influenced by distance.</a:t>
+            </a:r>
+          </a:p>
+          <a:p>
+            <a:pPr marL="0" lvl="0" indent="0" algn="just" eaLnBrk="0" fontAlgn="base" hangingPunct="0">
               <a:lnSpc>
                 <a:spcPct val="100000"/>
               </a:lnSpc>
@@ -9032,6 +10382,7 @@
               <a:spcAft>
                 <a:spcPct val="0"/>
               </a:spcAft>
+              <a:buClrTx/>
               <a:buNone/>
             </a:pPr>
             <a:endParaRPr kumimoji="0" lang="en-US" altLang="en-US" sz="2400" b="0" i="0" u="none" strike="noStrike" cap="none" normalizeH="0" baseline="0" dirty="0" smtClean="0">
@@ -9046,7 +10397,7 @@
             </a:endParaRPr>
           </a:p>
           <a:p>
-            <a:pPr marL="0" lvl="0" indent="0" eaLnBrk="0" fontAlgn="base" hangingPunct="0">
+            <a:pPr marL="0" lvl="0" indent="0" algn="just" eaLnBrk="0" fontAlgn="base" hangingPunct="0">
               <a:lnSpc>
                 <a:spcPct val="100000"/>
               </a:lnSpc>
@@ -9056,6 +10407,7 @@
               <a:spcAft>
                 <a:spcPct val="0"/>
               </a:spcAft>
+              <a:buClrTx/>
               <a:buNone/>
             </a:pPr>
             <a:r>
@@ -9069,7 +10421,7 @@
                 <a:effectLst/>
                 <a:latin typeface="Arial" panose="020B0604020202020204" pitchFamily="34" charset="0"/>
               </a:rPr>
-              <a:t>◦ </a:t>
+              <a:t>• </a:t>
             </a:r>
             <a:r>
               <a:rPr kumimoji="0" lang="en-US" altLang="en-US" sz="2400" b="1" i="0" u="none" strike="noStrike" cap="none" normalizeH="0" baseline="0" dirty="0" smtClean="0">
@@ -9082,7 +10434,7 @@
                 <a:effectLst/>
                 <a:latin typeface="Arial" panose="020B0604020202020204" pitchFamily="34" charset="0"/>
               </a:rPr>
-              <a:t>Unstructured Interviews:</a:t>
+              <a:t>Push-Pull Theory</a:t>
             </a:r>
             <a:r>
               <a:rPr kumimoji="0" lang="en-US" altLang="en-US" sz="2400" b="0" i="0" u="none" strike="noStrike" cap="none" normalizeH="0" baseline="0" dirty="0" smtClean="0">
@@ -9095,11 +10447,30 @@
                 <a:effectLst/>
                 <a:latin typeface="Arial" panose="020B0604020202020204" pitchFamily="34" charset="0"/>
               </a:rPr>
-              <a:t> Divided into sections covering demographics, reasons for moving, socio-economic variables, and consequences.</a:t>
-            </a:r>
-          </a:p>
-          <a:p>
-            <a:pPr marL="0" lvl="0" indent="0" eaLnBrk="0" fontAlgn="base" hangingPunct="0">
+              <a:t> Everett Lee (1966)</a:t>
+            </a:r>
+            <a:r>
+              <a:rPr lang="en-US" altLang="en-US" sz="2400" b="1" cap="none" dirty="0" smtClean="0">
+                <a:latin typeface="Arial" panose="020B0604020202020204" pitchFamily="34" charset="0"/>
+              </a:rPr>
+              <a:t>:</a:t>
+            </a:r>
+            <a:r>
+              <a:rPr kumimoji="0" lang="en-US" altLang="en-US" sz="2400" b="0" i="0" u="none" strike="noStrike" cap="none" normalizeH="0" baseline="0" dirty="0" smtClean="0">
+                <a:ln>
+                  <a:noFill/>
+                </a:ln>
+                <a:solidFill>
+                  <a:schemeClr val="tx1"/>
+                </a:solidFill>
+                <a:effectLst/>
+                <a:latin typeface="Arial" panose="020B0604020202020204" pitchFamily="34" charset="0"/>
+              </a:rPr>
+              <a:t>migration is a balance between "push" factors and "pull" factors.</a:t>
+            </a:r>
+          </a:p>
+          <a:p>
+            <a:pPr marL="0" lvl="0" indent="0" algn="just" eaLnBrk="0" fontAlgn="base" hangingPunct="0">
               <a:lnSpc>
                 <a:spcPct val="100000"/>
               </a:lnSpc>
@@ -9109,6 +10480,7 @@
               <a:spcAft>
                 <a:spcPct val="0"/>
               </a:spcAft>
+              <a:buClrTx/>
               <a:buNone/>
             </a:pPr>
             <a:endParaRPr kumimoji="0" lang="en-US" altLang="en-US" sz="2400" b="0" i="0" u="none" strike="noStrike" cap="none" normalizeH="0" baseline="0" dirty="0" smtClean="0">
@@ -9123,7 +10495,7 @@
             </a:endParaRPr>
           </a:p>
           <a:p>
-            <a:pPr marL="0" lvl="0" indent="0" eaLnBrk="0" fontAlgn="base" hangingPunct="0">
+            <a:pPr marL="0" lvl="0" indent="0" algn="just" eaLnBrk="0" fontAlgn="base" hangingPunct="0">
               <a:lnSpc>
                 <a:spcPct val="100000"/>
               </a:lnSpc>
@@ -9133,6 +10505,7 @@
               <a:spcAft>
                 <a:spcPct val="0"/>
               </a:spcAft>
+              <a:buClrTx/>
               <a:buNone/>
             </a:pPr>
             <a:r>
@@ -9159,7 +10532,7 @@
                 <a:effectLst/>
                 <a:latin typeface="Arial" panose="020B0604020202020204" pitchFamily="34" charset="0"/>
               </a:rPr>
-              <a:t>Data Analysis:</a:t>
+              <a:t>Gravity Model</a:t>
             </a:r>
             <a:r>
               <a:rPr kumimoji="0" lang="en-US" altLang="en-US" sz="2400" b="0" i="0" u="none" strike="noStrike" cap="none" normalizeH="0" baseline="0" dirty="0" smtClean="0">
@@ -9172,20 +10545,20 @@
                 <a:effectLst/>
                 <a:latin typeface="Arial" panose="020B0604020202020204" pitchFamily="34" charset="0"/>
               </a:rPr>
-              <a:t> Both </a:t>
-            </a:r>
-            <a:r>
-              <a:rPr kumimoji="0" lang="en-US" altLang="en-US" sz="2400" b="1" i="0" u="none" strike="noStrike" cap="none" normalizeH="0" baseline="0" dirty="0" smtClean="0">
-                <a:ln>
-                  <a:noFill/>
-                </a:ln>
-                <a:solidFill>
-                  <a:schemeClr val="tx1"/>
-                </a:solidFill>
-                <a:effectLst/>
-                <a:latin typeface="Arial" panose="020B0604020202020204" pitchFamily="34" charset="0"/>
-              </a:rPr>
-              <a:t>qualitative and quantitative</a:t>
+              <a:t> </a:t>
+            </a:r>
+            <a:r>
+              <a:rPr kumimoji="0" lang="en-US" altLang="en-US" sz="2400" b="0" i="0" u="none" strike="noStrike" cap="none" normalizeH="0" baseline="0" dirty="0" err="1" smtClean="0">
+                <a:ln>
+                  <a:noFill/>
+                </a:ln>
+                <a:solidFill>
+                  <a:schemeClr val="tx1"/>
+                </a:solidFill>
+                <a:effectLst/>
+                <a:latin typeface="Arial" panose="020B0604020202020204" pitchFamily="34" charset="0"/>
+              </a:rPr>
+              <a:t>Zipf</a:t>
             </a:r>
             <a:r>
               <a:rPr kumimoji="0" lang="en-US" altLang="en-US" sz="2400" b="0" i="0" u="none" strike="noStrike" cap="none" normalizeH="0" baseline="0" dirty="0" smtClean="0">
@@ -9198,11 +10571,36 @@
                 <a:effectLst/>
                 <a:latin typeface="Arial" panose="020B0604020202020204" pitchFamily="34" charset="0"/>
               </a:rPr>
-              <a:t> methods will be used; qualitative findings will be presented in tabular forms.</a:t>
-            </a:r>
-          </a:p>
-          <a:p>
-            <a:pPr marL="0" lvl="0" indent="0" eaLnBrk="0" fontAlgn="base" hangingPunct="0">
+              <a:t> (1946) and Stewart (1950)</a:t>
+            </a:r>
+            <a:r>
+              <a:rPr lang="en-US" altLang="en-US" sz="2400" b="1" cap="none" dirty="0">
+                <a:latin typeface="Arial" panose="020B0604020202020204" pitchFamily="34" charset="0"/>
+              </a:rPr>
+              <a:t> </a:t>
+            </a:r>
+            <a:r>
+              <a:rPr lang="en-US" altLang="en-US" sz="2400" b="1" cap="none" dirty="0" smtClean="0">
+                <a:latin typeface="Arial" panose="020B0604020202020204" pitchFamily="34" charset="0"/>
+              </a:rPr>
+              <a:t>:</a:t>
+            </a:r>
+            <a:r>
+              <a:rPr kumimoji="0" lang="en-US" altLang="en-US" sz="2400" b="0" i="0" u="none" strike="noStrike" cap="none" normalizeH="0" baseline="0" dirty="0" smtClean="0">
+                <a:ln>
+                  <a:noFill/>
+                </a:ln>
+                <a:solidFill>
+                  <a:schemeClr val="tx1"/>
+                </a:solidFill>
+                <a:effectLst/>
+                <a:latin typeface="Arial" panose="020B0604020202020204" pitchFamily="34" charset="0"/>
+              </a:rPr>
+              <a:t> migration volume is proportional to population size and inversely related to the distance travelled.</a:t>
+            </a:r>
+          </a:p>
+          <a:p>
+            <a:pPr marL="0" lvl="0" indent="0" algn="just" eaLnBrk="0" fontAlgn="base" hangingPunct="0">
               <a:lnSpc>
                 <a:spcPct val="100000"/>
               </a:lnSpc>
@@ -9212,6 +10610,7 @@
               <a:spcAft>
                 <a:spcPct val="0"/>
               </a:spcAft>
+              <a:buClrTx/>
               <a:buNone/>
             </a:pPr>
             <a:endParaRPr kumimoji="0" lang="en-US" altLang="en-US" sz="2400" b="0" i="0" u="none" strike="noStrike" cap="none" normalizeH="0" baseline="0" dirty="0" smtClean="0">
@@ -9226,7 +10625,7 @@
             </a:endParaRPr>
           </a:p>
           <a:p>
-            <a:pPr marL="0" lvl="0" indent="0" eaLnBrk="0" fontAlgn="base" hangingPunct="0">
+            <a:pPr marL="0" lvl="0" indent="0" algn="just" eaLnBrk="0" fontAlgn="base" hangingPunct="0">
               <a:lnSpc>
                 <a:spcPct val="100000"/>
               </a:lnSpc>
@@ -9236,6 +10635,7 @@
               <a:spcAft>
                 <a:spcPct val="0"/>
               </a:spcAft>
+              <a:buClrTx/>
               <a:buNone/>
             </a:pPr>
             <a:r>
@@ -9262,7 +10662,7 @@
                 <a:effectLst/>
                 <a:latin typeface="Arial" panose="020B0604020202020204" pitchFamily="34" charset="0"/>
               </a:rPr>
-              <a:t>Ethical Considerations:</a:t>
+              <a:t>Economic Perspective</a:t>
             </a:r>
             <a:r>
               <a:rPr kumimoji="0" lang="en-US" altLang="en-US" sz="2400" b="0" i="0" u="none" strike="noStrike" cap="none" normalizeH="0" baseline="0" dirty="0" smtClean="0">
@@ -9275,25 +10675,66 @@
                 <a:effectLst/>
                 <a:latin typeface="Arial" panose="020B0604020202020204" pitchFamily="34" charset="0"/>
               </a:rPr>
-              <a:t> Obtaining formal approval from the ward office, securing verbal consent from participants, and maintaining strict confidentiality</a:t>
-            </a:r>
-            <a:endParaRPr kumimoji="0" lang="en-US" altLang="en-US" sz="2400" b="0" i="0" u="none" strike="noStrike" cap="none" normalizeH="0" baseline="0" dirty="0" smtClean="0">
-              <a:ln>
-                <a:noFill/>
-              </a:ln>
-              <a:solidFill>
-                <a:schemeClr val="tx1"/>
-              </a:solidFill>
-              <a:effectLst/>
-              <a:latin typeface="Arial" panose="020B0604020202020204" pitchFamily="34" charset="0"/>
-            </a:endParaRPr>
+              <a:t> </a:t>
+            </a:r>
+            <a:r>
+              <a:rPr kumimoji="0" lang="en-US" altLang="en-US" sz="2400" b="0" i="0" u="none" strike="noStrike" cap="none" normalizeH="0" baseline="0" dirty="0" err="1" smtClean="0">
+                <a:ln>
+                  <a:noFill/>
+                </a:ln>
+                <a:solidFill>
+                  <a:schemeClr val="tx1"/>
+                </a:solidFill>
+                <a:effectLst/>
+                <a:latin typeface="Arial" panose="020B0604020202020204" pitchFamily="34" charset="0"/>
+              </a:rPr>
+              <a:t>Todaro</a:t>
+            </a:r>
+            <a:r>
+              <a:rPr kumimoji="0" lang="en-US" altLang="en-US" sz="2400" b="0" i="0" u="none" strike="noStrike" cap="none" normalizeH="0" baseline="0" dirty="0" smtClean="0">
+                <a:ln>
+                  <a:noFill/>
+                </a:ln>
+                <a:solidFill>
+                  <a:schemeClr val="tx1"/>
+                </a:solidFill>
+                <a:effectLst/>
+                <a:latin typeface="Arial" panose="020B0604020202020204" pitchFamily="34" charset="0"/>
+              </a:rPr>
+              <a:t> (1976)</a:t>
+            </a:r>
+            <a:r>
+              <a:rPr lang="en-US" altLang="en-US" sz="2400" b="1" cap="none" dirty="0">
+                <a:latin typeface="Arial" panose="020B0604020202020204" pitchFamily="34" charset="0"/>
+              </a:rPr>
+              <a:t> </a:t>
+            </a:r>
+            <a:r>
+              <a:rPr lang="en-US" altLang="en-US" sz="2400" b="1" cap="none" dirty="0" smtClean="0">
+                <a:latin typeface="Arial" panose="020B0604020202020204" pitchFamily="34" charset="0"/>
+              </a:rPr>
+              <a:t>:</a:t>
+            </a:r>
+            <a:r>
+              <a:rPr kumimoji="0" lang="en-US" altLang="en-US" sz="2400" b="0" i="0" u="none" strike="noStrike" cap="none" normalizeH="0" baseline="0" dirty="0" smtClean="0">
+                <a:ln>
+                  <a:noFill/>
+                </a:ln>
+                <a:solidFill>
+                  <a:schemeClr val="tx1"/>
+                </a:solidFill>
+                <a:effectLst/>
+                <a:latin typeface="Arial" panose="020B0604020202020204" pitchFamily="34" charset="0"/>
+              </a:rPr>
+              <a:t> migration is driven by "expected income" differences rather than just actual current earnings.</a:t>
+            </a:r>
           </a:p>
         </p:txBody>
       </p:sp>
     </p:spTree>
     <p:extLst>
       <p:ext uri="{BB962C8B-B14F-4D97-AF65-F5344CB8AC3E}">
-        <p14:creationId xmlns:p14="http://schemas.microsoft.com/office/powerpoint/2010/main" val="796266426"/>
+        <p14:creationId xmlns:p14="http://schemas.microsoft.com/office/powerpoint/2010/main" val="3688494736"/>
       </p:ext>
     </p:extLst>
   </p:cSld>
@@ -9330,142 +10771,115 @@
             <p:ph type="title"/>
           </p:nvPr>
         </p:nvSpPr>
+        <p:spPr/>
+        <p:txBody>
+          <a:bodyPr/>
+          <a:lstStyle/>
+          <a:p>
+            <a:pPr lvl="0" eaLnBrk="0" fontAlgn="base" hangingPunct="0">
+              <a:spcAft>
+                <a:spcPct val="0"/>
+              </a:spcAft>
+            </a:pPr>
+            <a:r>
+              <a:rPr lang="en-US" altLang="en-US" b="1" dirty="0">
+                <a:latin typeface="Arial" panose="020B0604020202020204" pitchFamily="34" charset="0"/>
+              </a:rPr>
+              <a:t>Literature Review – Empirical &amp; Policy Context</a:t>
+            </a:r>
+            <a:endParaRPr lang="en-US" altLang="en-US" dirty="0">
+              <a:latin typeface="Arial" panose="020B0604020202020204" pitchFamily="34" charset="0"/>
+            </a:endParaRPr>
+          </a:p>
+        </p:txBody>
+      </p:sp>
+      <p:sp>
+        <p:nvSpPr>
+          <p:cNvPr id="3" name="Content Placeholder 2"/>
+          <p:cNvSpPr>
+            <a:spLocks noGrp="1"/>
+          </p:cNvSpPr>
+          <p:nvPr>
+            <p:ph sz="quarter" idx="13"/>
+          </p:nvPr>
+        </p:nvSpPr>
         <p:spPr>
           <a:xfrm>
-            <a:off x="838200" y="365126"/>
-            <a:ext cx="10515600" cy="1104860"/>
+            <a:off x="467360" y="2367092"/>
+            <a:ext cx="10810866" cy="4196268"/>
           </a:xfrm>
         </p:spPr>
         <p:txBody>
-          <a:bodyPr/>
-          <a:lstStyle/>
-          <a:p>
-            <a:r>
-              <a:rPr lang="en-US" b="1" dirty="0"/>
-              <a:t>Limitations of the Study</a:t>
-            </a:r>
-            <a:endParaRPr lang="en-US" dirty="0"/>
-          </a:p>
-        </p:txBody>
-      </p:sp>
-      <p:sp>
-        <p:nvSpPr>
-          <p:cNvPr id="4" name="Rectangle 1"/>
-          <p:cNvSpPr>
-            <a:spLocks noGrp="1" noChangeArrowheads="1"/>
-          </p:cNvSpPr>
-          <p:nvPr>
-            <p:ph sz="quarter" idx="13"/>
-          </p:nvPr>
-        </p:nvSpPr>
-        <p:spPr bwMode="auto">
-          <a:xfrm>
-            <a:off x="838200" y="2051682"/>
-            <a:ext cx="10748058" cy="3416320"/>
-          </a:xfrm>
-          <a:prstGeom prst="rect">
-            <a:avLst/>
-          </a:prstGeom>
-          <a:noFill/>
-          <a:ln>
-            <a:noFill/>
-          </a:ln>
-          <a:effectLst/>
-          <a:extLst>
-            <a:ext uri="{909E8E84-426E-40DD-AFC4-6F175D3DCCD1}">
-              <a14:hiddenFill xmlns:a14="http://schemas.microsoft.com/office/drawing/2010/main">
-                <a:solidFill>
-                  <a:schemeClr val="accent1"/>
-                </a:solidFill>
-              </a14:hiddenFill>
-            </a:ext>
-            <a:ext uri="{91240B29-F687-4F45-9708-019B960494DF}">
-              <a14:hiddenLine xmlns:a14="http://schemas.microsoft.com/office/drawing/2010/main" w="9525">
-                <a:solidFill>
-                  <a:schemeClr val="tx1"/>
-                </a:solidFill>
-                <a:miter lim="800000"/>
-                <a:headEnd/>
-                <a:tailEnd/>
-              </a14:hiddenLine>
-            </a:ext>
-            <a:ext uri="{AF507438-7753-43E0-B8FC-AC1667EBCBE1}">
-              <a14:hiddenEffects xmlns:a14="http://schemas.microsoft.com/office/drawing/2010/main">
-                <a:effectLst>
-                  <a:outerShdw dist="35921" dir="2700000" algn="ctr" rotWithShape="0">
-                    <a:schemeClr val="bg2"/>
-                  </a:outerShdw>
-                </a:effectLst>
-              </a14:hiddenEffects>
-            </a:ext>
-          </a:extLst>
-        </p:spPr>
-        <p:txBody>
-          <a:bodyPr vert="horz" wrap="square" lIns="91440" tIns="45720" rIns="91440" bIns="45720" numCol="1" anchor="ctr" anchorCtr="0" compatLnSpc="1">
-            <a:prstTxWarp prst="textNoShape">
-              <a:avLst/>
-            </a:prstTxWarp>
-            <a:spAutoFit/>
+          <a:bodyPr>
+            <a:noAutofit/>
           </a:bodyPr>
           <a:lstStyle/>
           <a:p>
-            <a:pPr marL="0" lvl="0" indent="0" eaLnBrk="0" fontAlgn="base" hangingPunct="0">
-              <a:lnSpc>
-                <a:spcPct val="100000"/>
-              </a:lnSpc>
+            <a:pPr lvl="0" algn="just" eaLnBrk="0" fontAlgn="base" hangingPunct="0">
               <a:spcBef>
                 <a:spcPct val="0"/>
               </a:spcBef>
               <a:spcAft>
                 <a:spcPct val="0"/>
               </a:spcAft>
-              <a:buNone/>
             </a:pPr>
             <a:r>
-              <a:rPr kumimoji="0" lang="en-US" altLang="en-US" sz="2400" b="0" i="0" u="none" strike="noStrike" cap="none" normalizeH="0" baseline="0" dirty="0" smtClean="0">
-                <a:ln>
-                  <a:noFill/>
-                </a:ln>
-                <a:solidFill>
-                  <a:schemeClr val="tx1"/>
-                </a:solidFill>
-                <a:effectLst/>
-                <a:latin typeface="Arial" panose="020B0604020202020204" pitchFamily="34" charset="0"/>
-              </a:rPr>
-              <a:t>• </a:t>
-            </a:r>
-            <a:r>
-              <a:rPr kumimoji="0" lang="en-US" altLang="en-US" sz="2400" b="1" i="0" u="none" strike="noStrike" cap="none" normalizeH="0" baseline="0" dirty="0" smtClean="0">
-                <a:ln>
-                  <a:noFill/>
-                </a:ln>
-                <a:solidFill>
-                  <a:schemeClr val="tx1"/>
-                </a:solidFill>
-                <a:effectLst/>
-                <a:latin typeface="Arial" panose="020B0604020202020204" pitchFamily="34" charset="0"/>
-              </a:rPr>
-              <a:t>Geographic Focus:</a:t>
-            </a:r>
-            <a:r>
-              <a:rPr kumimoji="0" lang="en-US" altLang="en-US" sz="2400" b="0" i="0" u="none" strike="noStrike" cap="none" normalizeH="0" baseline="0" dirty="0" smtClean="0">
-                <a:ln>
-                  <a:noFill/>
-                </a:ln>
-                <a:solidFill>
-                  <a:schemeClr val="tx1"/>
-                </a:solidFill>
-                <a:effectLst/>
-                <a:latin typeface="Arial" panose="020B0604020202020204" pitchFamily="34" charset="0"/>
-              </a:rPr>
-              <a:t> The study is confined to Ward 9, which may restrict the generalization of findings to other regions.</a:t>
-            </a:r>
-          </a:p>
-          <a:p>
-            <a:pPr marL="0" lvl="0" indent="0" eaLnBrk="0" fontAlgn="base" hangingPunct="0">
-              <a:lnSpc>
-                <a:spcPct val="100000"/>
-              </a:lnSpc>
+              <a:rPr lang="en-US" altLang="en-US" sz="2400" b="1" cap="none" dirty="0" smtClean="0">
+                <a:latin typeface="Arial" panose="020B0604020202020204" pitchFamily="34" charset="0"/>
+              </a:rPr>
+              <a:t>National context (</a:t>
+            </a:r>
+            <a:r>
+              <a:rPr lang="en-US" altLang="en-US" sz="2400" b="1" cap="none" dirty="0">
+                <a:latin typeface="Arial" panose="020B0604020202020204" pitchFamily="34" charset="0"/>
+              </a:rPr>
+              <a:t>N</a:t>
+            </a:r>
+            <a:r>
+              <a:rPr lang="en-US" altLang="en-US" sz="2400" b="1" cap="none" dirty="0" smtClean="0">
+                <a:latin typeface="Arial" panose="020B0604020202020204" pitchFamily="34" charset="0"/>
+              </a:rPr>
+              <a:t>epal):</a:t>
+            </a:r>
+            <a:r>
+              <a:rPr lang="en-US" altLang="en-US" sz="2400" cap="none" dirty="0" smtClean="0">
+                <a:latin typeface="Arial" panose="020B0604020202020204" pitchFamily="34" charset="0"/>
+              </a:rPr>
+              <a:t> research by CEDA (1977) and </a:t>
+            </a:r>
+            <a:r>
+              <a:rPr lang="en-US" altLang="en-US" sz="2400" cap="none" dirty="0" err="1">
+                <a:latin typeface="Arial" panose="020B0604020202020204" pitchFamily="34" charset="0"/>
+              </a:rPr>
+              <a:t>G</a:t>
+            </a:r>
+            <a:r>
+              <a:rPr lang="en-US" altLang="en-US" sz="2400" cap="none" dirty="0" err="1" smtClean="0">
+                <a:latin typeface="Arial" panose="020B0604020202020204" pitchFamily="34" charset="0"/>
+              </a:rPr>
+              <a:t>urung</a:t>
+            </a:r>
+            <a:r>
+              <a:rPr lang="en-US" altLang="en-US" sz="2400" cap="none" dirty="0" smtClean="0">
+                <a:latin typeface="Arial" panose="020B0604020202020204" pitchFamily="34" charset="0"/>
+              </a:rPr>
+              <a:t> (1984) identified that over 50% of </a:t>
+            </a:r>
+            <a:r>
+              <a:rPr lang="en-US" altLang="en-US" sz="2400" cap="none" dirty="0" err="1" smtClean="0">
+                <a:latin typeface="Arial" panose="020B0604020202020204" pitchFamily="34" charset="0"/>
+              </a:rPr>
+              <a:t>kathmandu's</a:t>
+            </a:r>
+            <a:r>
+              <a:rPr lang="en-US" altLang="en-US" sz="2400" cap="none" dirty="0" smtClean="0">
+                <a:latin typeface="Arial" panose="020B0604020202020204" pitchFamily="34" charset="0"/>
+              </a:rPr>
+              <a:t> migrants are aged 20–30, driven by land scarcity and food shortages in the hills.</a:t>
+            </a:r>
+          </a:p>
+          <a:p>
+            <a:pPr marL="0" lvl="0" indent="0" algn="just" eaLnBrk="0" fontAlgn="base" hangingPunct="0">
               <a:spcBef>
                 <a:spcPct val="0"/>
               </a:spcBef>
@@ -9474,75 +10888,76 @@
               </a:spcAft>
               <a:buNone/>
             </a:pPr>
-            <a:endParaRPr kumimoji="0" lang="en-US" altLang="en-US" sz="2400" b="0" i="0" u="none" strike="noStrike" cap="none" normalizeH="0" baseline="0" dirty="0" smtClean="0">
-              <a:ln>
-                <a:noFill/>
-              </a:ln>
-              <a:solidFill>
-                <a:schemeClr val="tx1"/>
-              </a:solidFill>
-              <a:effectLst/>
+            <a:endParaRPr lang="en-US" altLang="en-US" sz="2400" cap="none" dirty="0" smtClean="0">
               <a:latin typeface="Arial" panose="020B0604020202020204" pitchFamily="34" charset="0"/>
             </a:endParaRPr>
           </a:p>
           <a:p>
-            <a:pPr marL="0" lvl="0" indent="0" eaLnBrk="0" fontAlgn="base" hangingPunct="0">
-              <a:lnSpc>
-                <a:spcPct val="100000"/>
-              </a:lnSpc>
+            <a:pPr lvl="0" algn="just" eaLnBrk="0" fontAlgn="base" hangingPunct="0">
               <a:spcBef>
                 <a:spcPct val="0"/>
               </a:spcBef>
               <a:spcAft>
                 <a:spcPct val="0"/>
               </a:spcAft>
-              <a:buNone/>
             </a:pPr>
             <a:r>
-              <a:rPr kumimoji="0" lang="en-US" altLang="en-US" sz="2400" b="0" i="0" u="none" strike="noStrike" cap="none" normalizeH="0" baseline="0" dirty="0" smtClean="0">
-                <a:ln>
-                  <a:noFill/>
-                </a:ln>
-                <a:solidFill>
-                  <a:schemeClr val="tx1"/>
-                </a:solidFill>
-                <a:effectLst/>
-                <a:latin typeface="Arial" panose="020B0604020202020204" pitchFamily="34" charset="0"/>
-              </a:rPr>
-              <a:t>• </a:t>
-            </a:r>
-            <a:r>
-              <a:rPr kumimoji="0" lang="en-US" altLang="en-US" sz="2400" b="1" i="0" u="none" strike="noStrike" cap="none" normalizeH="0" baseline="0" dirty="0" smtClean="0">
-                <a:ln>
-                  <a:noFill/>
-                </a:ln>
-                <a:solidFill>
-                  <a:schemeClr val="tx1"/>
-                </a:solidFill>
-                <a:effectLst/>
-                <a:latin typeface="Arial" panose="020B0604020202020204" pitchFamily="34" charset="0"/>
-              </a:rPr>
-              <a:t>Sample &amp; Time:</a:t>
-            </a:r>
-            <a:r>
-              <a:rPr kumimoji="0" lang="en-US" altLang="en-US" sz="2400" b="0" i="0" u="none" strike="noStrike" cap="none" normalizeH="0" baseline="0" dirty="0" smtClean="0">
-                <a:ln>
-                  <a:noFill/>
-                </a:ln>
-                <a:solidFill>
-                  <a:schemeClr val="tx1"/>
-                </a:solidFill>
-                <a:effectLst/>
-                <a:latin typeface="Arial" panose="020B0604020202020204" pitchFamily="34" charset="0"/>
-              </a:rPr>
-              <a:t> Constraints on time and financial resources limited the sample size and the ability to cover temporary or seasonal migrants extensively.</a:t>
-            </a:r>
-          </a:p>
-          <a:p>
-            <a:pPr marL="0" lvl="0" indent="0" eaLnBrk="0" fontAlgn="base" hangingPunct="0">
-              <a:lnSpc>
-                <a:spcPct val="100000"/>
-              </a:lnSpc>
+              <a:rPr lang="en-US" altLang="en-US" sz="2400" cap="none" dirty="0" smtClean="0">
+                <a:latin typeface="Arial" panose="020B0604020202020204" pitchFamily="34" charset="0"/>
+              </a:rPr>
+              <a:t> </a:t>
+            </a:r>
+            <a:r>
+              <a:rPr lang="en-US" altLang="en-US" sz="2400" b="1" cap="none" dirty="0" smtClean="0">
+                <a:latin typeface="Arial" panose="020B0604020202020204" pitchFamily="34" charset="0"/>
+              </a:rPr>
+              <a:t>Local observations:</a:t>
+            </a:r>
+            <a:r>
+              <a:rPr lang="en-US" altLang="en-US" sz="2400" cap="none" dirty="0" smtClean="0">
+                <a:latin typeface="Arial" panose="020B0604020202020204" pitchFamily="34" charset="0"/>
+              </a:rPr>
+              <a:t> (</a:t>
+            </a:r>
+            <a:r>
+              <a:rPr lang="en-US" altLang="en-US" sz="2400" cap="none" dirty="0" err="1">
+                <a:latin typeface="Arial" panose="020B0604020202020204" pitchFamily="34" charset="0"/>
+              </a:rPr>
+              <a:t>K</a:t>
+            </a:r>
+            <a:r>
+              <a:rPr lang="en-US" altLang="en-US" sz="2400" cap="none" dirty="0" err="1" smtClean="0">
+                <a:latin typeface="Arial" panose="020B0604020202020204" pitchFamily="34" charset="0"/>
+              </a:rPr>
+              <a:t>unwar</a:t>
+            </a:r>
+            <a:r>
+              <a:rPr lang="en-US" altLang="en-US" sz="2400" cap="none" dirty="0" smtClean="0">
+                <a:latin typeface="Arial" panose="020B0604020202020204" pitchFamily="34" charset="0"/>
+              </a:rPr>
+              <a:t>, 2015; </a:t>
+            </a:r>
+            <a:r>
+              <a:rPr lang="en-US" altLang="en-US" sz="2400" cap="none" dirty="0" err="1">
+                <a:latin typeface="Arial" panose="020B0604020202020204" pitchFamily="34" charset="0"/>
+              </a:rPr>
+              <a:t>N</a:t>
+            </a:r>
+            <a:r>
+              <a:rPr lang="en-US" altLang="en-US" sz="2400" cap="none" dirty="0" err="1" smtClean="0">
+                <a:latin typeface="Arial" panose="020B0604020202020204" pitchFamily="34" charset="0"/>
+              </a:rPr>
+              <a:t>iroula</a:t>
+            </a:r>
+            <a:r>
+              <a:rPr lang="en-US" altLang="en-US" sz="2400" cap="none" dirty="0" smtClean="0">
+                <a:latin typeface="Arial" panose="020B0604020202020204" pitchFamily="34" charset="0"/>
+              </a:rPr>
+              <a:t>, 2016) show that Maoist insurgency and infrastructure development accelerated rural-to-urban movement.</a:t>
+            </a:r>
+          </a:p>
+          <a:p>
+            <a:pPr marL="0" lvl="0" indent="0" algn="just" eaLnBrk="0" fontAlgn="base" hangingPunct="0">
               <a:spcBef>
                 <a:spcPct val="0"/>
               </a:spcBef>
@@ -9551,77 +10966,7 @@
               </a:spcAft>
               <a:buNone/>
             </a:pPr>
-            <a:endParaRPr kumimoji="0" lang="en-US" altLang="en-US" sz="2400" b="0" i="0" u="none" strike="noStrike" cap="none" normalizeH="0" baseline="0" dirty="0" smtClean="0">
-              <a:ln>
-                <a:noFill/>
-              </a:ln>
-              <a:solidFill>
-                <a:schemeClr val="tx1"/>
-              </a:solidFill>
-              <a:effectLst/>
-              <a:latin typeface="Arial" panose="020B0604020202020204" pitchFamily="34" charset="0"/>
-            </a:endParaRPr>
-          </a:p>
-          <a:p>
-            <a:pPr marL="0" lvl="0" indent="0" eaLnBrk="0" fontAlgn="base" hangingPunct="0">
-              <a:lnSpc>
-                <a:spcPct val="100000"/>
-              </a:lnSpc>
-              <a:spcBef>
-                <a:spcPct val="0"/>
-              </a:spcBef>
-              <a:spcAft>
-                <a:spcPct val="0"/>
-              </a:spcAft>
-              <a:buNone/>
-            </a:pPr>
-            <a:r>
-              <a:rPr kumimoji="0" lang="en-US" altLang="en-US" sz="2400" b="0" i="0" u="none" strike="noStrike" cap="none" normalizeH="0" baseline="0" dirty="0" smtClean="0">
-                <a:ln>
-                  <a:noFill/>
-                </a:ln>
-                <a:solidFill>
-                  <a:schemeClr val="tx1"/>
-                </a:solidFill>
-                <a:effectLst/>
-                <a:latin typeface="Arial" panose="020B0604020202020204" pitchFamily="34" charset="0"/>
-              </a:rPr>
-              <a:t>• </a:t>
-            </a:r>
-            <a:r>
-              <a:rPr kumimoji="0" lang="en-US" altLang="en-US" sz="2400" b="1" i="0" u="none" strike="noStrike" cap="none" normalizeH="0" baseline="0" dirty="0" smtClean="0">
-                <a:ln>
-                  <a:noFill/>
-                </a:ln>
-                <a:solidFill>
-                  <a:schemeClr val="tx1"/>
-                </a:solidFill>
-                <a:effectLst/>
-                <a:latin typeface="Arial" panose="020B0604020202020204" pitchFamily="34" charset="0"/>
-              </a:rPr>
-              <a:t>Data Reliability:</a:t>
-            </a:r>
-            <a:r>
-              <a:rPr kumimoji="0" lang="en-US" altLang="en-US" sz="2400" b="0" i="0" u="none" strike="noStrike" cap="none" normalizeH="0" baseline="0" dirty="0" smtClean="0">
-                <a:ln>
-                  <a:noFill/>
-                </a:ln>
-                <a:solidFill>
-                  <a:schemeClr val="tx1"/>
-                </a:solidFill>
-                <a:effectLst/>
-                <a:latin typeface="Arial" panose="020B0604020202020204" pitchFamily="34" charset="0"/>
-              </a:rPr>
-              <a:t> Results depend on the honesty of respondents, who may be reluctant to share sensitive socio-economic information</a:t>
-            </a:r>
-            <a:endParaRPr kumimoji="0" lang="en-US" altLang="en-US" sz="2400" b="0" i="0" u="none" strike="noStrike" cap="none" normalizeH="0" baseline="0" dirty="0" smtClean="0">
-              <a:ln>
-                <a:noFill/>
-              </a:ln>
-              <a:solidFill>
-                <a:schemeClr val="tx1"/>
-              </a:solidFill>
-              <a:effectLst/>
+            <a:endParaRPr lang="en-US" altLang="en-US" sz="2400" cap="none" dirty="0" smtClean="0">
               <a:latin typeface="Arial" panose="020B0604020202020204" pitchFamily="34" charset="0"/>
             </a:endParaRPr>
           </a:p>
@@ -9630,7 +10975,7 @@
     </p:spTree>
     <p:extLst>
       <p:ext uri="{BB962C8B-B14F-4D97-AF65-F5344CB8AC3E}">
-        <p14:creationId xmlns:p14="http://schemas.microsoft.com/office/powerpoint/2010/main" val="86121614"/>
+        <p14:creationId xmlns:p14="http://schemas.microsoft.com/office/powerpoint/2010/main" val="1871736493"/>
       </p:ext>
     </p:extLst>
   </p:cSld>
@@ -9679,7 +11024,7 @@
           <a:p>
             <a:r>
               <a:rPr lang="en-US" b="1" dirty="0"/>
-              <a:t>Conclusion &amp; Expected Outcomes</a:t>
+              <a:t>Research Design &amp; Methodology</a:t>
             </a:r>
             <a:endParaRPr lang="en-US" dirty="0"/>
           </a:p>
@@ -9697,8 +11042,8 @@
         </p:nvSpPr>
         <p:spPr bwMode="auto">
           <a:xfrm>
-            <a:off x="838200" y="1354236"/>
-            <a:ext cx="10748058" cy="5009833"/>
+            <a:off x="838200" y="1313018"/>
+            <a:ext cx="10748058" cy="4893647"/>
           </a:xfrm>
           <a:prstGeom prst="rect">
             <a:avLst/>
@@ -9746,9 +11091,9 @@
           </a:bodyPr>
           <a:lstStyle/>
           <a:p>
-            <a:pPr marL="0" lvl="0" indent="0" eaLnBrk="0" fontAlgn="base" hangingPunct="0">
+            <a:pPr marL="0" lvl="0" indent="0" algn="just" eaLnBrk="0" fontAlgn="base" hangingPunct="0">
               <a:lnSpc>
-                <a:spcPct val="150000"/>
+                <a:spcPct val="100000"/>
               </a:lnSpc>
               <a:spcBef>
                 <a:spcPct val="0"/>
@@ -9782,7 +11127,7 @@
                 <a:effectLst/>
                 <a:latin typeface="Arial" panose="020B0604020202020204" pitchFamily="34" charset="0"/>
               </a:rPr>
-              <a:t>Framework for Planning:</a:t>
+              <a:t>Research Design:</a:t>
             </a:r>
             <a:r>
               <a:rPr kumimoji="0" lang="en-US" altLang="en-US" sz="2400" b="0" i="0" u="none" strike="noStrike" cap="none" normalizeH="0" baseline="0" dirty="0" smtClean="0">
@@ -9795,13 +11140,39 @@
                 <a:effectLst/>
                 <a:latin typeface="Arial" panose="020B0604020202020204" pitchFamily="34" charset="0"/>
               </a:rPr>
-              <a:t> The study intends to bridge the gap between macro-level migration theories and local-level realities in Ward 9.</a:t>
-            </a:r>
-          </a:p>
-          <a:p>
-            <a:pPr marL="0" lvl="0" indent="0" eaLnBrk="0" fontAlgn="base" hangingPunct="0">
+              <a:t> Employs both </a:t>
+            </a:r>
+            <a:r>
+              <a:rPr kumimoji="0" lang="en-US" altLang="en-US" sz="2400" b="1" i="0" u="none" strike="noStrike" cap="none" normalizeH="0" baseline="0" dirty="0" smtClean="0">
+                <a:ln>
+                  <a:noFill/>
+                </a:ln>
+                <a:solidFill>
+                  <a:schemeClr val="tx1"/>
+                </a:solidFill>
+                <a:effectLst/>
+                <a:latin typeface="Arial" panose="020B0604020202020204" pitchFamily="34" charset="0"/>
+              </a:rPr>
+              <a:t>descriptive and exploratory</a:t>
+            </a:r>
+            <a:r>
+              <a:rPr kumimoji="0" lang="en-US" altLang="en-US" sz="2400" b="0" i="0" u="none" strike="noStrike" cap="none" normalizeH="0" baseline="0" dirty="0" smtClean="0">
+                <a:ln>
+                  <a:noFill/>
+                </a:ln>
+                <a:solidFill>
+                  <a:schemeClr val="tx1"/>
+                </a:solidFill>
+                <a:effectLst/>
+                <a:latin typeface="Arial" panose="020B0604020202020204" pitchFamily="34" charset="0"/>
+              </a:rPr>
+              <a:t> designs to investigate the "how" and "why" of in-migration.</a:t>
+            </a:r>
+          </a:p>
+          <a:p>
+            <a:pPr marL="0" lvl="0" indent="0" algn="just" eaLnBrk="0" fontAlgn="base" hangingPunct="0">
               <a:lnSpc>
-                <a:spcPct val="150000"/>
+                <a:spcPct val="100000"/>
               </a:lnSpc>
               <a:spcBef>
                 <a:spcPct val="0"/>
@@ -9823,9 +11194,9 @@
             </a:endParaRPr>
           </a:p>
           <a:p>
-            <a:pPr marL="0" lvl="0" indent="0" eaLnBrk="0" fontAlgn="base" hangingPunct="0">
+            <a:pPr marL="0" lvl="0" indent="0" algn="just" eaLnBrk="0" fontAlgn="base" hangingPunct="0">
               <a:lnSpc>
-                <a:spcPct val="150000"/>
+                <a:spcPct val="100000"/>
               </a:lnSpc>
               <a:spcBef>
                 <a:spcPct val="0"/>
@@ -9859,8 +11230,32 @@
                 <a:effectLst/>
                 <a:latin typeface="Arial" panose="020B0604020202020204" pitchFamily="34" charset="0"/>
               </a:rPr>
-              <a:t>Integrative Approach:</a:t>
-            </a:r>
+              <a:t>Nature of Data:</a:t>
+            </a:r>
+            <a:endParaRPr kumimoji="0" lang="en-US" altLang="en-US" sz="2400" b="0" i="0" u="none" strike="noStrike" cap="none" normalizeH="0" baseline="0" dirty="0" smtClean="0">
+              <a:ln>
+                <a:noFill/>
+              </a:ln>
+              <a:solidFill>
+                <a:schemeClr val="tx1"/>
+              </a:solidFill>
+              <a:effectLst/>
+              <a:latin typeface="Arial" panose="020B0604020202020204" pitchFamily="34" charset="0"/>
+            </a:endParaRPr>
+          </a:p>
+          <a:p>
+            <a:pPr marL="0" lvl="0" indent="0" algn="just" eaLnBrk="0" fontAlgn="base" hangingPunct="0">
+              <a:lnSpc>
+                <a:spcPct val="100000"/>
+              </a:lnSpc>
+              <a:spcBef>
+                <a:spcPct val="0"/>
+              </a:spcBef>
+              <a:spcAft>
+                <a:spcPct val="0"/>
+              </a:spcAft>
+              <a:buNone/>
+            </a:pPr>
             <a:r>
               <a:rPr kumimoji="0" lang="en-US" altLang="en-US" sz="2400" b="0" i="0" u="none" strike="noStrike" cap="none" normalizeH="0" baseline="0" dirty="0" smtClean="0">
                 <a:ln>
@@ -9872,13 +11267,189 @@
                 <a:effectLst/>
                 <a:latin typeface="Arial" panose="020B0604020202020204" pitchFamily="34" charset="0"/>
               </a:rPr>
-              <a:t> By combining demographic, socio-economic, and policy perspectives, the research will provide a comprehensive view of how immigration shapes rural-urban transition.</a:t>
-            </a:r>
-          </a:p>
-          <a:p>
-            <a:pPr marL="0" lvl="0" indent="0" eaLnBrk="0" fontAlgn="base" hangingPunct="0">
+              <a:t>    ◦ </a:t>
+            </a:r>
+            <a:r>
+              <a:rPr kumimoji="0" lang="en-US" altLang="en-US" sz="2400" b="1" i="0" u="none" strike="noStrike" cap="none" normalizeH="0" baseline="0" dirty="0" smtClean="0">
+                <a:ln>
+                  <a:noFill/>
+                </a:ln>
+                <a:solidFill>
+                  <a:schemeClr val="tx1"/>
+                </a:solidFill>
+                <a:effectLst/>
+                <a:latin typeface="Arial" panose="020B0604020202020204" pitchFamily="34" charset="0"/>
+              </a:rPr>
+              <a:t>Primary:</a:t>
+            </a:r>
+            <a:r>
+              <a:rPr kumimoji="0" lang="en-US" altLang="en-US" sz="2400" b="0" i="0" u="none" strike="noStrike" cap="none" normalizeH="0" baseline="0" dirty="0" smtClean="0">
+                <a:ln>
+                  <a:noFill/>
+                </a:ln>
+                <a:solidFill>
+                  <a:schemeClr val="tx1"/>
+                </a:solidFill>
+                <a:effectLst/>
+                <a:latin typeface="Arial" panose="020B0604020202020204" pitchFamily="34" charset="0"/>
+              </a:rPr>
+              <a:t> </a:t>
+            </a:r>
+            <a:r>
+              <a:rPr kumimoji="0" lang="en-US" altLang="en-US" sz="2400" b="0" i="0" u="none" strike="noStrike" cap="none" normalizeH="0" baseline="0" dirty="0" smtClean="0">
+                <a:ln>
+                  <a:noFill/>
+                </a:ln>
+                <a:solidFill>
+                  <a:schemeClr val="tx1"/>
+                </a:solidFill>
+                <a:effectLst/>
+                <a:latin typeface="Arial" panose="020B0604020202020204" pitchFamily="34" charset="0"/>
+              </a:rPr>
+              <a:t>Collected </a:t>
+            </a:r>
+            <a:r>
+              <a:rPr kumimoji="0" lang="en-US" altLang="en-US" sz="2400" b="0" i="0" u="none" strike="noStrike" cap="none" normalizeH="0" baseline="0" dirty="0" smtClean="0">
+                <a:ln>
+                  <a:noFill/>
+                </a:ln>
+                <a:solidFill>
+                  <a:schemeClr val="tx1"/>
+                </a:solidFill>
+                <a:effectLst/>
+                <a:latin typeface="Arial" panose="020B0604020202020204" pitchFamily="34" charset="0"/>
+              </a:rPr>
+              <a:t>via field observations and interviews.</a:t>
+            </a:r>
+          </a:p>
+          <a:p>
+            <a:pPr marL="0" lvl="0" indent="0" algn="just" eaLnBrk="0" fontAlgn="base" hangingPunct="0">
               <a:lnSpc>
-                <a:spcPct val="150000"/>
+                <a:spcPct val="100000"/>
+              </a:lnSpc>
+              <a:spcBef>
+                <a:spcPct val="0"/>
+              </a:spcBef>
+              <a:spcAft>
+                <a:spcPct val="0"/>
+              </a:spcAft>
+              <a:buNone/>
+            </a:pPr>
+            <a:r>
+              <a:rPr kumimoji="0" lang="en-US" altLang="en-US" sz="2400" b="0" i="0" u="none" strike="noStrike" cap="none" normalizeH="0" baseline="0" dirty="0" smtClean="0">
+                <a:ln>
+                  <a:noFill/>
+                </a:ln>
+                <a:solidFill>
+                  <a:schemeClr val="tx1"/>
+                </a:solidFill>
+                <a:effectLst/>
+                <a:latin typeface="Arial" panose="020B0604020202020204" pitchFamily="34" charset="0"/>
+              </a:rPr>
+              <a:t>   </a:t>
+            </a:r>
+            <a:r>
+              <a:rPr kumimoji="0" lang="en-US" altLang="en-US" sz="2400" b="0" i="0" u="none" strike="noStrike" cap="none" normalizeH="0" baseline="0" dirty="0" smtClean="0">
+                <a:ln>
+                  <a:noFill/>
+                </a:ln>
+                <a:solidFill>
+                  <a:schemeClr val="tx1"/>
+                </a:solidFill>
+                <a:effectLst/>
+                <a:latin typeface="Arial" panose="020B0604020202020204" pitchFamily="34" charset="0"/>
+              </a:rPr>
+              <a:t>◦ </a:t>
+            </a:r>
+            <a:r>
+              <a:rPr kumimoji="0" lang="en-US" altLang="en-US" sz="2400" b="1" i="0" u="none" strike="noStrike" cap="none" normalizeH="0" baseline="0" dirty="0" smtClean="0">
+                <a:ln>
+                  <a:noFill/>
+                </a:ln>
+                <a:solidFill>
+                  <a:schemeClr val="tx1"/>
+                </a:solidFill>
+                <a:effectLst/>
+                <a:latin typeface="Arial" panose="020B0604020202020204" pitchFamily="34" charset="0"/>
+              </a:rPr>
+              <a:t>Secondary:</a:t>
+            </a:r>
+            <a:r>
+              <a:rPr lang="en-US" altLang="en-US" sz="2400" cap="none" dirty="0">
+                <a:latin typeface="Arial" panose="020B0604020202020204" pitchFamily="34" charset="0"/>
+              </a:rPr>
+              <a:t> </a:t>
+            </a:r>
+            <a:r>
+              <a:rPr kumimoji="0" lang="en-US" altLang="en-US" sz="2400" b="0" i="0" u="none" strike="noStrike" cap="none" normalizeH="0" baseline="0" dirty="0" smtClean="0">
+                <a:ln>
+                  <a:noFill/>
+                </a:ln>
+                <a:solidFill>
+                  <a:schemeClr val="tx1"/>
+                </a:solidFill>
+                <a:effectLst/>
+                <a:latin typeface="Arial" panose="020B0604020202020204" pitchFamily="34" charset="0"/>
+              </a:rPr>
+              <a:t>Sourced </a:t>
+            </a:r>
+            <a:r>
+              <a:rPr kumimoji="0" lang="en-US" altLang="en-US" sz="2400" b="0" i="0" u="none" strike="noStrike" cap="none" normalizeH="0" baseline="0" dirty="0" smtClean="0">
+                <a:ln>
+                  <a:noFill/>
+                </a:ln>
+                <a:solidFill>
+                  <a:schemeClr val="tx1"/>
+                </a:solidFill>
+                <a:effectLst/>
+                <a:latin typeface="Arial" panose="020B0604020202020204" pitchFamily="34" charset="0"/>
+              </a:rPr>
+              <a:t>from libraries, published articles, CBS records, and 		</a:t>
+            </a:r>
+            <a:r>
+              <a:rPr kumimoji="0" lang="en-US" altLang="en-US" sz="2400" b="0" i="0" u="none" strike="noStrike" cap="none" normalizeH="0" dirty="0" smtClean="0">
+                <a:ln>
+                  <a:noFill/>
+                </a:ln>
+                <a:solidFill>
+                  <a:schemeClr val="tx1"/>
+                </a:solidFill>
+                <a:effectLst/>
+                <a:latin typeface="Arial" panose="020B0604020202020204" pitchFamily="34" charset="0"/>
+              </a:rPr>
+              <a:t>      </a:t>
+            </a:r>
+            <a:r>
+              <a:rPr kumimoji="0" lang="en-US" altLang="en-US" sz="2400" b="0" i="0" u="none" strike="noStrike" cap="none" normalizeH="0" baseline="0" dirty="0" smtClean="0">
+                <a:ln>
+                  <a:noFill/>
+                </a:ln>
+                <a:solidFill>
+                  <a:schemeClr val="tx1"/>
+                </a:solidFill>
+                <a:effectLst/>
+                <a:latin typeface="Arial" panose="020B0604020202020204" pitchFamily="34" charset="0"/>
+              </a:rPr>
+              <a:t>municipal </a:t>
+            </a:r>
+            <a:r>
+              <a:rPr kumimoji="0" lang="en-US" altLang="en-US" sz="2400" b="0" i="0" u="none" strike="noStrike" cap="none" normalizeH="0" baseline="0" dirty="0" smtClean="0">
+                <a:ln>
+                  <a:noFill/>
+                </a:ln>
+                <a:solidFill>
+                  <a:schemeClr val="tx1"/>
+                </a:solidFill>
+                <a:effectLst/>
+                <a:latin typeface="Arial" panose="020B0604020202020204" pitchFamily="34" charset="0"/>
+              </a:rPr>
+              <a:t>documents.</a:t>
+            </a:r>
+          </a:p>
+          <a:p>
+            <a:pPr marL="0" lvl="0" indent="0" algn="just" eaLnBrk="0" fontAlgn="base" hangingPunct="0">
+              <a:lnSpc>
+                <a:spcPct val="100000"/>
               </a:lnSpc>
               <a:spcBef>
                 <a:spcPct val="0"/>
@@ -9900,9 +11471,9 @@
             </a:endParaRPr>
           </a:p>
           <a:p>
-            <a:pPr marL="0" lvl="0" indent="0" eaLnBrk="0" fontAlgn="base" hangingPunct="0">
+            <a:pPr marL="0" lvl="0" indent="0" algn="just" eaLnBrk="0" fontAlgn="base" hangingPunct="0">
               <a:lnSpc>
-                <a:spcPct val="150000"/>
+                <a:spcPct val="100000"/>
               </a:lnSpc>
               <a:spcBef>
                 <a:spcPct val="0"/>
@@ -9936,7 +11507,7 @@
                 <a:effectLst/>
                 <a:latin typeface="Arial" panose="020B0604020202020204" pitchFamily="34" charset="0"/>
               </a:rPr>
-              <a:t>Final Goal:</a:t>
+              <a:t>Study Area &amp; Population:</a:t>
             </a:r>
             <a:r>
               <a:rPr kumimoji="0" lang="en-US" altLang="en-US" sz="2400" b="0" i="0" u="none" strike="noStrike" cap="none" normalizeH="0" baseline="0" dirty="0" smtClean="0">
@@ -9949,8 +11520,48 @@
                 <a:effectLst/>
                 <a:latin typeface="Arial" panose="020B0604020202020204" pitchFamily="34" charset="0"/>
               </a:rPr>
-              <a:t> To provide evidence-based recommendations that support sustainable integration and infrastructure planning at the ward level</a:t>
-            </a:r>
+              <a:t> </a:t>
+            </a:r>
+            <a:r>
+              <a:rPr kumimoji="0" lang="en-US" altLang="en-US" sz="2400" b="0" i="0" u="none" strike="noStrike" cap="none" normalizeH="0" baseline="0" dirty="0" err="1" smtClean="0">
+                <a:ln>
+                  <a:noFill/>
+                </a:ln>
+                <a:solidFill>
+                  <a:schemeClr val="tx1"/>
+                </a:solidFill>
+                <a:effectLst/>
+                <a:latin typeface="Arial" panose="020B0604020202020204" pitchFamily="34" charset="0"/>
+              </a:rPr>
+              <a:t>Shankharapur</a:t>
+            </a:r>
+            <a:r>
+              <a:rPr kumimoji="0" lang="en-US" altLang="en-US" sz="2400" b="0" i="0" u="none" strike="noStrike" cap="none" normalizeH="0" baseline="0" dirty="0" smtClean="0">
+                <a:ln>
+                  <a:noFill/>
+                </a:ln>
+                <a:solidFill>
+                  <a:schemeClr val="tx1"/>
+                </a:solidFill>
+                <a:effectLst/>
+                <a:latin typeface="Arial" panose="020B0604020202020204" pitchFamily="34" charset="0"/>
+              </a:rPr>
+              <a:t> Municipality Ward 9, which contains 87 households selected for the study.</a:t>
+            </a:r>
+          </a:p>
+          <a:p>
+            <a:pPr marL="0" lvl="0" indent="0" algn="just" eaLnBrk="0" fontAlgn="base" hangingPunct="0">
+              <a:lnSpc>
+                <a:spcPct val="100000"/>
+              </a:lnSpc>
+              <a:spcBef>
+                <a:spcPct val="0"/>
+              </a:spcBef>
+              <a:spcAft>
+                <a:spcPct val="0"/>
+              </a:spcAft>
+              <a:buNone/>
+            </a:pPr>
             <a:endParaRPr kumimoji="0" lang="en-US" altLang="en-US" sz="2400" b="0" i="0" u="none" strike="noStrike" cap="none" normalizeH="0" baseline="0" dirty="0" smtClean="0">
               <a:ln>
                 <a:noFill/>
@@ -9962,12 +11573,117 @@
               <a:latin typeface="Arial" panose="020B0604020202020204" pitchFamily="34" charset="0"/>
             </a:endParaRPr>
           </a:p>
+          <a:p>
+            <a:pPr marL="0" lvl="0" indent="0" algn="just" eaLnBrk="0" fontAlgn="base" hangingPunct="0">
+              <a:lnSpc>
+                <a:spcPct val="100000"/>
+              </a:lnSpc>
+              <a:spcBef>
+                <a:spcPct val="0"/>
+              </a:spcBef>
+              <a:spcAft>
+                <a:spcPct val="0"/>
+              </a:spcAft>
+              <a:buNone/>
+            </a:pPr>
+            <a:r>
+              <a:rPr kumimoji="0" lang="en-US" altLang="en-US" sz="2400" b="0" i="0" u="none" strike="noStrike" cap="none" normalizeH="0" baseline="0" dirty="0" smtClean="0">
+                <a:ln>
+                  <a:noFill/>
+                </a:ln>
+                <a:solidFill>
+                  <a:schemeClr val="tx1"/>
+                </a:solidFill>
+                <a:effectLst/>
+                <a:latin typeface="Arial" panose="020B0604020202020204" pitchFamily="34" charset="0"/>
+              </a:rPr>
+              <a:t>• </a:t>
+            </a:r>
+            <a:r>
+              <a:rPr kumimoji="0" lang="en-US" altLang="en-US" sz="2400" b="1" i="0" u="none" strike="noStrike" cap="none" normalizeH="0" baseline="0" dirty="0" smtClean="0">
+                <a:ln>
+                  <a:noFill/>
+                </a:ln>
+                <a:solidFill>
+                  <a:schemeClr val="tx1"/>
+                </a:solidFill>
+                <a:effectLst/>
+                <a:latin typeface="Arial" panose="020B0604020202020204" pitchFamily="34" charset="0"/>
+              </a:rPr>
+              <a:t>Sampling Technique:</a:t>
+            </a:r>
+            <a:r>
+              <a:rPr kumimoji="0" lang="en-US" altLang="en-US" sz="2400" b="0" i="0" u="none" strike="noStrike" cap="none" normalizeH="0" baseline="0" dirty="0" smtClean="0">
+                <a:ln>
+                  <a:noFill/>
+                </a:ln>
+                <a:solidFill>
+                  <a:schemeClr val="tx1"/>
+                </a:solidFill>
+                <a:effectLst/>
+                <a:latin typeface="Arial" panose="020B0604020202020204" pitchFamily="34" charset="0"/>
+              </a:rPr>
+              <a:t> </a:t>
+            </a:r>
+            <a:r>
+              <a:rPr kumimoji="0" lang="en-US" altLang="en-US" sz="2400" b="1" i="0" u="none" strike="noStrike" cap="none" normalizeH="0" baseline="0" dirty="0" smtClean="0">
+                <a:ln>
+                  <a:noFill/>
+                </a:ln>
+                <a:solidFill>
+                  <a:schemeClr val="tx1"/>
+                </a:solidFill>
+                <a:effectLst/>
+                <a:latin typeface="Arial" panose="020B0604020202020204" pitchFamily="34" charset="0"/>
+              </a:rPr>
+              <a:t>Random sampling</a:t>
+            </a:r>
+            <a:r>
+              <a:rPr kumimoji="0" lang="en-US" altLang="en-US" sz="2400" b="0" i="0" u="none" strike="noStrike" cap="none" normalizeH="0" baseline="0" dirty="0" smtClean="0">
+                <a:ln>
+                  <a:noFill/>
+                </a:ln>
+                <a:solidFill>
+                  <a:schemeClr val="tx1"/>
+                </a:solidFill>
+                <a:effectLst/>
+                <a:latin typeface="Arial" panose="020B0604020202020204" pitchFamily="34" charset="0"/>
+              </a:rPr>
+              <a:t> was used to select the ward, while a </a:t>
+            </a:r>
+            <a:r>
+              <a:rPr kumimoji="0" lang="en-US" altLang="en-US" sz="2400" b="1" i="0" u="none" strike="noStrike" cap="none" normalizeH="0" baseline="0" dirty="0" smtClean="0">
+                <a:ln>
+                  <a:noFill/>
+                </a:ln>
+                <a:solidFill>
+                  <a:schemeClr val="tx1"/>
+                </a:solidFill>
+                <a:effectLst/>
+                <a:latin typeface="Arial" panose="020B0604020202020204" pitchFamily="34" charset="0"/>
+              </a:rPr>
+              <a:t>purposive method</a:t>
+            </a:r>
+            <a:r>
+              <a:rPr kumimoji="0" lang="en-US" altLang="en-US" sz="2400" b="0" i="0" u="none" strike="noStrike" cap="none" normalizeH="0" baseline="0" dirty="0" smtClean="0">
+                <a:ln>
+                  <a:noFill/>
+                </a:ln>
+                <a:solidFill>
+                  <a:schemeClr val="tx1"/>
+                </a:solidFill>
+                <a:effectLst/>
+                <a:latin typeface="Arial" panose="020B0604020202020204" pitchFamily="34" charset="0"/>
+              </a:rPr>
+              <a:t> will be used to draw samples from the population</a:t>
+            </a:r>
+          </a:p>
         </p:txBody>
       </p:sp>
     </p:spTree>
     <p:extLst>
       <p:ext uri="{BB962C8B-B14F-4D97-AF65-F5344CB8AC3E}">
-        <p14:creationId xmlns:p14="http://schemas.microsoft.com/office/powerpoint/2010/main" val="4217368041"/>
+        <p14:creationId xmlns:p14="http://schemas.microsoft.com/office/powerpoint/2010/main" val="1360700950"/>
       </p:ext>
     </p:extLst>
   </p:cSld>
@@ -10239,4 +11955,265 @@
     </a:ext>
   </a:extLst>
 </a:theme>
+</file>
+
+<file path=ppt/theme/theme2.xml><?xml version="1.0" encoding="utf-8"?>
+<a:theme xmlns:a="http://schemas.openxmlformats.org/drawingml/2006/main" name="Office Theme">
+  <a:themeElements>
+    <a:clrScheme name="Office">
+      <a:dk1>
+        <a:sysClr val="windowText" lastClr="000000"/>
+      </a:dk1>
+      <a:lt1>
+        <a:sysClr val="window" lastClr="FFFFFF"/>
+      </a:lt1>
+      <a:dk2>
+        <a:srgbClr val="44546A"/>
+      </a:dk2>
+      <a:lt2>
+        <a:srgbClr val="E7E6E6"/>
+      </a:lt2>
+      <a:accent1>
+        <a:srgbClr val="5B9BD5"/>
+      </a:accent1>
+      <a:accent2>
+        <a:srgbClr val="ED7D31"/>
+      </a:accent2>
+      <a:accent3>
+        <a:srgbClr val="A5A5A5"/>
+      </a:accent3>
+      <a:accent4>
+        <a:srgbClr val="FFC000"/>
+      </a:accent4>
+      <a:accent5>
+        <a:srgbClr val="4472C4"/>
+      </a:accent5>
+      <a:accent6>
+        <a:srgbClr val="70AD47"/>
+      </a:accent6>
+      <a:hlink>
+        <a:srgbClr val="0563C1"/>
+      </a:hlink>
+      <a:folHlink>
+        <a:srgbClr val="954F72"/>
+      </a:folHlink>
+    </a:clrScheme>
+    <a:fontScheme name="Office">
+      <a:majorFont>
+        <a:latin typeface="Calibri Light" panose="020F0302020204030204"/>
+        <a:ea typeface=""/>
+        <a:cs typeface=""/>
+        <a:font script="Jpan" typeface="游ゴシック Light"/>
+        <a:font script="Hang" typeface="맑은 고딕"/>
+        <a:font script="Hans" typeface="等线 Light"/>
+        <a:font script="Hant" typeface="新細明體"/>
+        <a:font script="Arab" typeface="Times New Roman"/>
+        <a:font script="Hebr" typeface="Times New Roman"/>
+        <a:font script="Thai" typeface="Angsana New"/>
+        <a:font script="Ethi" typeface="Nyala"/>
+        <a:font script="Beng" typeface="Vrinda"/>
+        <a:font script="Gujr" typeface="Shruti"/>
+        <a:font script="Khmr" typeface="MoolBoran"/>
+        <a:font script="Knda" typeface="Tunga"/>
+        <a:font script="Guru" typeface="Raavi"/>
+        <a:font script="Cans" typeface="Euphemia"/>
+        <a:font script="Cher" typeface="Plantagenet Cherokee"/>
+        <a:font script="Yiii" typeface="Microsoft Yi Baiti"/>
+        <a:font script="Tibt" typeface="Microsoft Himalaya"/>
+        <a:font script="Thaa" typeface="MV Boli"/>
+        <a:font script="Deva" typeface="Mangal"/>
+        <a:font script="Telu" typeface="Gautami"/>
+        <a:font script="Taml" typeface="Latha"/>
+        <a:font script="Syrc" typeface="Estrangelo Edessa"/>
+        <a:font script="Orya" typeface="Kalinga"/>
+        <a:font script="Mlym" typeface="Kartika"/>
+        <a:font script="Laoo" typeface="DokChampa"/>
+        <a:font script="Sinh" typeface="Iskoola Pota"/>
+        <a:font script="Mong" typeface="Mongolian Baiti"/>
+        <a:font script="Viet" typeface="Times New Roman"/>
+        <a:font script="Uigh" typeface="Microsoft Uighur"/>
+        <a:font script="Geor" typeface="Sylfaen"/>
+      </a:majorFont>
+      <a:minorFont>
+        <a:latin typeface="Calibri" panose="020F0502020204030204"/>
+        <a:ea typeface=""/>
+        <a:cs typeface=""/>
+        <a:font script="Jpan" typeface="游ゴシック"/>
+        <a:font script="Hang" typeface="맑은 고딕"/>
+        <a:font script="Hans" typeface="等线"/>
+        <a:font script="Hant" typeface="新細明體"/>
+        <a:font script="Arab" typeface="Arial"/>
+        <a:font script="Hebr" typeface="Arial"/>
+        <a:font script="Thai" typeface="Cordia New"/>
+        <a:font script="Ethi" typeface="Nyala"/>
+        <a:font script="Beng" typeface="Vrinda"/>
+        <a:font script="Gujr" typeface="Shruti"/>
+        <a:font script="Khmr" typeface="DaunPenh"/>
+        <a:font script="Knda" typeface="Tunga"/>
+        <a:font script="Guru" typeface="Raavi"/>
+        <a:font script="Cans" typeface="Euphemia"/>
+        <a:font script="Cher" typeface="Plantagenet Cherokee"/>
+        <a:font script="Yiii" typeface="Microsoft Yi Baiti"/>
+        <a:font script="Tibt" typeface="Microsoft Himalaya"/>
+        <a:font script="Thaa" typeface="MV Boli"/>
+        <a:font script="Deva" typeface="Mangal"/>
+        <a:font script="Telu" typeface="Gautami"/>
+        <a:font script="Taml" typeface="Latha"/>
+        <a:font script="Syrc" typeface="Estrangelo Edessa"/>
+        <a:font script="Orya" typeface="Kalinga"/>
+        <a:font script="Mlym" typeface="Kartika"/>
+        <a:font script="Laoo" typeface="DokChampa"/>
+        <a:font script="Sinh" typeface="Iskoola Pota"/>
+        <a:font script="Mong" typeface="Mongolian Baiti"/>
+        <a:font script="Viet" typeface="Arial"/>
+        <a:font script="Uigh" typeface="Microsoft Uighur"/>
+        <a:font script="Geor" typeface="Sylfaen"/>
+      </a:minorFont>
+    </a:fontScheme>
+    <a:fmtScheme name="Office">
+      <a:fillStyleLst>
+        <a:solidFill>
+          <a:schemeClr val="phClr"/>
+        </a:solidFill>
+        <a:gradFill rotWithShape="1">
+          <a:gsLst>
+            <a:gs pos="0">
+              <a:schemeClr val="phClr">
+                <a:lumMod val="110000"/>
+                <a:satMod val="105000"/>
+                <a:tint val="67000"/>
+              </a:schemeClr>
+            </a:gs>
+            <a:gs pos="50000">
+              <a:schemeClr val="phClr">
+                <a:lumMod val="105000"/>
+                <a:satMod val="103000"/>
+                <a:tint val="73000"/>
+              </a:schemeClr>
+            </a:gs>
+            <a:gs pos="100000">
+              <a:schemeClr val="phClr">
+                <a:lumMod val="105000"/>
+                <a:satMod val="109000"/>
+                <a:tint val="81000"/>
+              </a:schemeClr>
+            </a:gs>
+          </a:gsLst>
+          <a:lin ang="5400000" scaled="0"/>
+        </a:gradFill>
+        <a:gradFill rotWithShape="1">
+          <a:gsLst>
+            <a:gs pos="0">
+              <a:schemeClr val="phClr">
+                <a:satMod val="103000"/>
+                <a:lumMod val="102000"/>
+                <a:tint val="94000"/>
+              </a:schemeClr>
+            </a:gs>
+            <a:gs pos="50000">
+              <a:schemeClr val="phClr">
+                <a:satMod val="110000"/>
+                <a:lumMod val="100000"/>
+                <a:shade val="100000"/>
+              </a:schemeClr>
+            </a:gs>
+            <a:gs pos="100000">
+              <a:schemeClr val="phClr">
+                <a:lumMod val="99000"/>
+                <a:satMod val="120000"/>
+                <a:shade val="78000"/>
+              </a:schemeClr>
+            </a:gs>
+          </a:gsLst>
+          <a:lin ang="5400000" scaled="0"/>
+        </a:gradFill>
+      </a:fillStyleLst>
+      <a:lnStyleLst>
+        <a:ln w="6350" cap="flat" cmpd="sng" algn="ctr">
+          <a:solidFill>
+            <a:schemeClr val="phClr"/>
+          </a:solidFill>
+          <a:prstDash val="solid"/>
+          <a:miter lim="800000"/>
+        </a:ln>
+        <a:ln w="12700" cap="flat" cmpd="sng" algn="ctr">
+          <a:solidFill>
+            <a:schemeClr val="phClr"/>
+          </a:solidFill>
+          <a:prstDash val="solid"/>
+          <a:miter lim="800000"/>
+        </a:ln>
+        <a:ln w="19050" cap="flat" cmpd="sng" algn="ctr">
+          <a:solidFill>
+            <a:schemeClr val="phClr"/>
+          </a:solidFill>
+          <a:prstDash val="solid"/>
+          <a:miter lim="800000"/>
+        </a:ln>
+      </a:lnStyleLst>
+      <a:effectStyleLst>
+        <a:effectStyle>
+          <a:effectLst/>
+        </a:effectStyle>
+        <a:effectStyle>
+          <a:effectLst/>
+        </a:effectStyle>
+        <a:effectStyle>
+          <a:effectLst>
+            <a:outerShdw blurRad="57150" dist="19050" dir="5400000" algn="ctr" rotWithShape="0">
+              <a:srgbClr val="000000">
+                <a:alpha val="63000"/>
+              </a:srgbClr>
+            </a:outerShdw>
+          </a:effectLst>
+        </a:effectStyle>
+      </a:effectStyleLst>
+      <a:bgFillStyleLst>
+        <a:solidFill>
+          <a:schemeClr val="phClr"/>
+        </a:solidFill>
+        <a:solidFill>
+          <a:schemeClr val="phClr">
+            <a:tint val="95000"/>
+            <a:satMod val="170000"/>
+          </a:schemeClr>
+        </a:solidFill>
+        <a:gradFill rotWithShape="1">
+          <a:gsLst>
+            <a:gs pos="0">
+              <a:schemeClr val="phClr">
+                <a:tint val="93000"/>
+                <a:satMod val="150000"/>
+                <a:shade val="98000"/>
+                <a:lumMod val="102000"/>
+              </a:schemeClr>
+            </a:gs>
+            <a:gs pos="50000">
+              <a:schemeClr val="phClr">
+                <a:tint val="98000"/>
+                <a:satMod val="130000"/>
+                <a:shade val="90000"/>
+                <a:lumMod val="103000"/>
+              </a:schemeClr>
+            </a:gs>
+            <a:gs pos="100000">
+              <a:schemeClr val="phClr">
+                <a:shade val="63000"/>
+                <a:satMod val="120000"/>
+              </a:schemeClr>
+            </a:gs>
+          </a:gsLst>
+          <a:lin ang="5400000" scaled="0"/>
+        </a:gradFill>
+      </a:bgFillStyleLst>
+    </a:fmtScheme>
+  </a:themeElements>
+  <a:objectDefaults/>
+  <a:extraClrSchemeLst/>
+  <a:extLst>
+    <a:ext uri="{05A4C25C-085E-4340-85A3-A5531E510DB2}">
+      <thm15:themeFamily xmlns:thm15="http://schemas.microsoft.com/office/thememl/2012/main" name="Office Theme" id="{62F939B6-93AF-4DB8-9C6B-D6C7DFDC589F}" vid="{4A3C46E8-61CC-4603-A589-7422A47A8E4A}"/>
+    </a:ext>
+  </a:extLst>
+</a:theme>
 </file>